--- a/decks/saying-no-without-losing-your-friends-lesson-v2.pptx
+++ b/decks/saying-no-without-losing-your-friends-lesson-v2.pptx
@@ -19,6 +19,7 @@
     <p:sldId id="267" r:id="rId19"/>
     <p:sldId id="268" r:id="rId20"/>
     <p:sldId id="269" r:id="rId21"/>
+    <p:sldId id="270" r:id="rId22"/>
   </p:sldIdLst>
   <p:sldSz cx="12192000" cy="6858000" type="screen4x3"/>
   <p:notesSz cx="6858000" cy="9144000"/>
@@ -515,7 +516,7 @@
           <a:lstStyle/>
           <a:p>
             <a:r>
-              <a:t>This page and the next three are hidden. They stay in the deck for you and are skipped when you present.</a:t>
+              <a:t>This page is hidden and skipped when you present. The full plan, care notes and research are on the hidden pages at the end of the deck, if you want them.</a:t>
             </a:r>
           </a:p>
         </p:txBody>
@@ -656,6 +657,76 @@
           <a:p>
             <a:r>
               <a:t>4 MINUTES. Private reflection; nobody collects it. Some students will write about parties, some about rides, some about schoolwork or group chats. All count. Share the BVR Diner link on the slide (post it on your class page too). It has the core skills, ways to say no, the code-word plan, a private check-in and who to talk to.</a:t>
+            </a:r>
+          </a:p>
+        </p:txBody>
+      </p:sp>
+      <p:sp>
+        <p:nvSpPr>
+          <p:cNvPr id="4" name="Slide Number Placeholder 3"/>
+          <p:cNvSpPr>
+            <a:spLocks noGrp="1"/>
+          </p:cNvSpPr>
+          <p:nvPr>
+            <p:ph type="sldNum" idx="5" sz="quarter"/>
+          </p:nvPr>
+        </p:nvSpPr>
+        <p:spPr/>
+      </p:sp>
+    </p:spTree>
+  </p:cSld>
+  <p:clrMapOvr>
+    <a:masterClrMapping/>
+  </p:clrMapOvr>
+</p:notes>
+</file>
+
+<file path=ppt/notesSlides/notesSlide12.xml><?xml version="1.0" encoding="utf-8"?>
+<p:notes xmlns:a="http://schemas.openxmlformats.org/drawingml/2006/main" xmlns:p="http://schemas.openxmlformats.org/presentationml/2006/main" xmlns:r="http://schemas.openxmlformats.org/officeDocument/2006/relationships">
+  <p:cSld>
+    <p:spTree>
+      <p:nvGrpSpPr>
+        <p:cNvPr id="1" name=""/>
+        <p:cNvGrpSpPr/>
+        <p:nvPr/>
+      </p:nvGrpSpPr>
+      <p:grpSpPr>
+        <a:xfrm>
+          <a:off x="0" y="0"/>
+          <a:ext cx="0" cy="0"/>
+          <a:chOff x="0" y="0"/>
+          <a:chExt cx="0" cy="0"/>
+        </a:xfrm>
+      </p:grpSpPr>
+      <p:sp>
+        <p:nvSpPr>
+          <p:cNvPr id="2" name="Slide Image Placeholder 1"/>
+          <p:cNvSpPr>
+            <a:spLocks noGrp="1"/>
+          </p:cNvSpPr>
+          <p:nvPr>
+            <p:ph type="sldImg" idx="2"/>
+          </p:nvPr>
+        </p:nvSpPr>
+        <p:spPr/>
+      </p:sp>
+      <p:sp>
+        <p:nvSpPr>
+          <p:cNvPr id="3" name="Notes Placeholder 2"/>
+          <p:cNvSpPr>
+            <a:spLocks noGrp="1"/>
+          </p:cNvSpPr>
+          <p:nvPr>
+            <p:ph type="body" idx="3" sz="quarter"/>
+          </p:nvPr>
+        </p:nvSpPr>
+        <p:spPr/>
+        <p:txBody>
+          <a:bodyPr/>
+          <a:lstStyle/>
+          <a:p>
+            <a:r>
+              <a:t>If you want more: this page and the next three are hidden and skipped when you present.</a:t>
             </a:r>
           </a:p>
         </p:txBody>
@@ -4307,7 +4378,7 @@
                 </a:solidFill>
                 <a:latin typeface="Inter Tight"/>
               </a:rPr>
-              <a:t>TEACHER PAGE  ·  skipped when you present  ·  Lesson plan</a:t>
+              <a:t>TEACHER PAGE  ·  skipped when you present  ·  Before you start</a:t>
             </a:r>
           </a:p>
         </p:txBody>
@@ -4398,8 +4469,8 @@
         </p:nvSpPr>
         <p:spPr>
           <a:xfrm>
-            <a:off x="548640" y="1828800"/>
-            <a:ext cx="5120640" cy="4389120"/>
+            <a:off x="548640" y="2011680"/>
+            <a:ext cx="11064240" cy="4206240"/>
           </a:xfrm>
           <a:prstGeom prst="rect">
             <a:avLst/>
@@ -4414,43 +4485,43 @@
           <a:p>
             <a:pPr algn="l">
               <a:spcAft>
-                <a:spcPts val="675"/>
-              </a:spcAft>
-            </a:pPr>
-            <a:r>
-              <a:rPr sz="1100" b="1" i="0">
+                <a:spcPts val="810"/>
+              </a:spcAft>
+            </a:pPr>
+            <a:r>
+              <a:rPr sz="1200" b="1" i="0">
                 <a:solidFill>
                   <a:srgbClr val="0B2D5B"/>
                 </a:solidFill>
                 <a:latin typeface="Inter Tight"/>
               </a:rPr>
-              <a:t>GOAL</a:t>
-            </a:r>
-          </a:p>
-          <a:p>
-            <a:pPr algn="l">
-              <a:spcAft>
-                <a:spcPts val="675"/>
-              </a:spcAft>
-            </a:pPr>
-            <a:r>
-              <a:rPr sz="1500" b="0" i="0">
+              <a:t>BEFORE YOU START</a:t>
+            </a:r>
+          </a:p>
+          <a:p>
+            <a:pPr algn="l">
+              <a:spcAft>
+                <a:spcPts val="810"/>
+              </a:spcAft>
+            </a:pPr>
+            <a:r>
+              <a:rPr sz="1800" b="0" i="0">
                 <a:solidFill>
                   <a:srgbClr val="1C1B19"/>
                 </a:solidFill>
                 <a:latin typeface="Source Serif 4"/>
               </a:rPr>
-              <a:t>Students can explain why no feels harder with friends watching (the reward signal gets louder, the brakes still work), notice that most peers are less into risky plans than they look, and practice a short no, a swap and a code-word exit. The skill is planning ahead. Nobody should feel judged for a yes they already said.</a:t>
-            </a:r>
-          </a:p>
-          <a:p>
-            <a:pPr algn="l">
-              <a:spcAft>
-                <a:spcPts val="675"/>
-              </a:spcAft>
-            </a:pPr>
-            <a:r>
-              <a:rPr sz="1500" b="0" i="0">
+              <a:t>Students learn why no feels harder with friends watching, that most peers are less into risky plans than they look, and practice a short no, a swap and a code-word exit. Bring index cards, don't ask about anyone's use, and say "an adult you trust" since home may not be the safe call.</a:t>
+            </a:r>
+          </a:p>
+          <a:p>
+            <a:pPr algn="l">
+              <a:spcAft>
+                <a:spcPts val="810"/>
+              </a:spcAft>
+            </a:pPr>
+            <a:r>
+              <a:rPr sz="1800" b="0" i="0">
                 <a:solidFill>
                   <a:srgbClr val="1C1B19"/>
                 </a:solidFill>
@@ -4462,321 +4533,75 @@
           <a:p>
             <a:pPr algn="l">
               <a:spcAft>
-                <a:spcPts val="675"/>
-              </a:spcAft>
-            </a:pPr>
-            <a:r>
-              <a:rPr sz="1100" b="1" i="0">
+                <a:spcPts val="810"/>
+              </a:spcAft>
+            </a:pPr>
+            <a:r>
+              <a:rPr sz="1200" b="1" i="0">
                 <a:solidFill>
                   <a:srgbClr val="0B2D5B"/>
                 </a:solidFill>
                 <a:latin typeface="Inter Tight"/>
               </a:rPr>
-              <a:t>MATERIALS</a:t>
-            </a:r>
-          </a:p>
-          <a:p>
-            <a:pPr algn="l">
-              <a:spcAft>
-                <a:spcPts val="675"/>
-              </a:spcAft>
-            </a:pPr>
-            <a:r>
-              <a:rPr sz="1500" b="0" i="0">
+              <a:t>EVERY STUDENT IN THE ROOM</a:t>
+            </a:r>
+          </a:p>
+          <a:p>
+            <a:pPr algn="l">
+              <a:spcAft>
+                <a:spcPts val="810"/>
+              </a:spcAft>
+            </a:pPr>
+            <a:r>
+              <a:rPr sz="1800" b="0" i="0">
                 <a:solidFill>
                   <a:srgbClr val="1C1B19"/>
                 </a:solidFill>
                 <a:latin typeface="Source Serif 4"/>
               </a:rPr>
-              <a:t>Index cards for the opening guess, one per student</a:t>
-            </a:r>
-          </a:p>
-          <a:p>
-            <a:pPr algn="l">
-              <a:spcAft>
-                <a:spcPts val="675"/>
-              </a:spcAft>
-            </a:pPr>
-            <a:r>
-              <a:rPr sz="1500" b="0" i="0">
+              <a:t>"My parents would never" and faith are real reasons, families draw different lines, and not everyone has a ride, so the train or another family's driver counts.</a:t>
+            </a:r>
+          </a:p>
+          <a:p>
+            <a:pPr algn="l">
+              <a:spcAft>
+                <a:spcPts val="810"/>
+              </a:spcAft>
+            </a:pPr>
+            <a:r>
+              <a:rPr sz="1800" b="0" i="0">
                 <a:solidFill>
                   <a:srgbClr val="1C1B19"/>
                 </a:solidFill>
                 <a:latin typeface="Source Serif 4"/>
               </a:rPr>
-              <a:t>Scrap paper for the private code-word plan and exit card</a:t>
-            </a:r>
-          </a:p>
-          <a:p>
-            <a:pPr algn="l">
-              <a:spcAft>
-                <a:spcPts val="675"/>
-              </a:spcAft>
-            </a:pPr>
-            <a:r>
-              <a:rPr sz="1500" b="0" i="0">
-                <a:solidFill>
-                  <a:srgbClr val="1C1B19"/>
-                </a:solidFill>
-                <a:latin typeface="Source Serif 4"/>
-              </a:rPr>
-              <a:t>The BVR Diner page link (last slide) to share after class</a:t>
-            </a:r>
-          </a:p>
-        </p:txBody>
-      </p:sp>
-      <p:sp>
-        <p:nvSpPr>
-          <p:cNvPr id="7" name="TextBox 6"/>
-          <p:cNvSpPr txBox="1"/>
-          <p:nvPr/>
-        </p:nvSpPr>
-        <p:spPr>
-          <a:xfrm>
-            <a:off x="6126480" y="1828800"/>
-            <a:ext cx="5486400" cy="4389120"/>
-          </a:xfrm>
-          <a:prstGeom prst="rect">
-            <a:avLst/>
-          </a:prstGeom>
-          <a:noFill/>
-        </p:spPr>
-        <p:txBody>
-          <a:bodyPr wrap="square" anchor="t" lIns="0" rIns="0" tIns="0" bIns="0">
-            <a:spAutoFit/>
-          </a:bodyPr>
-          <a:lstStyle/>
-          <a:p>
-            <a:pPr algn="l">
-              <a:spcAft>
-                <a:spcPts val="630"/>
-              </a:spcAft>
-            </a:pPr>
-            <a:r>
-              <a:rPr sz="1100" b="1" i="0">
+              <a:t/>
+            </a:r>
+          </a:p>
+          <a:p>
+            <a:pPr algn="l">
+              <a:spcAft>
+                <a:spcPts val="810"/>
+              </a:spcAft>
+            </a:pPr>
+            <a:r>
+              <a:rPr sz="1200" b="1" i="0">
                 <a:solidFill>
                   <a:srgbClr val="0B2D5B"/>
                 </a:solidFill>
                 <a:latin typeface="Inter Tight"/>
               </a:rPr>
-              <a:t>FLOW</a:t>
-            </a:r>
-          </a:p>
-          <a:p>
-            <a:pPr algn="l">
-              <a:spcAft>
-                <a:spcPts val="630"/>
-              </a:spcAft>
-            </a:pPr>
-            <a:r>
-              <a:rPr sz="1300" b="1" i="0">
-                <a:solidFill>
-                  <a:srgbClr val="F47B20"/>
-                </a:solidFill>
-                <a:latin typeface="Inter Tight"/>
-              </a:rPr>
-              <a:t>5 min   </a:t>
-            </a:r>
-            <a:r>
-              <a:rPr sz="1400" b="0" i="0">
-                <a:solidFill>
-                  <a:srgbClr val="1C1B19"/>
-                </a:solidFill>
-                <a:latin typeface="Source Serif 4"/>
-              </a:rPr>
-              <a:t>The guess (anonymous tally)</a:t>
-            </a:r>
-          </a:p>
-          <a:p>
-            <a:pPr algn="l">
-              <a:spcAft>
-                <a:spcPts val="630"/>
-              </a:spcAft>
-            </a:pPr>
-            <a:r>
-              <a:rPr sz="1300" b="1" i="0">
-                <a:solidFill>
-                  <a:srgbClr val="F47B20"/>
-                </a:solidFill>
-                <a:latin typeface="Inter Tight"/>
-              </a:rPr>
-              <a:t>8 min   </a:t>
-            </a:r>
-            <a:r>
-              <a:rPr sz="1400" b="0" i="0">
-                <a:solidFill>
-                  <a:srgbClr val="1C1B19"/>
-                </a:solidFill>
-                <a:latin typeface="Source Serif 4"/>
-              </a:rPr>
-              <a:t>Gas and brakes: what friends do to the brain</a:t>
-            </a:r>
-          </a:p>
-          <a:p>
-            <a:pPr algn="l">
-              <a:spcAft>
-                <a:spcPts val="630"/>
-              </a:spcAft>
-            </a:pPr>
-            <a:r>
-              <a:rPr sz="1300" b="1" i="0">
-                <a:solidFill>
-                  <a:srgbClr val="F47B20"/>
-                </a:solidFill>
-                <a:latin typeface="Inter Tight"/>
-              </a:rPr>
-              <a:t>5 min   </a:t>
-            </a:r>
-            <a:r>
-              <a:rPr sz="1400" b="0" i="0">
-                <a:solidFill>
-                  <a:srgbClr val="1C1B19"/>
-                </a:solidFill>
-                <a:latin typeface="Source Serif 4"/>
-              </a:rPr>
-              <a:t>Make the call before the moment</a:t>
-            </a:r>
-          </a:p>
-          <a:p>
-            <a:pPr algn="l">
-              <a:spcAft>
-                <a:spcPts val="630"/>
-              </a:spcAft>
-            </a:pPr>
-            <a:r>
-              <a:rPr sz="1300" b="1" i="0">
-                <a:solidFill>
-                  <a:srgbClr val="F47B20"/>
-                </a:solidFill>
-                <a:latin typeface="Inter Tight"/>
-              </a:rPr>
-              <a:t>7 min   </a:t>
-            </a:r>
-            <a:r>
-              <a:rPr sz="1400" b="0" i="0">
-                <a:solidFill>
-                  <a:srgbClr val="1C1B19"/>
-                </a:solidFill>
-                <a:latin typeface="Source Serif 4"/>
-              </a:rPr>
-              <a:t>Say it out loud (pairs)</a:t>
-            </a:r>
-          </a:p>
-          <a:p>
-            <a:pPr algn="l">
-              <a:spcAft>
-                <a:spcPts val="630"/>
-              </a:spcAft>
-            </a:pPr>
-            <a:r>
-              <a:rPr sz="1300" b="1" i="0">
-                <a:solidFill>
-                  <a:srgbClr val="F47B20"/>
-                </a:solidFill>
-                <a:latin typeface="Inter Tight"/>
-              </a:rPr>
-              <a:t>10 min   </a:t>
-            </a:r>
-            <a:r>
-              <a:rPr sz="1400" b="0" i="0">
-                <a:solidFill>
-                  <a:srgbClr val="1C1B19"/>
-                </a:solidFill>
-                <a:latin typeface="Source Serif 4"/>
-              </a:rPr>
-              <a:t>Three moments (small groups)</a:t>
-            </a:r>
-          </a:p>
-          <a:p>
-            <a:pPr algn="l">
-              <a:spcAft>
-                <a:spcPts val="630"/>
-              </a:spcAft>
-            </a:pPr>
-            <a:r>
-              <a:rPr sz="1300" b="1" i="0">
-                <a:solidFill>
-                  <a:srgbClr val="F47B20"/>
-                </a:solidFill>
-                <a:latin typeface="Inter Tight"/>
-              </a:rPr>
-              <a:t>6 min   </a:t>
-            </a:r>
-            <a:r>
-              <a:rPr sz="1400" b="0" i="0">
-                <a:solidFill>
-                  <a:srgbClr val="1C1B19"/>
-                </a:solidFill>
-                <a:latin typeface="Source Serif 4"/>
-              </a:rPr>
-              <a:t>A way out, and when to get help right away</a:t>
-            </a:r>
-          </a:p>
-          <a:p>
-            <a:pPr algn="l">
-              <a:spcAft>
-                <a:spcPts val="630"/>
-              </a:spcAft>
-            </a:pPr>
-            <a:r>
-              <a:rPr sz="1300" b="1" i="0">
-                <a:solidFill>
-                  <a:srgbClr val="F47B20"/>
-                </a:solidFill>
-                <a:latin typeface="Inter Tight"/>
-              </a:rPr>
-              <a:t>4 min   </a:t>
-            </a:r>
-            <a:r>
-              <a:rPr sz="1400" b="0" i="0">
-                <a:solidFill>
-                  <a:srgbClr val="1C1B19"/>
-                </a:solidFill>
-                <a:latin typeface="Source Serif 4"/>
-              </a:rPr>
-              <a:t>Exit card and the BVR Diner link</a:t>
-            </a:r>
-          </a:p>
-          <a:p>
-            <a:pPr algn="l">
-              <a:spcAft>
-                <a:spcPts val="630"/>
-              </a:spcAft>
-            </a:pPr>
-            <a:r>
-              <a:rPr sz="1400" b="0" i="0">
-                <a:solidFill>
-                  <a:srgbClr val="1C1B19"/>
-                </a:solidFill>
-                <a:latin typeface="Source Serif 4"/>
-              </a:rPr>
-              <a:t/>
-            </a:r>
-          </a:p>
-          <a:p>
-            <a:pPr algn="l">
-              <a:spcAft>
-                <a:spcPts val="630"/>
-              </a:spcAft>
-            </a:pPr>
-            <a:r>
-              <a:rPr sz="1100" b="1" i="0">
-                <a:solidFill>
-                  <a:srgbClr val="0B2D5B"/>
-                </a:solidFill>
-                <a:latin typeface="Inter Tight"/>
-              </a:rPr>
               <a:t>SHORT ON TIME (20-MINUTE ADVISORY)</a:t>
             </a:r>
           </a:p>
           <a:p>
             <a:pPr algn="l">
               <a:spcAft>
-                <a:spcPts val="630"/>
-              </a:spcAft>
-            </a:pPr>
-            <a:r>
-              <a:rPr sz="1400" b="0" i="0">
+                <a:spcPts val="810"/>
+              </a:spcAft>
+            </a:pPr>
+            <a:r>
+              <a:rPr sz="1800" b="0" i="0">
                 <a:solidFill>
                   <a:srgbClr val="1C1B19"/>
                 </a:solidFill>
@@ -4891,7 +4716,7 @@
                 </a:solidFill>
                 <a:latin typeface="Inter Tight"/>
               </a:rPr>
-              <a:t>SAY IT OUT LOUD</a:t>
+              <a:t>GET HELP RIGHT AWAY</a:t>
             </a:r>
           </a:p>
         </p:txBody>
@@ -4944,7 +4769,7 @@
         <p:spPr>
           <a:xfrm>
             <a:off x="822960" y="1005840"/>
-            <a:ext cx="10515600" cy="914400"/>
+            <a:ext cx="10515600" cy="1097280"/>
           </a:xfrm>
           <a:prstGeom prst="rect">
             <a:avLst/>
@@ -4959,77 +4784,31 @@
           <a:p>
             <a:pPr algn="l">
               <a:spcAft>
-                <a:spcPts val="1530"/>
-              </a:spcAft>
-            </a:pPr>
-            <a:r>
-              <a:rPr sz="3400" b="1" i="0">
+                <a:spcPts val="1620"/>
+              </a:spcAft>
+            </a:pPr>
+            <a:r>
+              <a:rPr sz="3600" b="1" i="0">
                 <a:solidFill>
                   <a:srgbClr val="1C1B19"/>
                 </a:solidFill>
                 <a:latin typeface="Source Serif 4"/>
               </a:rPr>
-              <a:t>"Nah, I'm good" is a full answer.</a:t>
-            </a:r>
-          </a:p>
-        </p:txBody>
-      </p:sp>
-      <p:sp>
-        <p:nvSpPr>
-          <p:cNvPr id="6" name="Rectangle 5"/>
-          <p:cNvSpPr/>
-          <p:nvPr/>
-        </p:nvSpPr>
-        <p:spPr>
-          <a:xfrm>
-            <a:off x="822960" y="2103120"/>
-            <a:ext cx="5120640" cy="3931920"/>
-          </a:xfrm>
-          <a:prstGeom prst="rect">
-            <a:avLst/>
-          </a:prstGeom>
-          <a:solidFill>
-            <a:srgbClr val="FFFFFF"/>
-          </a:solidFill>
-          <a:ln w="15875">
-            <a:solidFill>
-              <a:srgbClr val="D8D2C6"/>
-            </a:solidFill>
-          </a:ln>
-          <a:effectLst/>
-        </p:spPr>
-        <p:style>
-          <a:lnRef idx="1">
-            <a:schemeClr val="accent1"/>
-          </a:lnRef>
-          <a:fillRef idx="3">
-            <a:schemeClr val="accent1"/>
-          </a:fillRef>
-          <a:effectRef idx="2">
-            <a:schemeClr val="accent1"/>
-          </a:effectRef>
-          <a:fontRef idx="minor">
-            <a:schemeClr val="lt1"/>
-          </a:fontRef>
-        </p:style>
-        <p:txBody>
-          <a:bodyPr rtlCol="0" anchor="ctr"/>
-          <a:lstStyle/>
-          <a:p>
-            <a:pPr algn="ctr"/>
-          </a:p>
-        </p:txBody>
-      </p:sp>
-      <p:sp>
-        <p:nvSpPr>
-          <p:cNvPr id="7" name="TextBox 6"/>
+              <a:t>Some moments need an adult now.</a:t>
+            </a:r>
+          </a:p>
+        </p:txBody>
+      </p:sp>
+      <p:sp>
+        <p:nvSpPr>
+          <p:cNvPr id="6" name="TextBox 5"/>
           <p:cNvSpPr txBox="1"/>
           <p:nvPr/>
         </p:nvSpPr>
         <p:spPr>
           <a:xfrm>
-            <a:off x="1097280" y="2286000"/>
-            <a:ext cx="4572000" cy="457200"/>
+            <a:off x="822960" y="2194560"/>
+            <a:ext cx="548640" cy="1005840"/>
           </a:xfrm>
           <a:prstGeom prst="rect">
             <a:avLst/>
@@ -5044,31 +4823,31 @@
           <a:p>
             <a:pPr algn="l">
               <a:spcAft>
-                <a:spcPts val="585"/>
-              </a:spcAft>
-            </a:pPr>
-            <a:r>
-              <a:rPr sz="1300" b="1" i="0">
-                <a:solidFill>
-                  <a:srgbClr val="0B2D5B"/>
-                </a:solidFill>
-                <a:latin typeface="Inter Tight"/>
-              </a:rPr>
-              <a:t>SIMPLE</a:t>
-            </a:r>
-          </a:p>
-        </p:txBody>
-      </p:sp>
-      <p:sp>
-        <p:nvSpPr>
-          <p:cNvPr id="8" name="TextBox 7"/>
+                <a:spcPts val="1170"/>
+              </a:spcAft>
+            </a:pPr>
+            <a:r>
+              <a:rPr sz="2600" b="1" i="0">
+                <a:solidFill>
+                  <a:srgbClr val="F47B20"/>
+                </a:solidFill>
+                <a:latin typeface="Source Serif 4"/>
+              </a:rPr>
+              <a:t>•</a:t>
+            </a:r>
+          </a:p>
+        </p:txBody>
+      </p:sp>
+      <p:sp>
+        <p:nvSpPr>
+          <p:cNvPr id="7" name="TextBox 6"/>
           <p:cNvSpPr txBox="1"/>
           <p:nvPr/>
         </p:nvSpPr>
         <p:spPr>
           <a:xfrm>
-            <a:off x="1097280" y="2788920"/>
-            <a:ext cx="4572000" cy="3108960"/>
+            <a:off x="1463040" y="2231136"/>
+            <a:ext cx="9875520" cy="1005840"/>
           </a:xfrm>
           <a:prstGeom prst="rect">
             <a:avLst/>
@@ -5083,125 +4862,47 @@
           <a:p>
             <a:pPr algn="l">
               <a:spcAft>
-                <a:spcPts val="855"/>
-              </a:spcAft>
-            </a:pPr>
-            <a:r>
-              <a:rPr sz="1900" b="0" i="0">
+                <a:spcPts val="945"/>
+              </a:spcAft>
+            </a:pPr>
+            <a:r>
+              <a:rPr sz="2100" b="1" i="0">
                 <a:solidFill>
                   <a:srgbClr val="1C1B19"/>
                 </a:solidFill>
                 <a:latin typeface="Source Serif 4"/>
               </a:rPr>
-              <a:t>"Nah, I'm good."</a:t>
-            </a:r>
-          </a:p>
-          <a:p>
-            <a:pPr algn="l">
-              <a:spcAft>
-                <a:spcPts val="855"/>
-              </a:spcAft>
-            </a:pPr>
-            <a:r>
-              <a:rPr sz="1900" b="0" i="0">
-                <a:solidFill>
-                  <a:srgbClr val="1C1B19"/>
-                </a:solidFill>
-                <a:latin typeface="Source Serif 4"/>
-              </a:rPr>
-              <a:t>"Not tonight."</a:t>
-            </a:r>
-          </a:p>
-          <a:p>
-            <a:pPr algn="l">
-              <a:spcAft>
-                <a:spcPts val="855"/>
-              </a:spcAft>
-            </a:pPr>
-            <a:r>
-              <a:rPr sz="1900" b="0" i="0">
-                <a:solidFill>
-                  <a:srgbClr val="1C1B19"/>
-                </a:solidFill>
-                <a:latin typeface="Source Serif 4"/>
-              </a:rPr>
-              <a:t>"I'll pass."</a:t>
-            </a:r>
-          </a:p>
-          <a:p>
-            <a:pPr algn="l">
-              <a:spcAft>
-                <a:spcPts val="855"/>
-              </a:spcAft>
-            </a:pPr>
-            <a:r>
-              <a:rPr sz="1900" b="0" i="0">
-                <a:solidFill>
-                  <a:srgbClr val="1C1B19"/>
-                </a:solidFill>
-                <a:latin typeface="Source Serif 4"/>
-              </a:rPr>
-              <a:t>"Same, I'm good."</a:t>
-            </a:r>
-          </a:p>
-        </p:txBody>
-      </p:sp>
-      <p:sp>
-        <p:nvSpPr>
-          <p:cNvPr id="9" name="Rectangle 8"/>
-          <p:cNvSpPr/>
-          <p:nvPr/>
-        </p:nvSpPr>
-        <p:spPr>
-          <a:xfrm>
-            <a:off x="6309360" y="2103120"/>
-            <a:ext cx="5120640" cy="3931920"/>
-          </a:xfrm>
-          <a:prstGeom prst="rect">
-            <a:avLst/>
-          </a:prstGeom>
-          <a:solidFill>
-            <a:srgbClr val="FFFFFF"/>
-          </a:solidFill>
-          <a:ln w="15875">
-            <a:solidFill>
-              <a:srgbClr val="D8D2C6"/>
-            </a:solidFill>
-          </a:ln>
-          <a:effectLst/>
-        </p:spPr>
-        <p:style>
-          <a:lnRef idx="1">
-            <a:schemeClr val="accent1"/>
-          </a:lnRef>
-          <a:fillRef idx="3">
-            <a:schemeClr val="accent1"/>
-          </a:fillRef>
-          <a:effectRef idx="2">
-            <a:schemeClr val="accent1"/>
-          </a:effectRef>
-          <a:fontRef idx="minor">
-            <a:schemeClr val="lt1"/>
-          </a:fontRef>
-        </p:style>
-        <p:txBody>
-          <a:bodyPr rtlCol="0" anchor="ctr"/>
-          <a:lstStyle/>
-          <a:p>
-            <a:pPr algn="ctr"/>
-          </a:p>
-        </p:txBody>
-      </p:sp>
-      <p:sp>
-        <p:nvSpPr>
-          <p:cNvPr id="10" name="TextBox 9"/>
+              <a:t>Someone is passed out or breathing very slowly.</a:t>
+            </a:r>
+          </a:p>
+          <a:p>
+            <a:pPr algn="l">
+              <a:spcAft>
+                <a:spcPts val="945"/>
+              </a:spcAft>
+            </a:pPr>
+            <a:r>
+              <a:rPr sz="1600" b="0" i="0">
+                <a:solidFill>
+                  <a:srgbClr val="5D5A54"/>
+                </a:solidFill>
+                <a:latin typeface="Source Serif 4"/>
+              </a:rPr>
+              <a:t>Call 911 and stay with them.</a:t>
+            </a:r>
+          </a:p>
+        </p:txBody>
+      </p:sp>
+      <p:sp>
+        <p:nvSpPr>
+          <p:cNvPr id="8" name="TextBox 7"/>
           <p:cNvSpPr txBox="1"/>
           <p:nvPr/>
         </p:nvSpPr>
         <p:spPr>
           <a:xfrm>
-            <a:off x="6583680" y="2286000"/>
-            <a:ext cx="4572000" cy="457200"/>
+            <a:off x="822960" y="3200400"/>
+            <a:ext cx="548640" cy="1005840"/>
           </a:xfrm>
           <a:prstGeom prst="rect">
             <a:avLst/>
@@ -5216,31 +4917,31 @@
           <a:p>
             <a:pPr algn="l">
               <a:spcAft>
-                <a:spcPts val="585"/>
-              </a:spcAft>
-            </a:pPr>
-            <a:r>
-              <a:rPr sz="1300" b="1" i="0">
-                <a:solidFill>
-                  <a:srgbClr val="0B2D5B"/>
-                </a:solidFill>
-                <a:latin typeface="Inter Tight"/>
-              </a:rPr>
-              <a:t>WITH A REASON</a:t>
-            </a:r>
-          </a:p>
-        </p:txBody>
-      </p:sp>
-      <p:sp>
-        <p:nvSpPr>
-          <p:cNvPr id="11" name="TextBox 10"/>
+                <a:spcPts val="1170"/>
+              </a:spcAft>
+            </a:pPr>
+            <a:r>
+              <a:rPr sz="2600" b="1" i="0">
+                <a:solidFill>
+                  <a:srgbClr val="F47B20"/>
+                </a:solidFill>
+                <a:latin typeface="Source Serif 4"/>
+              </a:rPr>
+              <a:t>•</a:t>
+            </a:r>
+          </a:p>
+        </p:txBody>
+      </p:sp>
+      <p:sp>
+        <p:nvSpPr>
+          <p:cNvPr id="9" name="TextBox 8"/>
           <p:cNvSpPr txBox="1"/>
           <p:nvPr/>
         </p:nvSpPr>
         <p:spPr>
           <a:xfrm>
-            <a:off x="6583680" y="2788920"/>
-            <a:ext cx="4572000" cy="3108960"/>
+            <a:off x="1463040" y="3236976"/>
+            <a:ext cx="9875520" cy="1005840"/>
           </a:xfrm>
           <a:prstGeom prst="rect">
             <a:avLst/>
@@ -5255,65 +4956,221 @@
           <a:p>
             <a:pPr algn="l">
               <a:spcAft>
-                <a:spcPts val="855"/>
-              </a:spcAft>
-            </a:pPr>
-            <a:r>
-              <a:rPr sz="1900" b="0" i="0">
+                <a:spcPts val="945"/>
+              </a:spcAft>
+            </a:pPr>
+            <a:r>
+              <a:rPr sz="2100" b="1" i="0">
                 <a:solidFill>
                   <a:srgbClr val="1C1B19"/>
                 </a:solidFill>
                 <a:latin typeface="Source Serif 4"/>
               </a:rPr>
-              <a:t>"I have a game in the morning."</a:t>
-            </a:r>
-          </a:p>
-          <a:p>
-            <a:pPr algn="l">
-              <a:spcAft>
-                <a:spcPts val="855"/>
-              </a:spcAft>
-            </a:pPr>
-            <a:r>
-              <a:rPr sz="1900" b="0" i="0">
+              <a:t>Pressure to do anything sexual, or send photos.</a:t>
+            </a:r>
+          </a:p>
+          <a:p>
+            <a:pPr algn="l">
+              <a:spcAft>
+                <a:spcPts val="945"/>
+              </a:spcAft>
+            </a:pPr>
+            <a:r>
+              <a:rPr sz="1600" b="0" i="0">
+                <a:solidFill>
+                  <a:srgbClr val="5D5A54"/>
+                </a:solidFill>
+                <a:latin typeface="Source Serif 4"/>
+              </a:rPr>
+              <a:t>The answer is no. Tell an adult.</a:t>
+            </a:r>
+          </a:p>
+        </p:txBody>
+      </p:sp>
+      <p:sp>
+        <p:nvSpPr>
+          <p:cNvPr id="10" name="TextBox 9"/>
+          <p:cNvSpPr txBox="1"/>
+          <p:nvPr/>
+        </p:nvSpPr>
+        <p:spPr>
+          <a:xfrm>
+            <a:off x="822960" y="4206240"/>
+            <a:ext cx="548640" cy="1005840"/>
+          </a:xfrm>
+          <a:prstGeom prst="rect">
+            <a:avLst/>
+          </a:prstGeom>
+          <a:noFill/>
+        </p:spPr>
+        <p:txBody>
+          <a:bodyPr wrap="square" anchor="t" lIns="0" rIns="0" tIns="0" bIns="0">
+            <a:spAutoFit/>
+          </a:bodyPr>
+          <a:lstStyle/>
+          <a:p>
+            <a:pPr algn="l">
+              <a:spcAft>
+                <a:spcPts val="1170"/>
+              </a:spcAft>
+            </a:pPr>
+            <a:r>
+              <a:rPr sz="2600" b="1" i="0">
+                <a:solidFill>
+                  <a:srgbClr val="F47B20"/>
+                </a:solidFill>
+                <a:latin typeface="Source Serif 4"/>
+              </a:rPr>
+              <a:t>•</a:t>
+            </a:r>
+          </a:p>
+        </p:txBody>
+      </p:sp>
+      <p:sp>
+        <p:nvSpPr>
+          <p:cNvPr id="11" name="TextBox 10"/>
+          <p:cNvSpPr txBox="1"/>
+          <p:nvPr/>
+        </p:nvSpPr>
+        <p:spPr>
+          <a:xfrm>
+            <a:off x="1463040" y="4242816"/>
+            <a:ext cx="9875520" cy="1005840"/>
+          </a:xfrm>
+          <a:prstGeom prst="rect">
+            <a:avLst/>
+          </a:prstGeom>
+          <a:noFill/>
+        </p:spPr>
+        <p:txBody>
+          <a:bodyPr wrap="square" anchor="t" lIns="0" rIns="0" tIns="0" bIns="0">
+            <a:spAutoFit/>
+          </a:bodyPr>
+          <a:lstStyle/>
+          <a:p>
+            <a:pPr algn="l">
+              <a:spcAft>
+                <a:spcPts val="945"/>
+              </a:spcAft>
+            </a:pPr>
+            <a:r>
+              <a:rPr sz="2100" b="1" i="0">
                 <a:solidFill>
                   <a:srgbClr val="1C1B19"/>
                 </a:solidFill>
                 <a:latin typeface="Source Serif 4"/>
               </a:rPr>
-              <a:t>"I open at work tomorrow."</a:t>
-            </a:r>
-          </a:p>
-          <a:p>
-            <a:pPr algn="l">
-              <a:spcAft>
-                <a:spcPts val="855"/>
-              </a:spcAft>
-            </a:pPr>
-            <a:r>
-              <a:rPr sz="1900" b="0" i="0">
+              <a:t>Someone threatens you for saying no.</a:t>
+            </a:r>
+          </a:p>
+          <a:p>
+            <a:pPr algn="l">
+              <a:spcAft>
+                <a:spcPts val="945"/>
+              </a:spcAft>
+            </a:pPr>
+            <a:r>
+              <a:rPr sz="1600" b="0" i="0">
+                <a:solidFill>
+                  <a:srgbClr val="5D5A54"/>
+                </a:solidFill>
+                <a:latin typeface="Source Serif 4"/>
+              </a:rPr>
+              <a:t>Tell a counselor or an adult you trust.</a:t>
+            </a:r>
+          </a:p>
+        </p:txBody>
+      </p:sp>
+      <p:sp>
+        <p:nvSpPr>
+          <p:cNvPr id="12" name="TextBox 11"/>
+          <p:cNvSpPr txBox="1"/>
+          <p:nvPr/>
+        </p:nvSpPr>
+        <p:spPr>
+          <a:xfrm>
+            <a:off x="822960" y="5212080"/>
+            <a:ext cx="548640" cy="1005840"/>
+          </a:xfrm>
+          <a:prstGeom prst="rect">
+            <a:avLst/>
+          </a:prstGeom>
+          <a:noFill/>
+        </p:spPr>
+        <p:txBody>
+          <a:bodyPr wrap="square" anchor="t" lIns="0" rIns="0" tIns="0" bIns="0">
+            <a:spAutoFit/>
+          </a:bodyPr>
+          <a:lstStyle/>
+          <a:p>
+            <a:pPr algn="l">
+              <a:spcAft>
+                <a:spcPts val="1170"/>
+              </a:spcAft>
+            </a:pPr>
+            <a:r>
+              <a:rPr sz="2600" b="1" i="0">
+                <a:solidFill>
+                  <a:srgbClr val="F47B20"/>
+                </a:solidFill>
+                <a:latin typeface="Source Serif 4"/>
+              </a:rPr>
+              <a:t>•</a:t>
+            </a:r>
+          </a:p>
+        </p:txBody>
+      </p:sp>
+      <p:sp>
+        <p:nvSpPr>
+          <p:cNvPr id="13" name="TextBox 12"/>
+          <p:cNvSpPr txBox="1"/>
+          <p:nvPr/>
+        </p:nvSpPr>
+        <p:spPr>
+          <a:xfrm>
+            <a:off x="1463040" y="5248656"/>
+            <a:ext cx="9875520" cy="1005840"/>
+          </a:xfrm>
+          <a:prstGeom prst="rect">
+            <a:avLst/>
+          </a:prstGeom>
+          <a:noFill/>
+        </p:spPr>
+        <p:txBody>
+          <a:bodyPr wrap="square" anchor="t" lIns="0" rIns="0" tIns="0" bIns="0">
+            <a:spAutoFit/>
+          </a:bodyPr>
+          <a:lstStyle/>
+          <a:p>
+            <a:pPr algn="l">
+              <a:spcAft>
+                <a:spcPts val="945"/>
+              </a:spcAft>
+            </a:pPr>
+            <a:r>
+              <a:rPr sz="2100" b="1" i="0">
                 <a:solidFill>
                   <a:srgbClr val="1C1B19"/>
                 </a:solidFill>
                 <a:latin typeface="Source Serif 4"/>
               </a:rPr>
-              <a:t>"My parents would never be okay with that."</a:t>
-            </a:r>
-          </a:p>
-          <a:p>
-            <a:pPr algn="l">
-              <a:spcAft>
-                <a:spcPts val="855"/>
-              </a:spcAft>
-            </a:pPr>
-            <a:r>
-              <a:rPr sz="1900" b="0" i="0">
-                <a:solidFill>
-                  <a:srgbClr val="1C1B19"/>
-                </a:solidFill>
-                <a:latin typeface="Source Serif 4"/>
-              </a:rPr>
-              <a:t>"That's not for me."</a:t>
+              <a:t>A friend is in trouble with alcohol or drugs.</a:t>
+            </a:r>
+          </a:p>
+          <a:p>
+            <a:pPr algn="l">
+              <a:spcAft>
+                <a:spcPts val="945"/>
+              </a:spcAft>
+            </a:pPr>
+            <a:r>
+              <a:rPr sz="1600" b="0" i="0">
+                <a:solidFill>
+                  <a:srgbClr val="5D5A54"/>
+                </a:solidFill>
+                <a:latin typeface="Source Serif 4"/>
+              </a:rPr>
+              <a:t>Getting help is looking out for them.</a:t>
             </a:r>
           </a:p>
         </p:txBody>
@@ -5422,7 +5279,7 @@
                 </a:solidFill>
                 <a:latin typeface="Inter Tight"/>
               </a:rPr>
-              <a:t>THREE MOMENTS</a:t>
+              <a:t>BEFORE YOU GO</a:t>
             </a:r>
           </a:p>
         </p:txBody>
@@ -5474,7 +5331,7 @@
         </p:nvSpPr>
         <p:spPr>
           <a:xfrm>
-            <a:off x="822960" y="1005840"/>
+            <a:off x="822960" y="1188720"/>
             <a:ext cx="10515600" cy="914400"/>
           </a:xfrm>
           <a:prstGeom prst="rect">
@@ -5490,31 +5347,70 @@
           <a:p>
             <a:pPr algn="l">
               <a:spcAft>
-                <a:spcPts val="1530"/>
-              </a:spcAft>
-            </a:pPr>
-            <a:r>
-              <a:rPr sz="3400" b="1" i="0">
+                <a:spcPts val="1620"/>
+              </a:spcAft>
+            </a:pPr>
+            <a:r>
+              <a:rPr sz="3600" b="1" i="0">
                 <a:solidFill>
                   <a:srgbClr val="1C1B19"/>
                 </a:solidFill>
                 <a:latin typeface="Source Serif 4"/>
               </a:rPr>
-              <a:t>What would you say or do?</a:t>
-            </a:r>
-          </a:p>
-        </p:txBody>
-      </p:sp>
-      <p:sp>
-        <p:nvSpPr>
-          <p:cNvPr id="6" name="Rectangle 5"/>
+              <a:t>Your line</a:t>
+            </a:r>
+          </a:p>
+        </p:txBody>
+      </p:sp>
+      <p:sp>
+        <p:nvSpPr>
+          <p:cNvPr id="6" name="TextBox 5"/>
+          <p:cNvSpPr txBox="1"/>
+          <p:nvPr/>
+        </p:nvSpPr>
+        <p:spPr>
+          <a:xfrm>
+            <a:off x="822960" y="2286000"/>
+            <a:ext cx="10515600" cy="1463040"/>
+          </a:xfrm>
+          <a:prstGeom prst="rect">
+            <a:avLst/>
+          </a:prstGeom>
+          <a:noFill/>
+        </p:spPr>
+        <p:txBody>
+          <a:bodyPr wrap="square" anchor="t" lIns="0" rIns="0" tIns="0" bIns="0">
+            <a:spAutoFit/>
+          </a:bodyPr>
+          <a:lstStyle/>
+          <a:p>
+            <a:pPr algn="l">
+              <a:spcAft>
+                <a:spcPts val="1080"/>
+              </a:spcAft>
+            </a:pPr>
+            <a:r>
+              <a:rPr sz="2400" b="0" i="0">
+                <a:solidFill>
+                  <a:srgbClr val="1C1B19"/>
+                </a:solidFill>
+                <a:latin typeface="Source Serif 4"/>
+              </a:rPr>
+              <a:t>Write one thing you've already decided, in your own words. Keep it.</a:t>
+            </a:r>
+          </a:p>
+        </p:txBody>
+      </p:sp>
+      <p:sp>
+        <p:nvSpPr>
+          <p:cNvPr id="7" name="Rectangle 6"/>
           <p:cNvSpPr/>
           <p:nvPr/>
         </p:nvSpPr>
         <p:spPr>
           <a:xfrm>
-            <a:off x="822960" y="2103120"/>
-            <a:ext cx="3322320" cy="3840480"/>
+            <a:off x="822960" y="4023360"/>
+            <a:ext cx="10515600" cy="1371600"/>
           </a:xfrm>
           <a:prstGeom prst="rect">
             <a:avLst/>
@@ -5524,7 +5420,7 @@
           </a:solidFill>
           <a:ln w="15875">
             <a:solidFill>
-              <a:srgbClr val="D8D2C6"/>
+              <a:srgbClr val="1C1B19"/>
             </a:solidFill>
           </a:ln>
           <a:effectLst/>
@@ -5553,14 +5449,14 @@
       </p:sp>
       <p:sp>
         <p:nvSpPr>
-          <p:cNvPr id="7" name="TextBox 6"/>
+          <p:cNvPr id="8" name="TextBox 7"/>
           <p:cNvSpPr txBox="1"/>
           <p:nvPr/>
         </p:nvSpPr>
         <p:spPr>
           <a:xfrm>
-            <a:off x="1051560" y="2286000"/>
-            <a:ext cx="2865120" cy="365760"/>
+            <a:off x="1097280" y="4206240"/>
+            <a:ext cx="10058400" cy="365760"/>
           </a:xfrm>
           <a:prstGeom prst="rect">
             <a:avLst/>
@@ -5575,31 +5471,31 @@
           <a:p>
             <a:pPr algn="l">
               <a:spcAft>
-                <a:spcPts val="585"/>
-              </a:spcAft>
-            </a:pPr>
-            <a:r>
-              <a:rPr sz="1300" b="1" i="0">
+                <a:spcPts val="540"/>
+              </a:spcAft>
+            </a:pPr>
+            <a:r>
+              <a:rPr sz="1200" b="1" i="0">
                 <a:solidFill>
                   <a:srgbClr val="0B2D5B"/>
                 </a:solidFill>
                 <a:latin typeface="Inter Tight"/>
               </a:rPr>
-              <a:t>AYESHA</a:t>
-            </a:r>
-          </a:p>
-        </p:txBody>
-      </p:sp>
-      <p:sp>
-        <p:nvSpPr>
-          <p:cNvPr id="8" name="TextBox 7"/>
+              <a:t>ON THE BVR DINER MENU</a:t>
+            </a:r>
+          </a:p>
+        </p:txBody>
+      </p:sp>
+      <p:sp>
+        <p:nvSpPr>
+          <p:cNvPr id="9" name="TextBox 8"/>
           <p:cNvSpPr txBox="1"/>
           <p:nvPr/>
         </p:nvSpPr>
         <p:spPr>
           <a:xfrm>
-            <a:off x="1051560" y="2743200"/>
-            <a:ext cx="2865120" cy="3017520"/>
+            <a:off x="1097280" y="4617720"/>
+            <a:ext cx="10058400" cy="640080"/>
           </a:xfrm>
           <a:prstGeom prst="rect">
             <a:avLst/>
@@ -5614,42 +5510,66 @@
           <a:p>
             <a:pPr algn="l">
               <a:spcAft>
-                <a:spcPts val="810"/>
-              </a:spcAft>
-            </a:pPr>
-            <a:r>
-              <a:rPr sz="1800" b="0" i="0">
+                <a:spcPts val="900"/>
+              </a:spcAft>
+            </a:pPr>
+            <a:r>
+              <a:rPr sz="2000" b="0" i="0">
                 <a:solidFill>
                   <a:srgbClr val="1C1B19"/>
                 </a:solidFill>
-                <a:latin typeface="Source Serif 4"/>
-              </a:rPr>
-              <a:t>A junior on your team got her license two months ago. She offers to drive you and three friends into Boston for a concert.</a:t>
-            </a:r>
-          </a:p>
-        </p:txBody>
-      </p:sp>
-      <p:sp>
-        <p:nvSpPr>
-          <p:cNvPr id="9" name="Rectangle 8"/>
+                <a:latin typeface="Inter Tight"/>
+              </a:rPr>
+              <a:t>https://rmwtoolkit.github.io/bcds-toolkit/saying-no-without-losing-your-friends-high-school.html</a:t>
+            </a:r>
+          </a:p>
+        </p:txBody>
+      </p:sp>
+    </p:spTree>
+  </p:cSld>
+  <p:clrMapOvr>
+    <a:masterClrMapping/>
+  </p:clrMapOvr>
+</p:sld>
+</file>
+
+<file path=ppt/slides/slide12.xml><?xml version="1.0" encoding="utf-8"?>
+<p:sld xmlns:a="http://schemas.openxmlformats.org/drawingml/2006/main" xmlns:p="http://schemas.openxmlformats.org/presentationml/2006/main" xmlns:r="http://schemas.openxmlformats.org/officeDocument/2006/relationships" show="0">
+  <p:cSld>
+    <p:bg>
+      <p:bgPr>
+        <a:solidFill>
+          <a:srgbClr val="EEEBE4"/>
+        </a:solidFill>
+        <a:effectLst/>
+      </p:bgPr>
+    </p:bg>
+    <p:spTree>
+      <p:nvGrpSpPr>
+        <p:cNvPr id="1" name=""/>
+        <p:cNvGrpSpPr/>
+        <p:nvPr/>
+      </p:nvGrpSpPr>
+      <p:grpSpPr/>
+      <p:sp>
+        <p:nvSpPr>
+          <p:cNvPr id="2" name="Rectangle 1"/>
           <p:cNvSpPr/>
           <p:nvPr/>
         </p:nvSpPr>
         <p:spPr>
           <a:xfrm>
-            <a:off x="4419600" y="2103120"/>
-            <a:ext cx="3322320" cy="3840480"/>
+            <a:off x="0" y="0"/>
+            <a:ext cx="12191695" cy="384048"/>
           </a:xfrm>
           <a:prstGeom prst="rect">
             <a:avLst/>
           </a:prstGeom>
           <a:solidFill>
-            <a:srgbClr val="FFFFFF"/>
+            <a:srgbClr val="0B2D5B"/>
           </a:solidFill>
-          <a:ln w="15875">
-            <a:solidFill>
-              <a:srgbClr val="D8D2C6"/>
-            </a:solidFill>
+          <a:ln>
+            <a:noFill/>
           </a:ln>
           <a:effectLst/>
         </p:spPr>
@@ -5677,14 +5597,14 @@
       </p:sp>
       <p:sp>
         <p:nvSpPr>
-          <p:cNvPr id="10" name="TextBox 9"/>
+          <p:cNvPr id="3" name="TextBox 2"/>
           <p:cNvSpPr txBox="1"/>
           <p:nvPr/>
         </p:nvSpPr>
         <p:spPr>
           <a:xfrm>
-            <a:off x="4648200" y="2286000"/>
-            <a:ext cx="2865120" cy="365760"/>
+            <a:off x="548640" y="100584"/>
+            <a:ext cx="10972800" cy="274320"/>
           </a:xfrm>
           <a:prstGeom prst="rect">
             <a:avLst/>
@@ -5699,31 +5619,31 @@
           <a:p>
             <a:pPr algn="l">
               <a:spcAft>
-                <a:spcPts val="585"/>
-              </a:spcAft>
-            </a:pPr>
-            <a:r>
-              <a:rPr sz="1300" b="1" i="0">
-                <a:solidFill>
-                  <a:srgbClr val="0B2D5B"/>
+                <a:spcPts val="495"/>
+              </a:spcAft>
+            </a:pPr>
+            <a:r>
+              <a:rPr sz="1100" b="1" i="0">
+                <a:solidFill>
+                  <a:srgbClr val="FFFFFF"/>
                 </a:solidFill>
                 <a:latin typeface="Inter Tight"/>
               </a:rPr>
-              <a:t>FIRST PARTY</a:t>
-            </a:r>
-          </a:p>
-        </p:txBody>
-      </p:sp>
-      <p:sp>
-        <p:nvSpPr>
-          <p:cNvPr id="11" name="TextBox 10"/>
+              <a:t>TEACHER PAGE  ·  skipped when you present  ·  Lesson plan</a:t>
+            </a:r>
+          </a:p>
+        </p:txBody>
+      </p:sp>
+      <p:sp>
+        <p:nvSpPr>
+          <p:cNvPr id="4" name="TextBox 3"/>
           <p:cNvSpPr txBox="1"/>
           <p:nvPr/>
         </p:nvSpPr>
         <p:spPr>
           <a:xfrm>
-            <a:off x="4648200" y="2743200"/>
-            <a:ext cx="2865120" cy="3017520"/>
+            <a:off x="548640" y="685800"/>
+            <a:ext cx="10972800" cy="731520"/>
           </a:xfrm>
           <a:prstGeom prst="rect">
             <a:avLst/>
@@ -5738,42 +5658,502 @@
           <a:p>
             <a:pPr algn="l">
               <a:spcAft>
-                <a:spcPts val="810"/>
-              </a:spcAft>
-            </a:pPr>
-            <a:r>
-              <a:rPr sz="1800" b="0" i="0">
+                <a:spcPts val="1530"/>
+              </a:spcAft>
+            </a:pPr>
+            <a:r>
+              <a:rPr sz="3400" b="1" i="0">
                 <a:solidFill>
                   <a:srgbClr val="1C1B19"/>
                 </a:solidFill>
                 <a:latin typeface="Source Serif 4"/>
               </a:rPr>
-              <a:t>Your new friend group's first party of the year. The host keeps topping off your cup. You've decided you're done.</a:t>
-            </a:r>
-          </a:p>
-        </p:txBody>
-      </p:sp>
-      <p:sp>
-        <p:nvSpPr>
-          <p:cNvPr id="12" name="Rectangle 11"/>
+              <a:t>Saying No Without Losing Your Friends</a:t>
+            </a:r>
+          </a:p>
+        </p:txBody>
+      </p:sp>
+      <p:sp>
+        <p:nvSpPr>
+          <p:cNvPr id="5" name="TextBox 4"/>
+          <p:cNvSpPr txBox="1"/>
+          <p:nvPr/>
+        </p:nvSpPr>
+        <p:spPr>
+          <a:xfrm>
+            <a:off x="548640" y="1325880"/>
+            <a:ext cx="10972800" cy="365760"/>
+          </a:xfrm>
+          <a:prstGeom prst="rect">
+            <a:avLst/>
+          </a:prstGeom>
+          <a:noFill/>
+        </p:spPr>
+        <p:txBody>
+          <a:bodyPr wrap="square" anchor="t" lIns="0" rIns="0" tIns="0" bIns="0">
+            <a:spAutoFit/>
+          </a:bodyPr>
+          <a:lstStyle/>
+          <a:p>
+            <a:pPr algn="l">
+              <a:spcAft>
+                <a:spcPts val="630"/>
+              </a:spcAft>
+            </a:pPr>
+            <a:r>
+              <a:rPr sz="1400" b="0" i="0">
+                <a:solidFill>
+                  <a:srgbClr val="5D5A54"/>
+                </a:solidFill>
+                <a:latin typeface="Inter Tight"/>
+              </a:rPr>
+              <a:t>Upper School  ·  45 minutes (20-minute advisory version below)  ·  9th grade advisory, health class, or a counselor-led group</a:t>
+            </a:r>
+          </a:p>
+        </p:txBody>
+      </p:sp>
+      <p:sp>
+        <p:nvSpPr>
+          <p:cNvPr id="6" name="TextBox 5"/>
+          <p:cNvSpPr txBox="1"/>
+          <p:nvPr/>
+        </p:nvSpPr>
+        <p:spPr>
+          <a:xfrm>
+            <a:off x="548640" y="1828800"/>
+            <a:ext cx="5120640" cy="4389120"/>
+          </a:xfrm>
+          <a:prstGeom prst="rect">
+            <a:avLst/>
+          </a:prstGeom>
+          <a:noFill/>
+        </p:spPr>
+        <p:txBody>
+          <a:bodyPr wrap="square" anchor="t" lIns="0" rIns="0" tIns="0" bIns="0">
+            <a:spAutoFit/>
+          </a:bodyPr>
+          <a:lstStyle/>
+          <a:p>
+            <a:pPr algn="l">
+              <a:spcAft>
+                <a:spcPts val="675"/>
+              </a:spcAft>
+            </a:pPr>
+            <a:r>
+              <a:rPr sz="1100" b="1" i="0">
+                <a:solidFill>
+                  <a:srgbClr val="0B2D5B"/>
+                </a:solidFill>
+                <a:latin typeface="Inter Tight"/>
+              </a:rPr>
+              <a:t>GOAL</a:t>
+            </a:r>
+          </a:p>
+          <a:p>
+            <a:pPr algn="l">
+              <a:spcAft>
+                <a:spcPts val="675"/>
+              </a:spcAft>
+            </a:pPr>
+            <a:r>
+              <a:rPr sz="1500" b="0" i="0">
+                <a:solidFill>
+                  <a:srgbClr val="1C1B19"/>
+                </a:solidFill>
+                <a:latin typeface="Source Serif 4"/>
+              </a:rPr>
+              <a:t>Students can explain why no feels harder with friends watching (the reward signal gets louder, the brakes still work), notice that most peers are less into risky plans than they look, and practice a short no, a swap and a code-word exit. The skill is planning ahead. Nobody should feel judged for a yes they already said.</a:t>
+            </a:r>
+          </a:p>
+          <a:p>
+            <a:pPr algn="l">
+              <a:spcAft>
+                <a:spcPts val="675"/>
+              </a:spcAft>
+            </a:pPr>
+            <a:r>
+              <a:rPr sz="1500" b="0" i="0">
+                <a:solidFill>
+                  <a:srgbClr val="1C1B19"/>
+                </a:solidFill>
+                <a:latin typeface="Source Serif 4"/>
+              </a:rPr>
+              <a:t/>
+            </a:r>
+          </a:p>
+          <a:p>
+            <a:pPr algn="l">
+              <a:spcAft>
+                <a:spcPts val="675"/>
+              </a:spcAft>
+            </a:pPr>
+            <a:r>
+              <a:rPr sz="1100" b="1" i="0">
+                <a:solidFill>
+                  <a:srgbClr val="0B2D5B"/>
+                </a:solidFill>
+                <a:latin typeface="Inter Tight"/>
+              </a:rPr>
+              <a:t>MATERIALS</a:t>
+            </a:r>
+          </a:p>
+          <a:p>
+            <a:pPr algn="l">
+              <a:spcAft>
+                <a:spcPts val="675"/>
+              </a:spcAft>
+            </a:pPr>
+            <a:r>
+              <a:rPr sz="1500" b="0" i="0">
+                <a:solidFill>
+                  <a:srgbClr val="1C1B19"/>
+                </a:solidFill>
+                <a:latin typeface="Source Serif 4"/>
+              </a:rPr>
+              <a:t>Index cards for the opening guess, one per student</a:t>
+            </a:r>
+          </a:p>
+          <a:p>
+            <a:pPr algn="l">
+              <a:spcAft>
+                <a:spcPts val="675"/>
+              </a:spcAft>
+            </a:pPr>
+            <a:r>
+              <a:rPr sz="1500" b="0" i="0">
+                <a:solidFill>
+                  <a:srgbClr val="1C1B19"/>
+                </a:solidFill>
+                <a:latin typeface="Source Serif 4"/>
+              </a:rPr>
+              <a:t>Scrap paper for the private code-word plan and exit card</a:t>
+            </a:r>
+          </a:p>
+          <a:p>
+            <a:pPr algn="l">
+              <a:spcAft>
+                <a:spcPts val="675"/>
+              </a:spcAft>
+            </a:pPr>
+            <a:r>
+              <a:rPr sz="1500" b="0" i="0">
+                <a:solidFill>
+                  <a:srgbClr val="1C1B19"/>
+                </a:solidFill>
+                <a:latin typeface="Source Serif 4"/>
+              </a:rPr>
+              <a:t>The BVR Diner page link (last slide) to share after class</a:t>
+            </a:r>
+          </a:p>
+        </p:txBody>
+      </p:sp>
+      <p:sp>
+        <p:nvSpPr>
+          <p:cNvPr id="7" name="TextBox 6"/>
+          <p:cNvSpPr txBox="1"/>
+          <p:nvPr/>
+        </p:nvSpPr>
+        <p:spPr>
+          <a:xfrm>
+            <a:off x="6126480" y="1828800"/>
+            <a:ext cx="5486400" cy="4389120"/>
+          </a:xfrm>
+          <a:prstGeom prst="rect">
+            <a:avLst/>
+          </a:prstGeom>
+          <a:noFill/>
+        </p:spPr>
+        <p:txBody>
+          <a:bodyPr wrap="square" anchor="t" lIns="0" rIns="0" tIns="0" bIns="0">
+            <a:spAutoFit/>
+          </a:bodyPr>
+          <a:lstStyle/>
+          <a:p>
+            <a:pPr algn="l">
+              <a:spcAft>
+                <a:spcPts val="630"/>
+              </a:spcAft>
+            </a:pPr>
+            <a:r>
+              <a:rPr sz="1100" b="1" i="0">
+                <a:solidFill>
+                  <a:srgbClr val="0B2D5B"/>
+                </a:solidFill>
+                <a:latin typeface="Inter Tight"/>
+              </a:rPr>
+              <a:t>FLOW</a:t>
+            </a:r>
+          </a:p>
+          <a:p>
+            <a:pPr algn="l">
+              <a:spcAft>
+                <a:spcPts val="630"/>
+              </a:spcAft>
+            </a:pPr>
+            <a:r>
+              <a:rPr sz="1300" b="1" i="0">
+                <a:solidFill>
+                  <a:srgbClr val="F47B20"/>
+                </a:solidFill>
+                <a:latin typeface="Inter Tight"/>
+              </a:rPr>
+              <a:t>5 min   </a:t>
+            </a:r>
+            <a:r>
+              <a:rPr sz="1400" b="0" i="0">
+                <a:solidFill>
+                  <a:srgbClr val="1C1B19"/>
+                </a:solidFill>
+                <a:latin typeface="Source Serif 4"/>
+              </a:rPr>
+              <a:t>The guess (anonymous tally)</a:t>
+            </a:r>
+          </a:p>
+          <a:p>
+            <a:pPr algn="l">
+              <a:spcAft>
+                <a:spcPts val="630"/>
+              </a:spcAft>
+            </a:pPr>
+            <a:r>
+              <a:rPr sz="1300" b="1" i="0">
+                <a:solidFill>
+                  <a:srgbClr val="F47B20"/>
+                </a:solidFill>
+                <a:latin typeface="Inter Tight"/>
+              </a:rPr>
+              <a:t>8 min   </a:t>
+            </a:r>
+            <a:r>
+              <a:rPr sz="1400" b="0" i="0">
+                <a:solidFill>
+                  <a:srgbClr val="1C1B19"/>
+                </a:solidFill>
+                <a:latin typeface="Source Serif 4"/>
+              </a:rPr>
+              <a:t>Gas and brakes: what friends do to the brain</a:t>
+            </a:r>
+          </a:p>
+          <a:p>
+            <a:pPr algn="l">
+              <a:spcAft>
+                <a:spcPts val="630"/>
+              </a:spcAft>
+            </a:pPr>
+            <a:r>
+              <a:rPr sz="1300" b="1" i="0">
+                <a:solidFill>
+                  <a:srgbClr val="F47B20"/>
+                </a:solidFill>
+                <a:latin typeface="Inter Tight"/>
+              </a:rPr>
+              <a:t>5 min   </a:t>
+            </a:r>
+            <a:r>
+              <a:rPr sz="1400" b="0" i="0">
+                <a:solidFill>
+                  <a:srgbClr val="1C1B19"/>
+                </a:solidFill>
+                <a:latin typeface="Source Serif 4"/>
+              </a:rPr>
+              <a:t>Make the call before the moment</a:t>
+            </a:r>
+          </a:p>
+          <a:p>
+            <a:pPr algn="l">
+              <a:spcAft>
+                <a:spcPts val="630"/>
+              </a:spcAft>
+            </a:pPr>
+            <a:r>
+              <a:rPr sz="1300" b="1" i="0">
+                <a:solidFill>
+                  <a:srgbClr val="F47B20"/>
+                </a:solidFill>
+                <a:latin typeface="Inter Tight"/>
+              </a:rPr>
+              <a:t>7 min   </a:t>
+            </a:r>
+            <a:r>
+              <a:rPr sz="1400" b="0" i="0">
+                <a:solidFill>
+                  <a:srgbClr val="1C1B19"/>
+                </a:solidFill>
+                <a:latin typeface="Source Serif 4"/>
+              </a:rPr>
+              <a:t>Say it out loud (pairs)</a:t>
+            </a:r>
+          </a:p>
+          <a:p>
+            <a:pPr algn="l">
+              <a:spcAft>
+                <a:spcPts val="630"/>
+              </a:spcAft>
+            </a:pPr>
+            <a:r>
+              <a:rPr sz="1300" b="1" i="0">
+                <a:solidFill>
+                  <a:srgbClr val="F47B20"/>
+                </a:solidFill>
+                <a:latin typeface="Inter Tight"/>
+              </a:rPr>
+              <a:t>10 min   </a:t>
+            </a:r>
+            <a:r>
+              <a:rPr sz="1400" b="0" i="0">
+                <a:solidFill>
+                  <a:srgbClr val="1C1B19"/>
+                </a:solidFill>
+                <a:latin typeface="Source Serif 4"/>
+              </a:rPr>
+              <a:t>Three moments (small groups)</a:t>
+            </a:r>
+          </a:p>
+          <a:p>
+            <a:pPr algn="l">
+              <a:spcAft>
+                <a:spcPts val="630"/>
+              </a:spcAft>
+            </a:pPr>
+            <a:r>
+              <a:rPr sz="1300" b="1" i="0">
+                <a:solidFill>
+                  <a:srgbClr val="F47B20"/>
+                </a:solidFill>
+                <a:latin typeface="Inter Tight"/>
+              </a:rPr>
+              <a:t>6 min   </a:t>
+            </a:r>
+            <a:r>
+              <a:rPr sz="1400" b="0" i="0">
+                <a:solidFill>
+                  <a:srgbClr val="1C1B19"/>
+                </a:solidFill>
+                <a:latin typeface="Source Serif 4"/>
+              </a:rPr>
+              <a:t>A way out, and when to get help right away</a:t>
+            </a:r>
+          </a:p>
+          <a:p>
+            <a:pPr algn="l">
+              <a:spcAft>
+                <a:spcPts val="630"/>
+              </a:spcAft>
+            </a:pPr>
+            <a:r>
+              <a:rPr sz="1300" b="1" i="0">
+                <a:solidFill>
+                  <a:srgbClr val="F47B20"/>
+                </a:solidFill>
+                <a:latin typeface="Inter Tight"/>
+              </a:rPr>
+              <a:t>4 min   </a:t>
+            </a:r>
+            <a:r>
+              <a:rPr sz="1400" b="0" i="0">
+                <a:solidFill>
+                  <a:srgbClr val="1C1B19"/>
+                </a:solidFill>
+                <a:latin typeface="Source Serif 4"/>
+              </a:rPr>
+              <a:t>Exit card and the BVR Diner link</a:t>
+            </a:r>
+          </a:p>
+          <a:p>
+            <a:pPr algn="l">
+              <a:spcAft>
+                <a:spcPts val="630"/>
+              </a:spcAft>
+            </a:pPr>
+            <a:r>
+              <a:rPr sz="1400" b="0" i="0">
+                <a:solidFill>
+                  <a:srgbClr val="1C1B19"/>
+                </a:solidFill>
+                <a:latin typeface="Source Serif 4"/>
+              </a:rPr>
+              <a:t/>
+            </a:r>
+          </a:p>
+          <a:p>
+            <a:pPr algn="l">
+              <a:spcAft>
+                <a:spcPts val="630"/>
+              </a:spcAft>
+            </a:pPr>
+            <a:r>
+              <a:rPr sz="1100" b="1" i="0">
+                <a:solidFill>
+                  <a:srgbClr val="0B2D5B"/>
+                </a:solidFill>
+                <a:latin typeface="Inter Tight"/>
+              </a:rPr>
+              <a:t>SHORT ON TIME (20-MINUTE ADVISORY)</a:t>
+            </a:r>
+          </a:p>
+          <a:p>
+            <a:pPr algn="l">
+              <a:spcAft>
+                <a:spcPts val="630"/>
+              </a:spcAft>
+            </a:pPr>
+            <a:r>
+              <a:rPr sz="1400" b="0" i="0">
+                <a:solidFill>
+                  <a:srgbClr val="1C1B19"/>
+                </a:solidFill>
+                <a:latin typeface="Source Serif 4"/>
+              </a:rPr>
+              <a:t>The guess (4), gas and brakes (5), say it out loud in pairs (6), code word and link (5). Share the BVR Diner link so students get the rest.</a:t>
+            </a:r>
+          </a:p>
+        </p:txBody>
+      </p:sp>
+    </p:spTree>
+  </p:cSld>
+  <p:clrMapOvr>
+    <a:masterClrMapping/>
+  </p:clrMapOvr>
+</p:sld>
+</file>
+
+<file path=ppt/slides/slide13.xml><?xml version="1.0" encoding="utf-8"?>
+<p:sld xmlns:a="http://schemas.openxmlformats.org/drawingml/2006/main" xmlns:p="http://schemas.openxmlformats.org/presentationml/2006/main" xmlns:r="http://schemas.openxmlformats.org/officeDocument/2006/relationships" show="0">
+  <p:cSld>
+    <p:bg>
+      <p:bgPr>
+        <a:solidFill>
+          <a:srgbClr val="EEEBE4"/>
+        </a:solidFill>
+        <a:effectLst/>
+      </p:bgPr>
+    </p:bg>
+    <p:spTree>
+      <p:nvGrpSpPr>
+        <p:cNvPr id="1" name=""/>
+        <p:cNvGrpSpPr/>
+        <p:nvPr/>
+      </p:nvGrpSpPr>
+      <p:grpSpPr/>
+      <p:sp>
+        <p:nvSpPr>
+          <p:cNvPr id="2" name="Rectangle 1"/>
           <p:cNvSpPr/>
           <p:nvPr/>
         </p:nvSpPr>
         <p:spPr>
           <a:xfrm>
-            <a:off x="8016239" y="2103120"/>
-            <a:ext cx="3322320" cy="3840480"/>
+            <a:off x="0" y="0"/>
+            <a:ext cx="12191695" cy="384048"/>
           </a:xfrm>
           <a:prstGeom prst="rect">
             <a:avLst/>
           </a:prstGeom>
           <a:solidFill>
-            <a:srgbClr val="FFFFFF"/>
+            <a:srgbClr val="0B2D5B"/>
           </a:solidFill>
-          <a:ln w="15875">
-            <a:solidFill>
-              <a:srgbClr val="D8D2C6"/>
-            </a:solidFill>
+          <a:ln>
+            <a:noFill/>
           </a:ln>
           <a:effectLst/>
         </p:spPr>
@@ -5801,14 +6181,14 @@
       </p:sp>
       <p:sp>
         <p:nvSpPr>
-          <p:cNvPr id="13" name="TextBox 12"/>
+          <p:cNvPr id="3" name="TextBox 2"/>
           <p:cNvSpPr txBox="1"/>
           <p:nvPr/>
         </p:nvSpPr>
         <p:spPr>
           <a:xfrm>
-            <a:off x="8244839" y="2286000"/>
-            <a:ext cx="2865120" cy="365760"/>
+            <a:off x="548640" y="100584"/>
+            <a:ext cx="10972800" cy="274320"/>
           </a:xfrm>
           <a:prstGeom prst="rect">
             <a:avLst/>
@@ -5823,31 +6203,31 @@
           <a:p>
             <a:pPr algn="l">
               <a:spcAft>
-                <a:spcPts val="585"/>
-              </a:spcAft>
-            </a:pPr>
-            <a:r>
-              <a:rPr sz="1300" b="1" i="0">
-                <a:solidFill>
-                  <a:srgbClr val="0B2D5B"/>
+                <a:spcPts val="495"/>
+              </a:spcAft>
+            </a:pPr>
+            <a:r>
+              <a:rPr sz="1100" b="1" i="0">
+                <a:solidFill>
+                  <a:srgbClr val="FFFFFF"/>
                 </a:solidFill>
                 <a:latin typeface="Inter Tight"/>
               </a:rPr>
-              <a:t>DEV</a:t>
-            </a:r>
-          </a:p>
-        </p:txBody>
-      </p:sp>
-      <p:sp>
-        <p:nvSpPr>
-          <p:cNvPr id="14" name="TextBox 13"/>
+              <a:t>TEACHER PAGE  ·  skipped when you present  ·  Before you teach</a:t>
+            </a:r>
+          </a:p>
+        </p:txBody>
+      </p:sp>
+      <p:sp>
+        <p:nvSpPr>
+          <p:cNvPr id="4" name="TextBox 3"/>
           <p:cNvSpPr txBox="1"/>
           <p:nvPr/>
         </p:nvSpPr>
         <p:spPr>
           <a:xfrm>
-            <a:off x="8244839" y="2743200"/>
-            <a:ext cx="2865120" cy="3017520"/>
+            <a:off x="548640" y="685800"/>
+            <a:ext cx="10972800" cy="640080"/>
           </a:xfrm>
           <a:prstGeom prst="rect">
             <a:avLst/>
@@ -5862,17 +6242,351 @@
           <a:p>
             <a:pPr algn="l">
               <a:spcAft>
-                <a:spcPts val="810"/>
-              </a:spcAft>
-            </a:pPr>
-            <a:r>
-              <a:rPr sz="1800" b="0" i="0">
+                <a:spcPts val="1350"/>
+              </a:spcAft>
+            </a:pPr>
+            <a:r>
+              <a:rPr sz="3000" b="1" i="0">
                 <a:solidFill>
                   <a:srgbClr val="1C1B19"/>
                 </a:solidFill>
                 <a:latin typeface="Source Serif 4"/>
               </a:rPr>
-              <a:t>A friend from your new advisory texts: "can you send your English essay? just want to see how you set it up."</a:t>
+              <a:t>Before you teach</a:t>
+            </a:r>
+          </a:p>
+        </p:txBody>
+      </p:sp>
+      <p:sp>
+        <p:nvSpPr>
+          <p:cNvPr id="5" name="TextBox 4"/>
+          <p:cNvSpPr txBox="1"/>
+          <p:nvPr/>
+        </p:nvSpPr>
+        <p:spPr>
+          <a:xfrm>
+            <a:off x="548640" y="1463040"/>
+            <a:ext cx="5394960" cy="4937760"/>
+          </a:xfrm>
+          <a:prstGeom prst="rect">
+            <a:avLst/>
+          </a:prstGeom>
+          <a:noFill/>
+        </p:spPr>
+        <p:txBody>
+          <a:bodyPr wrap="square" anchor="t" lIns="0" rIns="0" tIns="0" bIns="0">
+            <a:spAutoFit/>
+          </a:bodyPr>
+          <a:lstStyle/>
+          <a:p>
+            <a:pPr algn="l">
+              <a:spcAft>
+                <a:spcPts val="585"/>
+              </a:spcAft>
+            </a:pPr>
+            <a:r>
+              <a:rPr sz="1500" b="1" i="0">
+                <a:solidFill>
+                  <a:srgbClr val="1C1B19"/>
+                </a:solidFill>
+                <a:latin typeface="Source Serif 4"/>
+              </a:rPr>
+              <a:t>Don't ask about anyone's use.</a:t>
+            </a:r>
+          </a:p>
+          <a:p>
+            <a:pPr algn="l">
+              <a:spcAft>
+                <a:spcPts val="585"/>
+              </a:spcAft>
+            </a:pPr>
+            <a:r>
+              <a:rPr sz="1300" b="0" i="0">
+                <a:solidFill>
+                  <a:srgbClr val="1C1B19"/>
+                </a:solidFill>
+                <a:latin typeface="Source Serif 4"/>
+              </a:rPr>
+              <a:t>No hands up about drinking, parties or rides. Some students in the room have already said yes to things, and some have a family member who struggles with alcohol or drugs. Talk about the skill, never about who did what.</a:t>
+            </a:r>
+          </a:p>
+          <a:p>
+            <a:pPr algn="l">
+              <a:spcAft>
+                <a:spcPts val="585"/>
+              </a:spcAft>
+            </a:pPr>
+            <a:r>
+              <a:rPr sz="1300" b="0" i="0">
+                <a:solidFill>
+                  <a:srgbClr val="1C1B19"/>
+                </a:solidFill>
+                <a:latin typeface="Source Serif 4"/>
+              </a:rPr>
+              <a:t/>
+            </a:r>
+          </a:p>
+          <a:p>
+            <a:pPr algn="l">
+              <a:spcAft>
+                <a:spcPts val="585"/>
+              </a:spcAft>
+            </a:pPr>
+            <a:r>
+              <a:rPr sz="1500" b="1" i="0">
+                <a:solidFill>
+                  <a:srgbClr val="1C1B19"/>
+                </a:solidFill>
+                <a:latin typeface="Source Serif 4"/>
+              </a:rPr>
+              <a:t>Skip the lecture.</a:t>
+            </a:r>
+          </a:p>
+          <a:p>
+            <a:pPr algn="l">
+              <a:spcAft>
+                <a:spcPts val="585"/>
+              </a:spcAft>
+            </a:pPr>
+            <a:r>
+              <a:rPr sz="1300" b="0" i="0">
+                <a:solidFill>
+                  <a:srgbClr val="1C1B19"/>
+                </a:solidFill>
+                <a:latin typeface="Source Serif 4"/>
+              </a:rPr>
+              <a:t>The lesson itself says lecturing friends backfires, and the same goes for us. Keep the tone practical. A student who said yes last weekend should leave with a plan and without shame.</a:t>
+            </a:r>
+          </a:p>
+          <a:p>
+            <a:pPr algn="l">
+              <a:spcAft>
+                <a:spcPts val="585"/>
+              </a:spcAft>
+            </a:pPr>
+            <a:r>
+              <a:rPr sz="1300" b="0" i="0">
+                <a:solidFill>
+                  <a:srgbClr val="1C1B19"/>
+                </a:solidFill>
+                <a:latin typeface="Source Serif 4"/>
+              </a:rPr>
+              <a:t/>
+            </a:r>
+          </a:p>
+          <a:p>
+            <a:pPr algn="l">
+              <a:spcAft>
+                <a:spcPts val="585"/>
+              </a:spcAft>
+            </a:pPr>
+            <a:r>
+              <a:rPr sz="1500" b="1" i="0">
+                <a:solidFill>
+                  <a:srgbClr val="1C1B19"/>
+                </a:solidFill>
+                <a:latin typeface="Source Serif 4"/>
+              </a:rPr>
+              <a:t>Sexual pressure and photos.</a:t>
+            </a:r>
+          </a:p>
+          <a:p>
+            <a:pPr algn="l">
+              <a:spcAft>
+                <a:spcPts val="585"/>
+              </a:spcAft>
+            </a:pPr>
+            <a:r>
+              <a:rPr sz="1300" b="0" i="0">
+                <a:solidFill>
+                  <a:srgbClr val="1C1B19"/>
+                </a:solidFill>
+                <a:latin typeface="Source Serif 4"/>
+              </a:rPr>
+              <a:t>The page names requests for nude or sexual photos as a hard no to tell an adult about. If a student discloses pressure, threats or a photo already sent, thank them, don't ask for details in class, and walk them to a counselor that day. Know your reporting duty before class.</a:t>
+            </a:r>
+          </a:p>
+          <a:p>
+            <a:pPr algn="l">
+              <a:spcAft>
+                <a:spcPts val="585"/>
+              </a:spcAft>
+            </a:pPr>
+            <a:r>
+              <a:rPr sz="1300" b="0" i="0">
+                <a:solidFill>
+                  <a:srgbClr val="1C1B19"/>
+                </a:solidFill>
+                <a:latin typeface="Source Serif 4"/>
+              </a:rPr>
+              <a:t/>
+            </a:r>
+          </a:p>
+        </p:txBody>
+      </p:sp>
+      <p:sp>
+        <p:nvSpPr>
+          <p:cNvPr id="6" name="TextBox 5"/>
+          <p:cNvSpPr txBox="1"/>
+          <p:nvPr/>
+        </p:nvSpPr>
+        <p:spPr>
+          <a:xfrm>
+            <a:off x="6217920" y="1463040"/>
+            <a:ext cx="5394960" cy="4937760"/>
+          </a:xfrm>
+          <a:prstGeom prst="rect">
+            <a:avLst/>
+          </a:prstGeom>
+          <a:noFill/>
+        </p:spPr>
+        <p:txBody>
+          <a:bodyPr wrap="square" anchor="t" lIns="0" rIns="0" tIns="0" bIns="0">
+            <a:spAutoFit/>
+          </a:bodyPr>
+          <a:lstStyle/>
+          <a:p>
+            <a:pPr algn="l">
+              <a:spcAft>
+                <a:spcPts val="585"/>
+              </a:spcAft>
+            </a:pPr>
+            <a:r>
+              <a:rPr sz="1500" b="1" i="0">
+                <a:solidFill>
+                  <a:srgbClr val="1C1B19"/>
+                </a:solidFill>
+                <a:latin typeface="Source Serif 4"/>
+              </a:rPr>
+              <a:t>Know what happens next.</a:t>
+            </a:r>
+          </a:p>
+          <a:p>
+            <a:pPr algn="l">
+              <a:spcAft>
+                <a:spcPts val="585"/>
+              </a:spcAft>
+            </a:pPr>
+            <a:r>
+              <a:rPr sz="1300" b="0" i="0">
+                <a:solidFill>
+                  <a:srgbClr val="1C1B19"/>
+                </a:solidFill>
+                <a:latin typeface="Source Serif 4"/>
+              </a:rPr>
+              <a:t>If a student says a friend is in trouble with alcohol or drugs, say you want to get help, not get anyone in trouble. Know who you'll walk them to. Massachusetts' Good Samaritan law protects the caller and the person who overdosed from possession charges.</a:t>
+            </a:r>
+          </a:p>
+          <a:p>
+            <a:pPr algn="l">
+              <a:spcAft>
+                <a:spcPts val="585"/>
+              </a:spcAft>
+            </a:pPr>
+            <a:r>
+              <a:rPr sz="1300" b="0" i="0">
+                <a:solidFill>
+                  <a:srgbClr val="1C1B19"/>
+                </a:solidFill>
+                <a:latin typeface="Source Serif 4"/>
+              </a:rPr>
+              <a:t/>
+            </a:r>
+          </a:p>
+          <a:p>
+            <a:pPr algn="l">
+              <a:spcAft>
+                <a:spcPts val="585"/>
+              </a:spcAft>
+            </a:pPr>
+            <a:r>
+              <a:rPr sz="1500" b="1" i="0">
+                <a:solidFill>
+                  <a:srgbClr val="1C1B19"/>
+                </a:solidFill>
+                <a:latin typeface="Source Serif 4"/>
+              </a:rPr>
+              <a:t>The car matters now.</a:t>
+            </a:r>
+          </a:p>
+          <a:p>
+            <a:pPr algn="l">
+              <a:spcAft>
+                <a:spcPts val="585"/>
+              </a:spcAft>
+            </a:pPr>
+            <a:r>
+              <a:rPr sz="1300" b="0" i="0">
+                <a:solidFill>
+                  <a:srgbClr val="1C1B19"/>
+                </a:solidFill>
+                <a:latin typeface="Source Serif 4"/>
+              </a:rPr>
+              <a:t>Ninth graders ride with older students who just got licenses. Be clear on the hard line: never ride with someone who has been drinking or using, no matter how short the drive. A code-word call is always okay.</a:t>
+            </a:r>
+          </a:p>
+          <a:p>
+            <a:pPr algn="l">
+              <a:spcAft>
+                <a:spcPts val="585"/>
+              </a:spcAft>
+            </a:pPr>
+            <a:r>
+              <a:rPr sz="1300" b="0" i="0">
+                <a:solidFill>
+                  <a:srgbClr val="1C1B19"/>
+                </a:solidFill>
+                <a:latin typeface="Source Serif 4"/>
+              </a:rPr>
+              <a:t/>
+            </a:r>
+          </a:p>
+          <a:p>
+            <a:pPr algn="l">
+              <a:spcAft>
+                <a:spcPts val="585"/>
+              </a:spcAft>
+            </a:pPr>
+            <a:r>
+              <a:rPr sz="1500" b="1" i="0">
+                <a:solidFill>
+                  <a:srgbClr val="1C1B19"/>
+                </a:solidFill>
+                <a:latin typeface="Source Serif 4"/>
+              </a:rPr>
+              <a:t>The code word may not be a parent.</a:t>
+            </a:r>
+          </a:p>
+          <a:p>
+            <a:pPr algn="l">
+              <a:spcAft>
+                <a:spcPts val="585"/>
+              </a:spcAft>
+            </a:pPr>
+            <a:r>
+              <a:rPr sz="1300" b="0" i="0">
+                <a:solidFill>
+                  <a:srgbClr val="1C1B19"/>
+                </a:solidFill>
+                <a:latin typeface="Source Serif 4"/>
+              </a:rPr>
+              <a:t>Don't say "text your mom or dad." For some students home wouldn't be a calm place to make that call. Say "an adult you trust" and give examples: an older sibling or cousin, an aunt, a coach, a family friend.</a:t>
+            </a:r>
+          </a:p>
+          <a:p>
+            <a:pPr algn="l">
+              <a:spcAft>
+                <a:spcPts val="585"/>
+              </a:spcAft>
+            </a:pPr>
+            <a:r>
+              <a:rPr sz="1300" b="0" i="0">
+                <a:solidFill>
+                  <a:srgbClr val="1C1B19"/>
+                </a:solidFill>
+                <a:latin typeface="Source Serif 4"/>
+              </a:rPr>
+              <a:t/>
             </a:r>
           </a:p>
         </p:txBody>
@@ -5885,7 +6599,1211 @@
 </p:sld>
 </file>
 
-<file path=ppt/slides/slide12.xml><?xml version="1.0" encoding="utf-8"?>
+<file path=ppt/slides/slide14.xml><?xml version="1.0" encoding="utf-8"?>
+<p:sld xmlns:a="http://schemas.openxmlformats.org/drawingml/2006/main" xmlns:p="http://schemas.openxmlformats.org/presentationml/2006/main" xmlns:r="http://schemas.openxmlformats.org/officeDocument/2006/relationships" show="0">
+  <p:cSld>
+    <p:bg>
+      <p:bgPr>
+        <a:solidFill>
+          <a:srgbClr val="EEEBE4"/>
+        </a:solidFill>
+        <a:effectLst/>
+      </p:bgPr>
+    </p:bg>
+    <p:spTree>
+      <p:nvGrpSpPr>
+        <p:cNvPr id="1" name=""/>
+        <p:cNvGrpSpPr/>
+        <p:nvPr/>
+      </p:nvGrpSpPr>
+      <p:grpSpPr/>
+      <p:sp>
+        <p:nvSpPr>
+          <p:cNvPr id="2" name="Rectangle 1"/>
+          <p:cNvSpPr/>
+          <p:nvPr/>
+        </p:nvSpPr>
+        <p:spPr>
+          <a:xfrm>
+            <a:off x="0" y="0"/>
+            <a:ext cx="12191695" cy="384048"/>
+          </a:xfrm>
+          <a:prstGeom prst="rect">
+            <a:avLst/>
+          </a:prstGeom>
+          <a:solidFill>
+            <a:srgbClr val="0B2D5B"/>
+          </a:solidFill>
+          <a:ln>
+            <a:noFill/>
+          </a:ln>
+          <a:effectLst/>
+        </p:spPr>
+        <p:style>
+          <a:lnRef idx="1">
+            <a:schemeClr val="accent1"/>
+          </a:lnRef>
+          <a:fillRef idx="3">
+            <a:schemeClr val="accent1"/>
+          </a:fillRef>
+          <a:effectRef idx="2">
+            <a:schemeClr val="accent1"/>
+          </a:effectRef>
+          <a:fontRef idx="minor">
+            <a:schemeClr val="lt1"/>
+          </a:fontRef>
+        </p:style>
+        <p:txBody>
+          <a:bodyPr rtlCol="0" anchor="ctr"/>
+          <a:lstStyle/>
+          <a:p>
+            <a:pPr algn="ctr"/>
+          </a:p>
+        </p:txBody>
+      </p:sp>
+      <p:sp>
+        <p:nvSpPr>
+          <p:cNvPr id="3" name="TextBox 2"/>
+          <p:cNvSpPr txBox="1"/>
+          <p:nvPr/>
+        </p:nvSpPr>
+        <p:spPr>
+          <a:xfrm>
+            <a:off x="548640" y="100584"/>
+            <a:ext cx="10972800" cy="274320"/>
+          </a:xfrm>
+          <a:prstGeom prst="rect">
+            <a:avLst/>
+          </a:prstGeom>
+          <a:noFill/>
+        </p:spPr>
+        <p:txBody>
+          <a:bodyPr wrap="square" anchor="t" lIns="0" rIns="0" tIns="0" bIns="0">
+            <a:spAutoFit/>
+          </a:bodyPr>
+          <a:lstStyle/>
+          <a:p>
+            <a:pPr algn="l">
+              <a:spcAft>
+                <a:spcPts val="495"/>
+              </a:spcAft>
+            </a:pPr>
+            <a:r>
+              <a:rPr sz="1100" b="1" i="0">
+                <a:solidFill>
+                  <a:srgbClr val="FFFFFF"/>
+                </a:solidFill>
+                <a:latin typeface="Inter Tight"/>
+              </a:rPr>
+              <a:t>TEACHER PAGE  ·  skipped when you present  ·  Every student in the room</a:t>
+            </a:r>
+          </a:p>
+        </p:txBody>
+      </p:sp>
+      <p:sp>
+        <p:nvSpPr>
+          <p:cNvPr id="4" name="TextBox 3"/>
+          <p:cNvSpPr txBox="1"/>
+          <p:nvPr/>
+        </p:nvSpPr>
+        <p:spPr>
+          <a:xfrm>
+            <a:off x="548640" y="685800"/>
+            <a:ext cx="10972800" cy="640080"/>
+          </a:xfrm>
+          <a:prstGeom prst="rect">
+            <a:avLst/>
+          </a:prstGeom>
+          <a:noFill/>
+        </p:spPr>
+        <p:txBody>
+          <a:bodyPr wrap="square" anchor="t" lIns="0" rIns="0" tIns="0" bIns="0">
+            <a:spAutoFit/>
+          </a:bodyPr>
+          <a:lstStyle/>
+          <a:p>
+            <a:pPr algn="l">
+              <a:spcAft>
+                <a:spcPts val="1350"/>
+              </a:spcAft>
+            </a:pPr>
+            <a:r>
+              <a:rPr sz="3000" b="1" i="0">
+                <a:solidFill>
+                  <a:srgbClr val="1C1B19"/>
+                </a:solidFill>
+                <a:latin typeface="Source Serif 4"/>
+              </a:rPr>
+              <a:t>Every student in the room</a:t>
+            </a:r>
+          </a:p>
+        </p:txBody>
+      </p:sp>
+      <p:sp>
+        <p:nvSpPr>
+          <p:cNvPr id="5" name="TextBox 4"/>
+          <p:cNvSpPr txBox="1"/>
+          <p:nvPr/>
+        </p:nvSpPr>
+        <p:spPr>
+          <a:xfrm>
+            <a:off x="548640" y="1325880"/>
+            <a:ext cx="10972800" cy="365760"/>
+          </a:xfrm>
+          <a:prstGeom prst="rect">
+            <a:avLst/>
+          </a:prstGeom>
+          <a:noFill/>
+        </p:spPr>
+        <p:txBody>
+          <a:bodyPr wrap="square" anchor="t" lIns="0" rIns="0" tIns="0" bIns="0">
+            <a:spAutoFit/>
+          </a:bodyPr>
+          <a:lstStyle/>
+          <a:p>
+            <a:pPr algn="l">
+              <a:spcAft>
+                <a:spcPts val="630"/>
+              </a:spcAft>
+            </a:pPr>
+            <a:r>
+              <a:rPr sz="1400" b="0" i="0">
+                <a:solidFill>
+                  <a:srgbClr val="5D5A54"/>
+                </a:solidFill>
+                <a:latin typeface="Inter Tight"/>
+              </a:rPr>
+              <a:t>Culture, family, identity, ability and money: what to keep in mind for this topic.</a:t>
+            </a:r>
+          </a:p>
+        </p:txBody>
+      </p:sp>
+      <p:sp>
+        <p:nvSpPr>
+          <p:cNvPr id="6" name="TextBox 5"/>
+          <p:cNvSpPr txBox="1"/>
+          <p:nvPr/>
+        </p:nvSpPr>
+        <p:spPr>
+          <a:xfrm>
+            <a:off x="548640" y="1828800"/>
+            <a:ext cx="5394960" cy="4572000"/>
+          </a:xfrm>
+          <a:prstGeom prst="rect">
+            <a:avLst/>
+          </a:prstGeom>
+          <a:noFill/>
+        </p:spPr>
+        <p:txBody>
+          <a:bodyPr wrap="square" anchor="t" lIns="0" rIns="0" tIns="0" bIns="0">
+            <a:spAutoFit/>
+          </a:bodyPr>
+          <a:lstStyle/>
+          <a:p>
+            <a:pPr algn="l">
+              <a:spcAft>
+                <a:spcPts val="585"/>
+              </a:spcAft>
+            </a:pPr>
+            <a:r>
+              <a:rPr sz="1500" b="1" i="0">
+                <a:solidFill>
+                  <a:srgbClr val="1C1B19"/>
+                </a:solidFill>
+                <a:latin typeface="Source Serif 4"/>
+              </a:rPr>
+              <a:t>Families draw different lines.</a:t>
+            </a:r>
+          </a:p>
+          <a:p>
+            <a:pPr algn="l">
+              <a:spcAft>
+                <a:spcPts val="585"/>
+              </a:spcAft>
+            </a:pPr>
+            <a:r>
+              <a:rPr sz="1300" b="0" i="0">
+                <a:solidFill>
+                  <a:srgbClr val="1C1B19"/>
+                </a:solidFill>
+                <a:latin typeface="Source Serif 4"/>
+              </a:rPr>
+              <a:t>Rules about parties, curfews, rides and alcohol vary a lot from home to home, and so does what's allowed at family events. Teach the skill of saying no to what you've decided against, without ranking anyone's family rules.</a:t>
+            </a:r>
+          </a:p>
+          <a:p>
+            <a:pPr algn="l">
+              <a:spcAft>
+                <a:spcPts val="585"/>
+              </a:spcAft>
+            </a:pPr>
+            <a:r>
+              <a:rPr sz="1300" b="0" i="0">
+                <a:solidFill>
+                  <a:srgbClr val="1C1B19"/>
+                </a:solidFill>
+                <a:latin typeface="Source Serif 4"/>
+              </a:rPr>
+              <a:t/>
+            </a:r>
+          </a:p>
+          <a:p>
+            <a:pPr algn="l">
+              <a:spcAft>
+                <a:spcPts val="585"/>
+              </a:spcAft>
+            </a:pPr>
+            <a:r>
+              <a:rPr sz="1500" b="1" i="0">
+                <a:solidFill>
+                  <a:srgbClr val="1C1B19"/>
+                </a:solidFill>
+                <a:latin typeface="Source Serif 4"/>
+              </a:rPr>
+              <a:t>"My parents would never" is a real reason.</a:t>
+            </a:r>
+          </a:p>
+          <a:p>
+            <a:pPr algn="l">
+              <a:spcAft>
+                <a:spcPts val="585"/>
+              </a:spcAft>
+            </a:pPr>
+            <a:r>
+              <a:rPr sz="1300" b="0" i="0">
+                <a:solidFill>
+                  <a:srgbClr val="1C1B19"/>
+                </a:solidFill>
+                <a:latin typeface="Source Serif 4"/>
+              </a:rPr>
+              <a:t>For many students it's simply true, and saying so isn't weak. Faith is a real reason too, and so is a job, a coach or a game in the morning. Don't assume students are religious or that they aren't.</a:t>
+            </a:r>
+          </a:p>
+          <a:p>
+            <a:pPr algn="l">
+              <a:spcAft>
+                <a:spcPts val="585"/>
+              </a:spcAft>
+            </a:pPr>
+            <a:r>
+              <a:rPr sz="1300" b="0" i="0">
+                <a:solidFill>
+                  <a:srgbClr val="1C1B19"/>
+                </a:solidFill>
+                <a:latin typeface="Source Serif 4"/>
+              </a:rPr>
+              <a:t/>
+            </a:r>
+          </a:p>
+          <a:p>
+            <a:pPr algn="l">
+              <a:spcAft>
+                <a:spcPts val="585"/>
+              </a:spcAft>
+            </a:pPr>
+            <a:r>
+              <a:rPr sz="1500" b="1" i="0">
+                <a:solidFill>
+                  <a:srgbClr val="1C1B19"/>
+                </a:solidFill>
+                <a:latin typeface="Source Serif 4"/>
+              </a:rPr>
+              <a:t>Who the trusted adult is.</a:t>
+            </a:r>
+          </a:p>
+          <a:p>
+            <a:pPr algn="l">
+              <a:spcAft>
+                <a:spcPts val="585"/>
+              </a:spcAft>
+            </a:pPr>
+            <a:r>
+              <a:rPr sz="1300" b="0" i="0">
+                <a:solidFill>
+                  <a:srgbClr val="1C1B19"/>
+                </a:solidFill>
+                <a:latin typeface="Source Serif 4"/>
+              </a:rPr>
+              <a:t>Students live with a single parent, grandparents, two moms or two dads, foster or kinship families, or split time between homes. The code-word plan works with any adult they trust, including someone outside the home.</a:t>
+            </a:r>
+          </a:p>
+          <a:p>
+            <a:pPr algn="l">
+              <a:spcAft>
+                <a:spcPts val="585"/>
+              </a:spcAft>
+            </a:pPr>
+            <a:r>
+              <a:rPr sz="1300" b="0" i="0">
+                <a:solidFill>
+                  <a:srgbClr val="1C1B19"/>
+                </a:solidFill>
+                <a:latin typeface="Source Serif 4"/>
+              </a:rPr>
+              <a:t/>
+            </a:r>
+          </a:p>
+        </p:txBody>
+      </p:sp>
+      <p:sp>
+        <p:nvSpPr>
+          <p:cNvPr id="7" name="TextBox 6"/>
+          <p:cNvSpPr txBox="1"/>
+          <p:nvPr/>
+        </p:nvSpPr>
+        <p:spPr>
+          <a:xfrm>
+            <a:off x="6217920" y="1828800"/>
+            <a:ext cx="5394960" cy="4572000"/>
+          </a:xfrm>
+          <a:prstGeom prst="rect">
+            <a:avLst/>
+          </a:prstGeom>
+          <a:noFill/>
+        </p:spPr>
+        <p:txBody>
+          <a:bodyPr wrap="square" anchor="t" lIns="0" rIns="0" tIns="0" bIns="0">
+            <a:spAutoFit/>
+          </a:bodyPr>
+          <a:lstStyle/>
+          <a:p>
+            <a:pPr algn="l">
+              <a:spcAft>
+                <a:spcPts val="585"/>
+              </a:spcAft>
+            </a:pPr>
+            <a:r>
+              <a:rPr sz="1500" b="1" i="0">
+                <a:solidFill>
+                  <a:srgbClr val="1C1B19"/>
+                </a:solidFill>
+                <a:latin typeface="Source Serif 4"/>
+              </a:rPr>
+              <a:t>LGBTQ+ students and pressure.</a:t>
+            </a:r>
+          </a:p>
+          <a:p>
+            <a:pPr algn="l">
+              <a:spcAft>
+                <a:spcPts val="585"/>
+              </a:spcAft>
+            </a:pPr>
+            <a:r>
+              <a:rPr sz="1300" b="0" i="0">
+                <a:solidFill>
+                  <a:srgbClr val="1C1B19"/>
+                </a:solidFill>
+                <a:latin typeface="Source Serif 4"/>
+              </a:rPr>
+              <a:t>Pressure can include being pushed to talk about who you like, or the threat of being outed. A student who isn't out may not have a safe adult at home for the code word. A counselor can help them figure out who.</a:t>
+            </a:r>
+          </a:p>
+          <a:p>
+            <a:pPr algn="l">
+              <a:spcAft>
+                <a:spcPts val="585"/>
+              </a:spcAft>
+            </a:pPr>
+            <a:r>
+              <a:rPr sz="1300" b="0" i="0">
+                <a:solidFill>
+                  <a:srgbClr val="1C1B19"/>
+                </a:solidFill>
+                <a:latin typeface="Source Serif 4"/>
+              </a:rPr>
+              <a:t/>
+            </a:r>
+          </a:p>
+          <a:p>
+            <a:pPr algn="l">
+              <a:spcAft>
+                <a:spcPts val="585"/>
+              </a:spcAft>
+            </a:pPr>
+            <a:r>
+              <a:rPr sz="1500" b="1" i="0">
+                <a:solidFill>
+                  <a:srgbClr val="1C1B19"/>
+                </a:solidFill>
+                <a:latin typeface="Source Serif 4"/>
+              </a:rPr>
+              <a:t>Scripts help students who freeze.</a:t>
+            </a:r>
+          </a:p>
+          <a:p>
+            <a:pPr algn="l">
+              <a:spcAft>
+                <a:spcPts val="585"/>
+              </a:spcAft>
+            </a:pPr>
+            <a:r>
+              <a:rPr sz="1300" b="0" i="0">
+                <a:solidFill>
+                  <a:srgbClr val="1C1B19"/>
+                </a:solidFill>
+                <a:latin typeface="Source Serif 4"/>
+              </a:rPr>
+              <a:t>Students who are autistic, anxious or slower to process often find a ready-made line easier than thinking on the spot. That's the point of deciding ahead. In the pair practice, let students write or read their line instead of performing it, and don't treat eye contact as a sign of confidence.</a:t>
+            </a:r>
+          </a:p>
+          <a:p>
+            <a:pPr algn="l">
+              <a:spcAft>
+                <a:spcPts val="585"/>
+              </a:spcAft>
+            </a:pPr>
+            <a:r>
+              <a:rPr sz="1300" b="0" i="0">
+                <a:solidFill>
+                  <a:srgbClr val="1C1B19"/>
+                </a:solidFill>
+                <a:latin typeface="Source Serif 4"/>
+              </a:rPr>
+              <a:t/>
+            </a:r>
+          </a:p>
+          <a:p>
+            <a:pPr algn="l">
+              <a:spcAft>
+                <a:spcPts val="585"/>
+              </a:spcAft>
+            </a:pPr>
+            <a:r>
+              <a:rPr sz="1500" b="1" i="0">
+                <a:solidFill>
+                  <a:srgbClr val="1C1B19"/>
+                </a:solidFill>
+                <a:latin typeface="Source Serif 4"/>
+              </a:rPr>
+              <a:t>Not everyone has a ride.</a:t>
+            </a:r>
+          </a:p>
+          <a:p>
+            <a:pPr algn="l">
+              <a:spcAft>
+                <a:spcPts val="585"/>
+              </a:spcAft>
+            </a:pPr>
+            <a:r>
+              <a:rPr sz="1300" b="0" i="0">
+                <a:solidFill>
+                  <a:srgbClr val="1C1B19"/>
+                </a:solidFill>
+                <a:latin typeface="Source Serif 4"/>
+              </a:rPr>
+              <a:t>Some families don't have a car or a parent free at night. In the Ayesha scenario, the train or another family's driver counts. "I open at work tomorrow" is a real reason for students with jobs.</a:t>
+            </a:r>
+          </a:p>
+          <a:p>
+            <a:pPr algn="l">
+              <a:spcAft>
+                <a:spcPts val="585"/>
+              </a:spcAft>
+            </a:pPr>
+            <a:r>
+              <a:rPr sz="1300" b="0" i="0">
+                <a:solidFill>
+                  <a:srgbClr val="1C1B19"/>
+                </a:solidFill>
+                <a:latin typeface="Source Serif 4"/>
+              </a:rPr>
+              <a:t/>
+            </a:r>
+          </a:p>
+        </p:txBody>
+      </p:sp>
+    </p:spTree>
+  </p:cSld>
+  <p:clrMapOvr>
+    <a:masterClrMapping/>
+  </p:clrMapOvr>
+</p:sld>
+</file>
+
+<file path=ppt/slides/slide15.xml><?xml version="1.0" encoding="utf-8"?>
+<p:sld xmlns:a="http://schemas.openxmlformats.org/drawingml/2006/main" xmlns:p="http://schemas.openxmlformats.org/presentationml/2006/main" xmlns:r="http://schemas.openxmlformats.org/officeDocument/2006/relationships" show="0">
+  <p:cSld>
+    <p:bg>
+      <p:bgPr>
+        <a:solidFill>
+          <a:srgbClr val="EEEBE4"/>
+        </a:solidFill>
+        <a:effectLst/>
+      </p:bgPr>
+    </p:bg>
+    <p:spTree>
+      <p:nvGrpSpPr>
+        <p:cNvPr id="1" name=""/>
+        <p:cNvGrpSpPr/>
+        <p:nvPr/>
+      </p:nvGrpSpPr>
+      <p:grpSpPr/>
+      <p:sp>
+        <p:nvSpPr>
+          <p:cNvPr id="2" name="Rectangle 1"/>
+          <p:cNvSpPr/>
+          <p:nvPr/>
+        </p:nvSpPr>
+        <p:spPr>
+          <a:xfrm>
+            <a:off x="0" y="0"/>
+            <a:ext cx="12191695" cy="384048"/>
+          </a:xfrm>
+          <a:prstGeom prst="rect">
+            <a:avLst/>
+          </a:prstGeom>
+          <a:solidFill>
+            <a:srgbClr val="0B2D5B"/>
+          </a:solidFill>
+          <a:ln>
+            <a:noFill/>
+          </a:ln>
+          <a:effectLst/>
+        </p:spPr>
+        <p:style>
+          <a:lnRef idx="1">
+            <a:schemeClr val="accent1"/>
+          </a:lnRef>
+          <a:fillRef idx="3">
+            <a:schemeClr val="accent1"/>
+          </a:fillRef>
+          <a:effectRef idx="2">
+            <a:schemeClr val="accent1"/>
+          </a:effectRef>
+          <a:fontRef idx="minor">
+            <a:schemeClr val="lt1"/>
+          </a:fontRef>
+        </p:style>
+        <p:txBody>
+          <a:bodyPr rtlCol="0" anchor="ctr"/>
+          <a:lstStyle/>
+          <a:p>
+            <a:pPr algn="ctr"/>
+          </a:p>
+        </p:txBody>
+      </p:sp>
+      <p:sp>
+        <p:nvSpPr>
+          <p:cNvPr id="3" name="TextBox 2"/>
+          <p:cNvSpPr txBox="1"/>
+          <p:nvPr/>
+        </p:nvSpPr>
+        <p:spPr>
+          <a:xfrm>
+            <a:off x="548640" y="100584"/>
+            <a:ext cx="10972800" cy="274320"/>
+          </a:xfrm>
+          <a:prstGeom prst="rect">
+            <a:avLst/>
+          </a:prstGeom>
+          <a:noFill/>
+        </p:spPr>
+        <p:txBody>
+          <a:bodyPr wrap="square" anchor="t" lIns="0" rIns="0" tIns="0" bIns="0">
+            <a:spAutoFit/>
+          </a:bodyPr>
+          <a:lstStyle/>
+          <a:p>
+            <a:pPr algn="l">
+              <a:spcAft>
+                <a:spcPts val="495"/>
+              </a:spcAft>
+            </a:pPr>
+            <a:r>
+              <a:rPr sz="1100" b="1" i="0">
+                <a:solidFill>
+                  <a:srgbClr val="FFFFFF"/>
+                </a:solidFill>
+                <a:latin typeface="Inter Tight"/>
+              </a:rPr>
+              <a:t>TEACHER PAGE  ·  skipped when you present  ·  Background</a:t>
+            </a:r>
+          </a:p>
+        </p:txBody>
+      </p:sp>
+      <p:sp>
+        <p:nvSpPr>
+          <p:cNvPr id="4" name="TextBox 3"/>
+          <p:cNvSpPr txBox="1"/>
+          <p:nvPr/>
+        </p:nvSpPr>
+        <p:spPr>
+          <a:xfrm>
+            <a:off x="548640" y="685800"/>
+            <a:ext cx="10972800" cy="640080"/>
+          </a:xfrm>
+          <a:prstGeom prst="rect">
+            <a:avLst/>
+          </a:prstGeom>
+          <a:noFill/>
+        </p:spPr>
+        <p:txBody>
+          <a:bodyPr wrap="square" anchor="t" lIns="0" rIns="0" tIns="0" bIns="0">
+            <a:spAutoFit/>
+          </a:bodyPr>
+          <a:lstStyle/>
+          <a:p>
+            <a:pPr algn="l">
+              <a:spcAft>
+                <a:spcPts val="1350"/>
+              </a:spcAft>
+            </a:pPr>
+            <a:r>
+              <a:rPr sz="3000" b="1" i="0">
+                <a:solidFill>
+                  <a:srgbClr val="1C1B19"/>
+                </a:solidFill>
+                <a:latin typeface="Source Serif 4"/>
+              </a:rPr>
+              <a:t>What the research says</a:t>
+            </a:r>
+          </a:p>
+        </p:txBody>
+      </p:sp>
+      <p:sp>
+        <p:nvSpPr>
+          <p:cNvPr id="5" name="TextBox 4"/>
+          <p:cNvSpPr txBox="1"/>
+          <p:nvPr/>
+        </p:nvSpPr>
+        <p:spPr>
+          <a:xfrm>
+            <a:off x="548640" y="1463040"/>
+            <a:ext cx="5394960" cy="4937760"/>
+          </a:xfrm>
+          <a:prstGeom prst="rect">
+            <a:avLst/>
+          </a:prstGeom>
+          <a:noFill/>
+        </p:spPr>
+        <p:txBody>
+          <a:bodyPr wrap="square" anchor="t" lIns="0" rIns="0" tIns="0" bIns="0">
+            <a:spAutoFit/>
+          </a:bodyPr>
+          <a:lstStyle/>
+          <a:p>
+            <a:pPr algn="l">
+              <a:spcAft>
+                <a:spcPts val="585"/>
+              </a:spcAft>
+            </a:pPr>
+            <a:r>
+              <a:rPr sz="1300" b="0" i="0">
+                <a:solidFill>
+                  <a:srgbClr val="1C1B19"/>
+                </a:solidFill>
+                <a:latin typeface="Source Serif 4"/>
+              </a:rPr>
+              <a:t>Teens, young adults and adults played a driving game alone and while they believed friends were watching. Only the teens took more chances with friends watching, and only the teens' reward regions lit up more. Their brake regions didn't get weaker.</a:t>
+            </a:r>
+          </a:p>
+          <a:p>
+            <a:pPr algn="l">
+              <a:spcAft>
+                <a:spcPts val="585"/>
+              </a:spcAft>
+            </a:pPr>
+            <a:r>
+              <a:rPr sz="1050" b="0" i="0">
+                <a:solidFill>
+                  <a:srgbClr val="5D5A54"/>
+                </a:solidFill>
+                <a:latin typeface="Inter Tight"/>
+              </a:rPr>
+              <a:t>Chein et al., Developmental Science, 2011 (Temple University)</a:t>
+            </a:r>
+          </a:p>
+          <a:p>
+            <a:pPr algn="l">
+              <a:spcAft>
+                <a:spcPts val="585"/>
+              </a:spcAft>
+            </a:pPr>
+            <a:r>
+              <a:rPr sz="1300" b="0" i="0">
+                <a:solidFill>
+                  <a:srgbClr val="1C1B19"/>
+                </a:solidFill>
+                <a:latin typeface="Source Serif 4"/>
+              </a:rPr>
+              <a:t>306 people randomly assigned to work with two same-age peers took more risks and focused more on benefits than costs. The effect was strongest for ages 13 to 16 and 18 to 22, and weakest for adults 24 and older.</a:t>
+            </a:r>
+          </a:p>
+          <a:p>
+            <a:pPr algn="l">
+              <a:spcAft>
+                <a:spcPts val="585"/>
+              </a:spcAft>
+            </a:pPr>
+            <a:r>
+              <a:rPr sz="1050" b="0" i="0">
+                <a:solidFill>
+                  <a:srgbClr val="5D5A54"/>
+                </a:solidFill>
+                <a:latin typeface="Inter Tight"/>
+              </a:rPr>
+              <a:t>Gardner and Steinberg, Developmental Psychology, 2005</a:t>
+            </a:r>
+          </a:p>
+          <a:p>
+            <a:pPr algn="l">
+              <a:spcAft>
+                <a:spcPts val="585"/>
+              </a:spcAft>
+            </a:pPr>
+            <a:r>
+              <a:rPr sz="1300" b="0" i="0">
+                <a:solidFill>
+                  <a:srgbClr val="1C1B19"/>
+                </a:solidFill>
+                <a:latin typeface="Source Serif 4"/>
+              </a:rPr>
+              <a:t>Princeton students believed they were more uncomfortable with campus drinking than the average student. Most of them felt that way, so the "average student" they imagined barely existed (pluralistic ignorance).</a:t>
+            </a:r>
+          </a:p>
+          <a:p>
+            <a:pPr algn="l">
+              <a:spcAft>
+                <a:spcPts val="585"/>
+              </a:spcAft>
+            </a:pPr>
+            <a:r>
+              <a:rPr sz="1050" b="0" i="0">
+                <a:solidFill>
+                  <a:srgbClr val="5D5A54"/>
+                </a:solidFill>
+                <a:latin typeface="Inter Tight"/>
+              </a:rPr>
+              <a:t>Prentice and Miller, Journal of Personality and Social Psychology, 1993</a:t>
+            </a:r>
+          </a:p>
+          <a:p>
+            <a:pPr algn="l">
+              <a:spcAft>
+                <a:spcPts val="585"/>
+              </a:spcAft>
+            </a:pPr>
+            <a:r>
+              <a:rPr sz="1300" b="0" i="0">
+                <a:solidFill>
+                  <a:srgbClr val="1C1B19"/>
+                </a:solidFill>
+                <a:latin typeface="Source Serif 4"/>
+              </a:rPr>
+              <a:t>About 29% of U.S. high school students reported current alcohol use, marijuana use or prescription opioid misuse in 2021. About 7 in 10 had done none of those in the past month.</a:t>
+            </a:r>
+          </a:p>
+          <a:p>
+            <a:pPr algn="l">
+              <a:spcAft>
+                <a:spcPts val="585"/>
+              </a:spcAft>
+            </a:pPr>
+            <a:r>
+              <a:rPr sz="1050" b="0" i="0">
+                <a:solidFill>
+                  <a:srgbClr val="5D5A54"/>
+                </a:solidFill>
+                <a:latin typeface="Inter Tight"/>
+              </a:rPr>
+              <a:t>CDC Youth Risk Behavior Survey, 2021 (Hoots et al., MMWR, 2023)</a:t>
+            </a:r>
+          </a:p>
+        </p:txBody>
+      </p:sp>
+      <p:sp>
+        <p:nvSpPr>
+          <p:cNvPr id="6" name="TextBox 5"/>
+          <p:cNvSpPr txBox="1"/>
+          <p:nvPr/>
+        </p:nvSpPr>
+        <p:spPr>
+          <a:xfrm>
+            <a:off x="6217920" y="1463040"/>
+            <a:ext cx="5394960" cy="4937760"/>
+          </a:xfrm>
+          <a:prstGeom prst="rect">
+            <a:avLst/>
+          </a:prstGeom>
+          <a:noFill/>
+        </p:spPr>
+        <p:txBody>
+          <a:bodyPr wrap="square" anchor="t" lIns="0" rIns="0" tIns="0" bIns="0">
+            <a:spAutoFit/>
+          </a:bodyPr>
+          <a:lstStyle/>
+          <a:p>
+            <a:pPr algn="l">
+              <a:spcAft>
+                <a:spcPts val="585"/>
+              </a:spcAft>
+            </a:pPr>
+            <a:r>
+              <a:rPr sz="1300" b="0" i="0">
+                <a:solidFill>
+                  <a:srgbClr val="1C1B19"/>
+                </a:solidFill>
+                <a:latin typeface="Source Serif 4"/>
+              </a:rPr>
+              <a:t>In five experiments with more than 2,000 people, those turning down an invitation expected the inviter to be far more upset, and far less likely to ask again, than inviters actually were. The reason for saying no was held constant, and results may differ across cultures.</a:t>
+            </a:r>
+          </a:p>
+          <a:p>
+            <a:pPr algn="l">
+              <a:spcAft>
+                <a:spcPts val="585"/>
+              </a:spcAft>
+            </a:pPr>
+            <a:r>
+              <a:rPr sz="1050" b="0" i="0">
+                <a:solidFill>
+                  <a:srgbClr val="5D5A54"/>
+                </a:solidFill>
+                <a:latin typeface="Inter Tight"/>
+              </a:rPr>
+              <a:t>Givi and Kirk, Journal of Personality and Social Psychology, 2024</a:t>
+            </a:r>
+          </a:p>
+          <a:p>
+            <a:pPr algn="l">
+              <a:spcAft>
+                <a:spcPts val="585"/>
+              </a:spcAft>
+            </a:pPr>
+            <a:r>
+              <a:rPr sz="1300" b="0" i="0">
+                <a:solidFill>
+                  <a:srgbClr val="1C1B19"/>
+                </a:solidFill>
+                <a:latin typeface="Source Serif 4"/>
+              </a:rPr>
+              <a:t>A 17-year-old driver's risk of dying per trip was about 1.5 times higher with one passenger, 2.6 times with two, and about 3 times with three or more, compared with driving alone. The pattern held for 16-year-olds.</a:t>
+            </a:r>
+          </a:p>
+          <a:p>
+            <a:pPr algn="l">
+              <a:spcAft>
+                <a:spcPts val="585"/>
+              </a:spcAft>
+            </a:pPr>
+            <a:r>
+              <a:rPr sz="1050" b="0" i="0">
+                <a:solidFill>
+                  <a:srgbClr val="5D5A54"/>
+                </a:solidFill>
+                <a:latin typeface="Inter Tight"/>
+              </a:rPr>
+              <a:t>Chen et al., JAMA, 2000</a:t>
+            </a:r>
+          </a:p>
+          <a:p>
+            <a:pPr algn="l">
+              <a:spcAft>
+                <a:spcPts val="585"/>
+              </a:spcAft>
+            </a:pPr>
+            <a:r>
+              <a:rPr sz="1300" b="0" i="0">
+                <a:solidFill>
+                  <a:srgbClr val="1C1B19"/>
+                </a:solidFill>
+                <a:latin typeface="Source Serif 4"/>
+              </a:rPr>
+              <a:t>Massachusetts junior operators can't carry passengers under 18 who aren't immediate family for the first six months, unless a licensed driver 21 or older with a year of experience sits beside them. The Good Samaritan law protects a person who calls for help during an overdose, and the person who overdosed, from possession charges.</a:t>
+            </a:r>
+          </a:p>
+          <a:p>
+            <a:pPr algn="l">
+              <a:spcAft>
+                <a:spcPts val="585"/>
+              </a:spcAft>
+            </a:pPr>
+            <a:r>
+              <a:rPr sz="1050" b="0" i="0">
+                <a:solidFill>
+                  <a:srgbClr val="5D5A54"/>
+                </a:solidFill>
+                <a:latin typeface="Inter Tight"/>
+              </a:rPr>
+              <a:t>Massachusetts General Laws c. 90, § 8; c. 94C, § 34A</a:t>
+            </a:r>
+          </a:p>
+        </p:txBody>
+      </p:sp>
+    </p:spTree>
+  </p:cSld>
+  <p:clrMapOvr>
+    <a:masterClrMapping/>
+  </p:clrMapOvr>
+</p:sld>
+</file>
+
+<file path=ppt/slides/slide2.xml><?xml version="1.0" encoding="utf-8"?>
+<p:sld xmlns:a="http://schemas.openxmlformats.org/drawingml/2006/main" xmlns:p="http://schemas.openxmlformats.org/presentationml/2006/main" xmlns:r="http://schemas.openxmlformats.org/officeDocument/2006/relationships">
+  <p:cSld>
+    <p:bg>
+      <p:bgPr>
+        <a:solidFill>
+          <a:srgbClr val="0B2D5B"/>
+        </a:solidFill>
+        <a:effectLst/>
+      </p:bgPr>
+    </p:bg>
+    <p:spTree>
+      <p:nvGrpSpPr>
+        <p:cNvPr id="1" name=""/>
+        <p:cNvGrpSpPr/>
+        <p:nvPr/>
+      </p:nvGrpSpPr>
+      <p:grpSpPr/>
+      <p:sp>
+        <p:nvSpPr>
+          <p:cNvPr id="2" name="Rectangle 1"/>
+          <p:cNvSpPr/>
+          <p:nvPr/>
+        </p:nvSpPr>
+        <p:spPr>
+          <a:xfrm>
+            <a:off x="548640" y="502920"/>
+            <a:ext cx="457200" cy="54864"/>
+          </a:xfrm>
+          <a:prstGeom prst="rect">
+            <a:avLst/>
+          </a:prstGeom>
+          <a:solidFill>
+            <a:srgbClr val="F47B20"/>
+          </a:solidFill>
+          <a:ln>
+            <a:noFill/>
+          </a:ln>
+          <a:effectLst/>
+        </p:spPr>
+        <p:style>
+          <a:lnRef idx="1">
+            <a:schemeClr val="accent1"/>
+          </a:lnRef>
+          <a:fillRef idx="3">
+            <a:schemeClr val="accent1"/>
+          </a:fillRef>
+          <a:effectRef idx="2">
+            <a:schemeClr val="accent1"/>
+          </a:effectRef>
+          <a:fontRef idx="minor">
+            <a:schemeClr val="lt1"/>
+          </a:fontRef>
+        </p:style>
+        <p:txBody>
+          <a:bodyPr rtlCol="0" anchor="ctr"/>
+          <a:lstStyle/>
+          <a:p>
+            <a:pPr algn="ctr"/>
+          </a:p>
+        </p:txBody>
+      </p:sp>
+      <p:sp>
+        <p:nvSpPr>
+          <p:cNvPr id="3" name="TextBox 2"/>
+          <p:cNvSpPr txBox="1"/>
+          <p:nvPr/>
+        </p:nvSpPr>
+        <p:spPr>
+          <a:xfrm>
+            <a:off x="1143000" y="393192"/>
+            <a:ext cx="8229600" cy="274320"/>
+          </a:xfrm>
+          <a:prstGeom prst="rect">
+            <a:avLst/>
+          </a:prstGeom>
+          <a:noFill/>
+        </p:spPr>
+        <p:txBody>
+          <a:bodyPr wrap="square" anchor="t" lIns="0" rIns="0" tIns="0" bIns="0">
+            <a:spAutoFit/>
+          </a:bodyPr>
+          <a:lstStyle/>
+          <a:p>
+            <a:pPr algn="l">
+              <a:spcAft>
+                <a:spcPts val="540"/>
+              </a:spcAft>
+            </a:pPr>
+            <a:r>
+              <a:rPr sz="1200" b="1" i="0">
+                <a:solidFill>
+                  <a:srgbClr val="5D5A54"/>
+                </a:solidFill>
+                <a:latin typeface="Inter Tight"/>
+              </a:rPr>
+              <a:t>SAYING NO WITHOUT LOSING YOUR FRIENDS</a:t>
+            </a:r>
+          </a:p>
+        </p:txBody>
+      </p:sp>
+      <p:sp>
+        <p:nvSpPr>
+          <p:cNvPr id="4" name="TextBox 3"/>
+          <p:cNvSpPr txBox="1"/>
+          <p:nvPr/>
+        </p:nvSpPr>
+        <p:spPr>
+          <a:xfrm>
+            <a:off x="8229600" y="6400800"/>
+            <a:ext cx="3410712" cy="274320"/>
+          </a:xfrm>
+          <a:prstGeom prst="rect">
+            <a:avLst/>
+          </a:prstGeom>
+          <a:noFill/>
+        </p:spPr>
+        <p:txBody>
+          <a:bodyPr wrap="square" anchor="t" lIns="0" rIns="0" tIns="0" bIns="0">
+            <a:spAutoFit/>
+          </a:bodyPr>
+          <a:lstStyle/>
+          <a:p>
+            <a:pPr algn="r">
+              <a:spcAft>
+                <a:spcPts val="450"/>
+              </a:spcAft>
+            </a:pPr>
+            <a:r>
+              <a:rPr sz="1000" b="0" i="0">
+                <a:solidFill>
+                  <a:srgbClr val="5D5A54"/>
+                </a:solidFill>
+                <a:latin typeface="Inter Tight"/>
+              </a:rPr>
+              <a:t>Beaver Counseling</a:t>
+            </a:r>
+          </a:p>
+        </p:txBody>
+      </p:sp>
+      <p:sp>
+        <p:nvSpPr>
+          <p:cNvPr id="5" name="TextBox 4"/>
+          <p:cNvSpPr txBox="1"/>
+          <p:nvPr/>
+        </p:nvSpPr>
+        <p:spPr>
+          <a:xfrm>
+            <a:off x="822960" y="1371600"/>
+            <a:ext cx="10515600" cy="2377440"/>
+          </a:xfrm>
+          <a:prstGeom prst="rect">
+            <a:avLst/>
+          </a:prstGeom>
+          <a:noFill/>
+        </p:spPr>
+        <p:txBody>
+          <a:bodyPr wrap="square" anchor="b" lIns="0" rIns="0" tIns="0" bIns="0">
+            <a:spAutoFit/>
+          </a:bodyPr>
+          <a:lstStyle/>
+          <a:p>
+            <a:pPr algn="l">
+              <a:spcAft>
+                <a:spcPts val="2430"/>
+              </a:spcAft>
+            </a:pPr>
+            <a:r>
+              <a:rPr sz="5400" b="1" i="0">
+                <a:solidFill>
+                  <a:srgbClr val="FFFFFF"/>
+                </a:solidFill>
+                <a:latin typeface="Source Serif 4"/>
+              </a:rPr>
+              <a:t>Saying No Without Losing Your Friends</a:t>
+            </a:r>
+          </a:p>
+        </p:txBody>
+      </p:sp>
+      <p:sp>
+        <p:nvSpPr>
+          <p:cNvPr id="6" name="TextBox 5"/>
+          <p:cNvSpPr txBox="1"/>
+          <p:nvPr/>
+        </p:nvSpPr>
+        <p:spPr>
+          <a:xfrm>
+            <a:off x="822960" y="3931920"/>
+            <a:ext cx="10515600" cy="914400"/>
+          </a:xfrm>
+          <a:prstGeom prst="rect">
+            <a:avLst/>
+          </a:prstGeom>
+          <a:noFill/>
+        </p:spPr>
+        <p:txBody>
+          <a:bodyPr wrap="square" anchor="t" lIns="0" rIns="0" tIns="0" bIns="0">
+            <a:spAutoFit/>
+          </a:bodyPr>
+          <a:lstStyle/>
+          <a:p>
+            <a:pPr algn="l">
+              <a:spcAft>
+                <a:spcPts val="1080"/>
+              </a:spcAft>
+            </a:pPr>
+            <a:r>
+              <a:rPr sz="2400" b="0" i="1">
+                <a:solidFill>
+                  <a:srgbClr val="E8E4DA"/>
+                </a:solidFill>
+                <a:latin typeface="Source Serif 4"/>
+              </a:rPr>
+              <a:t>Nobody pushed. It still felt like a test.</a:t>
+            </a:r>
+          </a:p>
+        </p:txBody>
+      </p:sp>
+      <p:sp>
+        <p:nvSpPr>
+          <p:cNvPr id="7" name="TextBox 6"/>
+          <p:cNvSpPr txBox="1"/>
+          <p:nvPr/>
+        </p:nvSpPr>
+        <p:spPr>
+          <a:xfrm>
+            <a:off x="822960" y="6035040"/>
+            <a:ext cx="7315200" cy="365760"/>
+          </a:xfrm>
+          <a:prstGeom prst="rect">
+            <a:avLst/>
+          </a:prstGeom>
+          <a:noFill/>
+        </p:spPr>
+        <p:txBody>
+          <a:bodyPr wrap="square" anchor="t" lIns="0" rIns="0" tIns="0" bIns="0">
+            <a:spAutoFit/>
+          </a:bodyPr>
+          <a:lstStyle/>
+          <a:p>
+            <a:pPr algn="l">
+              <a:spcAft>
+                <a:spcPts val="585"/>
+              </a:spcAft>
+            </a:pPr>
+            <a:r>
+              <a:rPr sz="1300" b="0" i="0">
+                <a:solidFill>
+                  <a:srgbClr val="E8E4DA"/>
+                </a:solidFill>
+                <a:latin typeface="Inter Tight"/>
+              </a:rPr>
+              <a:t>Beaver Upper School · Counseling</a:t>
+            </a:r>
+          </a:p>
+        </p:txBody>
+      </p:sp>
+    </p:spTree>
+  </p:cSld>
+  <p:clrMapOvr>
+    <a:masterClrMapping/>
+  </p:clrMapOvr>
+</p:sld>
+</file>
+
+<file path=ppt/slides/slide3.xml><?xml version="1.0" encoding="utf-8"?>
 <p:sld xmlns:a="http://schemas.openxmlformats.org/drawingml/2006/main" xmlns:p="http://schemas.openxmlformats.org/presentationml/2006/main" xmlns:r="http://schemas.openxmlformats.org/officeDocument/2006/relationships">
   <p:cSld>
     <p:bg>
@@ -5981,7 +7899,7 @@
                 </a:solidFill>
                 <a:latin typeface="Inter Tight"/>
               </a:rPr>
-              <a:t>A WAY OUT</a:t>
+              <a:t>THE GUESS</a:t>
             </a:r>
           </a:p>
         </p:txBody>
@@ -6103,7 +8021,7 @@
                 </a:solidFill>
                 <a:latin typeface="Source Serif 4"/>
               </a:rPr>
-              <a:t>Who would you set up a code word with?</a:t>
+              <a:t>Out of 10 U.S. high schoolers, how many did none of it last month?</a:t>
             </a:r>
           </a:p>
         </p:txBody>
@@ -6142,7 +8060,7 @@
                 </a:solidFill>
                 <a:latin typeface="Inter Tight"/>
               </a:rPr>
-              <a:t>Private. Write your code word or emoji, and the adult you'd trust with it.</a:t>
+              <a:t>None of it: no alcohol, no marijuana, no misused prescription pills. Write a number. No names.</a:t>
             </a:r>
           </a:p>
         </p:txBody>
@@ -6155,7 +8073,7 @@
 </p:sld>
 </file>
 
-<file path=ppt/slides/slide13.xml><?xml version="1.0" encoding="utf-8"?>
+<file path=ppt/slides/slide4.xml><?xml version="1.0" encoding="utf-8"?>
 <p:sld xmlns:a="http://schemas.openxmlformats.org/drawingml/2006/main" xmlns:p="http://schemas.openxmlformats.org/presentationml/2006/main" xmlns:r="http://schemas.openxmlformats.org/officeDocument/2006/relationships">
   <p:cSld>
     <p:bg>
@@ -6251,7 +8169,7 @@
                 </a:solidFill>
                 <a:latin typeface="Inter Tight"/>
               </a:rPr>
-              <a:t>GET HELP RIGHT AWAY</a:t>
+              <a:t>THE ANSWER</a:t>
             </a:r>
           </a:p>
         </p:txBody>
@@ -6303,7 +8221,46 @@
         </p:nvSpPr>
         <p:spPr>
           <a:xfrm>
-            <a:off x="822960" y="1005840"/>
+            <a:off x="822960" y="1463040"/>
+            <a:ext cx="10515600" cy="3291840"/>
+          </a:xfrm>
+          <a:prstGeom prst="rect">
+            <a:avLst/>
+          </a:prstGeom>
+          <a:noFill/>
+        </p:spPr>
+        <p:txBody>
+          <a:bodyPr wrap="square" anchor="ctr" lIns="0" rIns="0" tIns="0" bIns="0">
+            <a:spAutoFit/>
+          </a:bodyPr>
+          <a:lstStyle/>
+          <a:p>
+            <a:pPr algn="l">
+              <a:spcAft>
+                <a:spcPts val="2070"/>
+              </a:spcAft>
+            </a:pPr>
+            <a:r>
+              <a:rPr sz="4600" b="1" i="0">
+                <a:solidFill>
+                  <a:srgbClr val="1C1B19"/>
+                </a:solidFill>
+                <a:latin typeface="Source Serif 4"/>
+              </a:rPr>
+              <a:t>About 7 in 10 did none of it.</a:t>
+            </a:r>
+          </a:p>
+        </p:txBody>
+      </p:sp>
+      <p:sp>
+        <p:nvSpPr>
+          <p:cNvPr id="6" name="TextBox 5"/>
+          <p:cNvSpPr txBox="1"/>
+          <p:nvPr/>
+        </p:nvSpPr>
+        <p:spPr>
+          <a:xfrm>
+            <a:off x="822960" y="4846320"/>
             <a:ext cx="10515600" cy="1097280"/>
           </a:xfrm>
           <a:prstGeom prst="rect">
@@ -6319,393 +8276,17 @@
           <a:p>
             <a:pPr algn="l">
               <a:spcAft>
-                <a:spcPts val="1620"/>
-              </a:spcAft>
-            </a:pPr>
-            <a:r>
-              <a:rPr sz="3600" b="1" i="0">
-                <a:solidFill>
-                  <a:srgbClr val="1C1B19"/>
-                </a:solidFill>
-                <a:latin typeface="Source Serif 4"/>
-              </a:rPr>
-              <a:t>Some moments need an adult now.</a:t>
-            </a:r>
-          </a:p>
-        </p:txBody>
-      </p:sp>
-      <p:sp>
-        <p:nvSpPr>
-          <p:cNvPr id="6" name="TextBox 5"/>
-          <p:cNvSpPr txBox="1"/>
-          <p:nvPr/>
-        </p:nvSpPr>
-        <p:spPr>
-          <a:xfrm>
-            <a:off x="822960" y="2194560"/>
-            <a:ext cx="548640" cy="1005840"/>
-          </a:xfrm>
-          <a:prstGeom prst="rect">
-            <a:avLst/>
-          </a:prstGeom>
-          <a:noFill/>
-        </p:spPr>
-        <p:txBody>
-          <a:bodyPr wrap="square" anchor="t" lIns="0" rIns="0" tIns="0" bIns="0">
-            <a:spAutoFit/>
-          </a:bodyPr>
-          <a:lstStyle/>
-          <a:p>
-            <a:pPr algn="l">
-              <a:spcAft>
-                <a:spcPts val="1170"/>
-              </a:spcAft>
-            </a:pPr>
-            <a:r>
-              <a:rPr sz="2600" b="1" i="0">
-                <a:solidFill>
-                  <a:srgbClr val="F47B20"/>
-                </a:solidFill>
-                <a:latin typeface="Source Serif 4"/>
-              </a:rPr>
-              <a:t>•</a:t>
-            </a:r>
-          </a:p>
-        </p:txBody>
-      </p:sp>
-      <p:sp>
-        <p:nvSpPr>
-          <p:cNvPr id="7" name="TextBox 6"/>
-          <p:cNvSpPr txBox="1"/>
-          <p:nvPr/>
-        </p:nvSpPr>
-        <p:spPr>
-          <a:xfrm>
-            <a:off x="1463040" y="2231136"/>
-            <a:ext cx="9875520" cy="1005840"/>
-          </a:xfrm>
-          <a:prstGeom prst="rect">
-            <a:avLst/>
-          </a:prstGeom>
-          <a:noFill/>
-        </p:spPr>
-        <p:txBody>
-          <a:bodyPr wrap="square" anchor="t" lIns="0" rIns="0" tIns="0" bIns="0">
-            <a:spAutoFit/>
-          </a:bodyPr>
-          <a:lstStyle/>
-          <a:p>
-            <a:pPr algn="l">
-              <a:spcAft>
-                <a:spcPts val="945"/>
-              </a:spcAft>
-            </a:pPr>
-            <a:r>
-              <a:rPr sz="2100" b="1" i="0">
-                <a:solidFill>
-                  <a:srgbClr val="1C1B19"/>
-                </a:solidFill>
-                <a:latin typeface="Source Serif 4"/>
-              </a:rPr>
-              <a:t>Someone is passed out or breathing very slowly.</a:t>
-            </a:r>
-          </a:p>
-          <a:p>
-            <a:pPr algn="l">
-              <a:spcAft>
-                <a:spcPts val="945"/>
-              </a:spcAft>
-            </a:pPr>
-            <a:r>
-              <a:rPr sz="1600" b="0" i="0">
+                <a:spcPts val="990"/>
+              </a:spcAft>
+            </a:pPr>
+            <a:r>
+              <a:rPr sz="2200" b="0" i="1">
                 <a:solidFill>
                   <a:srgbClr val="5D5A54"/>
                 </a:solidFill>
                 <a:latin typeface="Source Serif 4"/>
               </a:rPr>
-              <a:t>Call 911 and stay with them.</a:t>
-            </a:r>
-          </a:p>
-        </p:txBody>
-      </p:sp>
-      <p:sp>
-        <p:nvSpPr>
-          <p:cNvPr id="8" name="TextBox 7"/>
-          <p:cNvSpPr txBox="1"/>
-          <p:nvPr/>
-        </p:nvSpPr>
-        <p:spPr>
-          <a:xfrm>
-            <a:off x="822960" y="3200400"/>
-            <a:ext cx="548640" cy="1005840"/>
-          </a:xfrm>
-          <a:prstGeom prst="rect">
-            <a:avLst/>
-          </a:prstGeom>
-          <a:noFill/>
-        </p:spPr>
-        <p:txBody>
-          <a:bodyPr wrap="square" anchor="t" lIns="0" rIns="0" tIns="0" bIns="0">
-            <a:spAutoFit/>
-          </a:bodyPr>
-          <a:lstStyle/>
-          <a:p>
-            <a:pPr algn="l">
-              <a:spcAft>
-                <a:spcPts val="1170"/>
-              </a:spcAft>
-            </a:pPr>
-            <a:r>
-              <a:rPr sz="2600" b="1" i="0">
-                <a:solidFill>
-                  <a:srgbClr val="F47B20"/>
-                </a:solidFill>
-                <a:latin typeface="Source Serif 4"/>
-              </a:rPr>
-              <a:t>•</a:t>
-            </a:r>
-          </a:p>
-        </p:txBody>
-      </p:sp>
-      <p:sp>
-        <p:nvSpPr>
-          <p:cNvPr id="9" name="TextBox 8"/>
-          <p:cNvSpPr txBox="1"/>
-          <p:nvPr/>
-        </p:nvSpPr>
-        <p:spPr>
-          <a:xfrm>
-            <a:off x="1463040" y="3236976"/>
-            <a:ext cx="9875520" cy="1005840"/>
-          </a:xfrm>
-          <a:prstGeom prst="rect">
-            <a:avLst/>
-          </a:prstGeom>
-          <a:noFill/>
-        </p:spPr>
-        <p:txBody>
-          <a:bodyPr wrap="square" anchor="t" lIns="0" rIns="0" tIns="0" bIns="0">
-            <a:spAutoFit/>
-          </a:bodyPr>
-          <a:lstStyle/>
-          <a:p>
-            <a:pPr algn="l">
-              <a:spcAft>
-                <a:spcPts val="945"/>
-              </a:spcAft>
-            </a:pPr>
-            <a:r>
-              <a:rPr sz="2100" b="1" i="0">
-                <a:solidFill>
-                  <a:srgbClr val="1C1B19"/>
-                </a:solidFill>
-                <a:latin typeface="Source Serif 4"/>
-              </a:rPr>
-              <a:t>Pressure to do anything sexual, or send photos.</a:t>
-            </a:r>
-          </a:p>
-          <a:p>
-            <a:pPr algn="l">
-              <a:spcAft>
-                <a:spcPts val="945"/>
-              </a:spcAft>
-            </a:pPr>
-            <a:r>
-              <a:rPr sz="1600" b="0" i="0">
-                <a:solidFill>
-                  <a:srgbClr val="5D5A54"/>
-                </a:solidFill>
-                <a:latin typeface="Source Serif 4"/>
-              </a:rPr>
-              <a:t>The answer is no. Tell an adult.</a:t>
-            </a:r>
-          </a:p>
-        </p:txBody>
-      </p:sp>
-      <p:sp>
-        <p:nvSpPr>
-          <p:cNvPr id="10" name="TextBox 9"/>
-          <p:cNvSpPr txBox="1"/>
-          <p:nvPr/>
-        </p:nvSpPr>
-        <p:spPr>
-          <a:xfrm>
-            <a:off x="822960" y="4206240"/>
-            <a:ext cx="548640" cy="1005840"/>
-          </a:xfrm>
-          <a:prstGeom prst="rect">
-            <a:avLst/>
-          </a:prstGeom>
-          <a:noFill/>
-        </p:spPr>
-        <p:txBody>
-          <a:bodyPr wrap="square" anchor="t" lIns="0" rIns="0" tIns="0" bIns="0">
-            <a:spAutoFit/>
-          </a:bodyPr>
-          <a:lstStyle/>
-          <a:p>
-            <a:pPr algn="l">
-              <a:spcAft>
-                <a:spcPts val="1170"/>
-              </a:spcAft>
-            </a:pPr>
-            <a:r>
-              <a:rPr sz="2600" b="1" i="0">
-                <a:solidFill>
-                  <a:srgbClr val="F47B20"/>
-                </a:solidFill>
-                <a:latin typeface="Source Serif 4"/>
-              </a:rPr>
-              <a:t>•</a:t>
-            </a:r>
-          </a:p>
-        </p:txBody>
-      </p:sp>
-      <p:sp>
-        <p:nvSpPr>
-          <p:cNvPr id="11" name="TextBox 10"/>
-          <p:cNvSpPr txBox="1"/>
-          <p:nvPr/>
-        </p:nvSpPr>
-        <p:spPr>
-          <a:xfrm>
-            <a:off x="1463040" y="4242816"/>
-            <a:ext cx="9875520" cy="1005840"/>
-          </a:xfrm>
-          <a:prstGeom prst="rect">
-            <a:avLst/>
-          </a:prstGeom>
-          <a:noFill/>
-        </p:spPr>
-        <p:txBody>
-          <a:bodyPr wrap="square" anchor="t" lIns="0" rIns="0" tIns="0" bIns="0">
-            <a:spAutoFit/>
-          </a:bodyPr>
-          <a:lstStyle/>
-          <a:p>
-            <a:pPr algn="l">
-              <a:spcAft>
-                <a:spcPts val="945"/>
-              </a:spcAft>
-            </a:pPr>
-            <a:r>
-              <a:rPr sz="2100" b="1" i="0">
-                <a:solidFill>
-                  <a:srgbClr val="1C1B19"/>
-                </a:solidFill>
-                <a:latin typeface="Source Serif 4"/>
-              </a:rPr>
-              <a:t>Someone threatens you for saying no.</a:t>
-            </a:r>
-          </a:p>
-          <a:p>
-            <a:pPr algn="l">
-              <a:spcAft>
-                <a:spcPts val="945"/>
-              </a:spcAft>
-            </a:pPr>
-            <a:r>
-              <a:rPr sz="1600" b="0" i="0">
-                <a:solidFill>
-                  <a:srgbClr val="5D5A54"/>
-                </a:solidFill>
-                <a:latin typeface="Source Serif 4"/>
-              </a:rPr>
-              <a:t>Tell a counselor or an adult you trust.</a:t>
-            </a:r>
-          </a:p>
-        </p:txBody>
-      </p:sp>
-      <p:sp>
-        <p:nvSpPr>
-          <p:cNvPr id="12" name="TextBox 11"/>
-          <p:cNvSpPr txBox="1"/>
-          <p:nvPr/>
-        </p:nvSpPr>
-        <p:spPr>
-          <a:xfrm>
-            <a:off x="822960" y="5212080"/>
-            <a:ext cx="548640" cy="1005840"/>
-          </a:xfrm>
-          <a:prstGeom prst="rect">
-            <a:avLst/>
-          </a:prstGeom>
-          <a:noFill/>
-        </p:spPr>
-        <p:txBody>
-          <a:bodyPr wrap="square" anchor="t" lIns="0" rIns="0" tIns="0" bIns="0">
-            <a:spAutoFit/>
-          </a:bodyPr>
-          <a:lstStyle/>
-          <a:p>
-            <a:pPr algn="l">
-              <a:spcAft>
-                <a:spcPts val="1170"/>
-              </a:spcAft>
-            </a:pPr>
-            <a:r>
-              <a:rPr sz="2600" b="1" i="0">
-                <a:solidFill>
-                  <a:srgbClr val="F47B20"/>
-                </a:solidFill>
-                <a:latin typeface="Source Serif 4"/>
-              </a:rPr>
-              <a:t>•</a:t>
-            </a:r>
-          </a:p>
-        </p:txBody>
-      </p:sp>
-      <p:sp>
-        <p:nvSpPr>
-          <p:cNvPr id="13" name="TextBox 12"/>
-          <p:cNvSpPr txBox="1"/>
-          <p:nvPr/>
-        </p:nvSpPr>
-        <p:spPr>
-          <a:xfrm>
-            <a:off x="1463040" y="5248656"/>
-            <a:ext cx="9875520" cy="1005840"/>
-          </a:xfrm>
-          <a:prstGeom prst="rect">
-            <a:avLst/>
-          </a:prstGeom>
-          <a:noFill/>
-        </p:spPr>
-        <p:txBody>
-          <a:bodyPr wrap="square" anchor="t" lIns="0" rIns="0" tIns="0" bIns="0">
-            <a:spAutoFit/>
-          </a:bodyPr>
-          <a:lstStyle/>
-          <a:p>
-            <a:pPr algn="l">
-              <a:spcAft>
-                <a:spcPts val="945"/>
-              </a:spcAft>
-            </a:pPr>
-            <a:r>
-              <a:rPr sz="2100" b="1" i="0">
-                <a:solidFill>
-                  <a:srgbClr val="1C1B19"/>
-                </a:solidFill>
-                <a:latin typeface="Source Serif 4"/>
-              </a:rPr>
-              <a:t>A friend is in trouble with alcohol or drugs.</a:t>
-            </a:r>
-          </a:p>
-          <a:p>
-            <a:pPr algn="l">
-              <a:spcAft>
-                <a:spcPts val="945"/>
-              </a:spcAft>
-            </a:pPr>
-            <a:r>
-              <a:rPr sz="1600" b="0" i="0">
-                <a:solidFill>
-                  <a:srgbClr val="5D5A54"/>
-                </a:solidFill>
-                <a:latin typeface="Source Serif 4"/>
-              </a:rPr>
-              <a:t>Getting help is looking out for them.</a:t>
+              <a:t>Posts show who went out. They don't show who stayed home.</a:t>
             </a:r>
           </a:p>
         </p:txBody>
@@ -6718,7 +8299,7 @@
 </p:sld>
 </file>
 
-<file path=ppt/slides/slide14.xml><?xml version="1.0" encoding="utf-8"?>
+<file path=ppt/slides/slide5.xml><?xml version="1.0" encoding="utf-8"?>
 <p:sld xmlns:a="http://schemas.openxmlformats.org/drawingml/2006/main" xmlns:p="http://schemas.openxmlformats.org/presentationml/2006/main" xmlns:r="http://schemas.openxmlformats.org/officeDocument/2006/relationships">
   <p:cSld>
     <p:bg>
@@ -6814,7 +8395,7 @@
                 </a:solidFill>
                 <a:latin typeface="Inter Tight"/>
               </a:rPr>
-              <a:t>BEFORE YOU GO</a:t>
+              <a:t>GAS AND BRAKES</a:t>
             </a:r>
           </a:p>
         </p:txBody>
@@ -6866,7 +8447,7 @@
         </p:nvSpPr>
         <p:spPr>
           <a:xfrm>
-            <a:off x="822960" y="1188720"/>
+            <a:off x="822960" y="1005840"/>
             <a:ext cx="10515600" cy="914400"/>
           </a:xfrm>
           <a:prstGeom prst="rect">
@@ -6882,70 +8463,31 @@
           <a:p>
             <a:pPr algn="l">
               <a:spcAft>
-                <a:spcPts val="1620"/>
-              </a:spcAft>
-            </a:pPr>
-            <a:r>
-              <a:rPr sz="3600" b="1" i="0">
+                <a:spcPts val="1530"/>
+              </a:spcAft>
+            </a:pPr>
+            <a:r>
+              <a:rPr sz="3400" b="1" i="0">
                 <a:solidFill>
                   <a:srgbClr val="1C1B19"/>
                 </a:solidFill>
                 <a:latin typeface="Source Serif 4"/>
               </a:rPr>
-              <a:t>Your line</a:t>
-            </a:r>
-          </a:p>
-        </p:txBody>
-      </p:sp>
-      <p:sp>
-        <p:nvSpPr>
-          <p:cNvPr id="6" name="TextBox 5"/>
-          <p:cNvSpPr txBox="1"/>
-          <p:nvPr/>
-        </p:nvSpPr>
-        <p:spPr>
-          <a:xfrm>
-            <a:off x="822960" y="2286000"/>
-            <a:ext cx="10515600" cy="1463040"/>
-          </a:xfrm>
-          <a:prstGeom prst="rect">
-            <a:avLst/>
-          </a:prstGeom>
-          <a:noFill/>
-        </p:spPr>
-        <p:txBody>
-          <a:bodyPr wrap="square" anchor="t" lIns="0" rIns="0" tIns="0" bIns="0">
-            <a:spAutoFit/>
-          </a:bodyPr>
-          <a:lstStyle/>
-          <a:p>
-            <a:pPr algn="l">
-              <a:spcAft>
-                <a:spcPts val="1080"/>
-              </a:spcAft>
-            </a:pPr>
-            <a:r>
-              <a:rPr sz="2400" b="0" i="0">
-                <a:solidFill>
-                  <a:srgbClr val="1C1B19"/>
-                </a:solidFill>
-                <a:latin typeface="Source Serif 4"/>
-              </a:rPr>
-              <a:t>Write one thing you've already decided, in your own words. Keep it.</a:t>
-            </a:r>
-          </a:p>
-        </p:txBody>
-      </p:sp>
-      <p:sp>
-        <p:nvSpPr>
-          <p:cNvPr id="7" name="Rectangle 6"/>
+              <a:t>Friends turn up the gas. They don't cut the brakes.</a:t>
+            </a:r>
+          </a:p>
+        </p:txBody>
+      </p:sp>
+      <p:sp>
+        <p:nvSpPr>
+          <p:cNvPr id="6" name="Rectangle 5"/>
           <p:cNvSpPr/>
           <p:nvPr/>
         </p:nvSpPr>
         <p:spPr>
           <a:xfrm>
-            <a:off x="822960" y="4023360"/>
-            <a:ext cx="10515600" cy="1371600"/>
+            <a:off x="822960" y="2103120"/>
+            <a:ext cx="5120640" cy="3931920"/>
           </a:xfrm>
           <a:prstGeom prst="rect">
             <a:avLst/>
@@ -6955,7 +8497,7 @@
           </a:solidFill>
           <a:ln w="15875">
             <a:solidFill>
-              <a:srgbClr val="1C1B19"/>
+              <a:srgbClr val="D8D2C6"/>
             </a:solidFill>
           </a:ln>
           <a:effectLst/>
@@ -6984,14 +8526,14 @@
       </p:sp>
       <p:sp>
         <p:nvSpPr>
-          <p:cNvPr id="8" name="TextBox 7"/>
+          <p:cNvPr id="7" name="TextBox 6"/>
           <p:cNvSpPr txBox="1"/>
           <p:nvPr/>
         </p:nvSpPr>
         <p:spPr>
           <a:xfrm>
-            <a:off x="1097280" y="4206240"/>
-            <a:ext cx="10058400" cy="365760"/>
+            <a:off x="1097280" y="2286000"/>
+            <a:ext cx="4572000" cy="457200"/>
           </a:xfrm>
           <a:prstGeom prst="rect">
             <a:avLst/>
@@ -7006,31 +8548,31 @@
           <a:p>
             <a:pPr algn="l">
               <a:spcAft>
-                <a:spcPts val="540"/>
-              </a:spcAft>
-            </a:pPr>
-            <a:r>
-              <a:rPr sz="1200" b="1" i="0">
+                <a:spcPts val="585"/>
+              </a:spcAft>
+            </a:pPr>
+            <a:r>
+              <a:rPr sz="1300" b="1" i="0">
                 <a:solidFill>
                   <a:srgbClr val="0B2D5B"/>
                 </a:solidFill>
                 <a:latin typeface="Inter Tight"/>
               </a:rPr>
-              <a:t>ON THE BVR DINER MENU</a:t>
-            </a:r>
-          </a:p>
-        </p:txBody>
-      </p:sp>
-      <p:sp>
-        <p:nvSpPr>
-          <p:cNvPr id="9" name="TextBox 8"/>
+              <a:t>WITH FRIENDS WATCHING</a:t>
+            </a:r>
+          </a:p>
+        </p:txBody>
+      </p:sp>
+      <p:sp>
+        <p:nvSpPr>
+          <p:cNvPr id="8" name="TextBox 7"/>
           <p:cNvSpPr txBox="1"/>
           <p:nvPr/>
         </p:nvSpPr>
         <p:spPr>
           <a:xfrm>
-            <a:off x="1097280" y="4617720"/>
-            <a:ext cx="10058400" cy="640080"/>
+            <a:off x="1097280" y="2788920"/>
+            <a:ext cx="4572000" cy="3108960"/>
           </a:xfrm>
           <a:prstGeom prst="rect">
             <a:avLst/>
@@ -7045,66 +8587,90 @@
           <a:p>
             <a:pPr algn="l">
               <a:spcAft>
-                <a:spcPts val="900"/>
-              </a:spcAft>
-            </a:pPr>
-            <a:r>
-              <a:rPr sz="2000" b="0" i="0">
+                <a:spcPts val="855"/>
+              </a:spcAft>
+            </a:pPr>
+            <a:r>
+              <a:rPr sz="1900" b="0" i="0">
                 <a:solidFill>
                   <a:srgbClr val="1C1B19"/>
                 </a:solidFill>
-                <a:latin typeface="Inter Tight"/>
-              </a:rPr>
-              <a:t>https://rmwtoolkit.github.io/bcds-toolkit/saying-no-without-losing-your-friends-high-school.html</a:t>
-            </a:r>
-          </a:p>
-        </p:txBody>
-      </p:sp>
-    </p:spTree>
-  </p:cSld>
-  <p:clrMapOvr>
-    <a:masterClrMapping/>
-  </p:clrMapOvr>
-</p:sld>
-</file>
-
-<file path=ppt/slides/slide2.xml><?xml version="1.0" encoding="utf-8"?>
-<p:sld xmlns:a="http://schemas.openxmlformats.org/drawingml/2006/main" xmlns:p="http://schemas.openxmlformats.org/presentationml/2006/main" xmlns:r="http://schemas.openxmlformats.org/officeDocument/2006/relationships" show="0">
-  <p:cSld>
-    <p:bg>
-      <p:bgPr>
-        <a:solidFill>
-          <a:srgbClr val="EEEBE4"/>
-        </a:solidFill>
-        <a:effectLst/>
-      </p:bgPr>
-    </p:bg>
-    <p:spTree>
-      <p:nvGrpSpPr>
-        <p:cNvPr id="1" name=""/>
-        <p:cNvGrpSpPr/>
-        <p:nvPr/>
-      </p:nvGrpSpPr>
-      <p:grpSpPr/>
-      <p:sp>
-        <p:nvSpPr>
-          <p:cNvPr id="2" name="Rectangle 1"/>
+                <a:latin typeface="Source Serif 4"/>
+              </a:rPr>
+              <a:t>The reward signal fires harder</a:t>
+            </a:r>
+          </a:p>
+          <a:p>
+            <a:pPr algn="l">
+              <a:spcAft>
+                <a:spcPts val="855"/>
+              </a:spcAft>
+            </a:pPr>
+            <a:r>
+              <a:rPr sz="1900" b="0" i="0">
+                <a:solidFill>
+                  <a:srgbClr val="1C1B19"/>
+                </a:solidFill>
+                <a:latin typeface="Source Serif 4"/>
+              </a:rPr>
+              <a:t>The payoff looks bigger</a:t>
+            </a:r>
+          </a:p>
+          <a:p>
+            <a:pPr algn="l">
+              <a:spcAft>
+                <a:spcPts val="855"/>
+              </a:spcAft>
+            </a:pPr>
+            <a:r>
+              <a:rPr sz="1900" b="0" i="0">
+                <a:solidFill>
+                  <a:srgbClr val="1C1B19"/>
+                </a:solidFill>
+                <a:latin typeface="Source Serif 4"/>
+              </a:rPr>
+              <a:t>Teens took more chances</a:t>
+            </a:r>
+          </a:p>
+          <a:p>
+            <a:pPr algn="l">
+              <a:spcAft>
+                <a:spcPts val="855"/>
+              </a:spcAft>
+            </a:pPr>
+            <a:r>
+              <a:rPr sz="1900" b="0" i="0">
+                <a:solidFill>
+                  <a:srgbClr val="1C1B19"/>
+                </a:solidFill>
+                <a:latin typeface="Source Serif 4"/>
+              </a:rPr>
+              <a:t>Adults didn't change</a:t>
+            </a:r>
+          </a:p>
+        </p:txBody>
+      </p:sp>
+      <p:sp>
+        <p:nvSpPr>
+          <p:cNvPr id="9" name="Rectangle 8"/>
           <p:cNvSpPr/>
           <p:nvPr/>
         </p:nvSpPr>
         <p:spPr>
           <a:xfrm>
-            <a:off x="0" y="0"/>
-            <a:ext cx="12191695" cy="384048"/>
+            <a:off x="6309360" y="2103120"/>
+            <a:ext cx="5120640" cy="3931920"/>
           </a:xfrm>
           <a:prstGeom prst="rect">
             <a:avLst/>
           </a:prstGeom>
           <a:solidFill>
-            <a:srgbClr val="0B2D5B"/>
+            <a:srgbClr val="FFFFFF"/>
           </a:solidFill>
-          <a:ln>
-            <a:noFill/>
+          <a:ln w="15875">
+            <a:solidFill>
+              <a:srgbClr val="D8D2C6"/>
+            </a:solidFill>
           </a:ln>
           <a:effectLst/>
         </p:spPr>
@@ -7132,14 +8698,14 @@
       </p:sp>
       <p:sp>
         <p:nvSpPr>
-          <p:cNvPr id="3" name="TextBox 2"/>
+          <p:cNvPr id="10" name="TextBox 9"/>
           <p:cNvSpPr txBox="1"/>
           <p:nvPr/>
         </p:nvSpPr>
         <p:spPr>
           <a:xfrm>
-            <a:off x="548640" y="100584"/>
-            <a:ext cx="10972800" cy="274320"/>
+            <a:off x="6583680" y="2286000"/>
+            <a:ext cx="4572000" cy="457200"/>
           </a:xfrm>
           <a:prstGeom prst="rect">
             <a:avLst/>
@@ -7154,31 +8720,31 @@
           <a:p>
             <a:pPr algn="l">
               <a:spcAft>
-                <a:spcPts val="495"/>
-              </a:spcAft>
-            </a:pPr>
-            <a:r>
-              <a:rPr sz="1100" b="1" i="0">
-                <a:solidFill>
-                  <a:srgbClr val="FFFFFF"/>
+                <a:spcPts val="585"/>
+              </a:spcAft>
+            </a:pPr>
+            <a:r>
+              <a:rPr sz="1300" b="1" i="0">
+                <a:solidFill>
+                  <a:srgbClr val="0B2D5B"/>
                 </a:solidFill>
                 <a:latin typeface="Inter Tight"/>
               </a:rPr>
-              <a:t>TEACHER PAGE  ·  skipped when you present  ·  Before you teach</a:t>
-            </a:r>
-          </a:p>
-        </p:txBody>
-      </p:sp>
-      <p:sp>
-        <p:nvSpPr>
-          <p:cNvPr id="4" name="TextBox 3"/>
+              <a:t>WHAT STAYS THE SAME</a:t>
+            </a:r>
+          </a:p>
+        </p:txBody>
+      </p:sp>
+      <p:sp>
+        <p:nvSpPr>
+          <p:cNvPr id="11" name="TextBox 10"/>
           <p:cNvSpPr txBox="1"/>
           <p:nvPr/>
         </p:nvSpPr>
         <p:spPr>
           <a:xfrm>
-            <a:off x="548640" y="685800"/>
-            <a:ext cx="10972800" cy="640080"/>
+            <a:off x="6583680" y="2788920"/>
+            <a:ext cx="4572000" cy="3108960"/>
           </a:xfrm>
           <a:prstGeom prst="rect">
             <a:avLst/>
@@ -7193,1555 +8759,65 @@
           <a:p>
             <a:pPr algn="l">
               <a:spcAft>
-                <a:spcPts val="1350"/>
-              </a:spcAft>
-            </a:pPr>
-            <a:r>
-              <a:rPr sz="3000" b="1" i="0">
+                <a:spcPts val="855"/>
+              </a:spcAft>
+            </a:pPr>
+            <a:r>
+              <a:rPr sz="1900" b="0" i="0">
                 <a:solidFill>
                   <a:srgbClr val="1C1B19"/>
                 </a:solidFill>
                 <a:latin typeface="Source Serif 4"/>
               </a:rPr>
-              <a:t>Before you teach</a:t>
-            </a:r>
-          </a:p>
-        </p:txBody>
-      </p:sp>
-      <p:sp>
-        <p:nvSpPr>
-          <p:cNvPr id="5" name="TextBox 4"/>
-          <p:cNvSpPr txBox="1"/>
-          <p:nvPr/>
-        </p:nvSpPr>
-        <p:spPr>
-          <a:xfrm>
-            <a:off x="548640" y="1463040"/>
-            <a:ext cx="5394960" cy="4937760"/>
-          </a:xfrm>
-          <a:prstGeom prst="rect">
-            <a:avLst/>
-          </a:prstGeom>
-          <a:noFill/>
-        </p:spPr>
-        <p:txBody>
-          <a:bodyPr wrap="square" anchor="t" lIns="0" rIns="0" tIns="0" bIns="0">
-            <a:spAutoFit/>
-          </a:bodyPr>
-          <a:lstStyle/>
-          <a:p>
-            <a:pPr algn="l">
-              <a:spcAft>
-                <a:spcPts val="585"/>
-              </a:spcAft>
-            </a:pPr>
-            <a:r>
-              <a:rPr sz="1500" b="1" i="0">
+              <a:t>Your brakes still work</a:t>
+            </a:r>
+          </a:p>
+          <a:p>
+            <a:pPr algn="l">
+              <a:spcAft>
+                <a:spcPts val="855"/>
+              </a:spcAft>
+            </a:pPr>
+            <a:r>
+              <a:rPr sz="1900" b="0" i="0">
                 <a:solidFill>
                   <a:srgbClr val="1C1B19"/>
                 </a:solidFill>
                 <a:latin typeface="Source Serif 4"/>
               </a:rPr>
-              <a:t>Don't ask about anyone's use.</a:t>
-            </a:r>
-          </a:p>
-          <a:p>
-            <a:pPr algn="l">
-              <a:spcAft>
-                <a:spcPts val="585"/>
-              </a:spcAft>
-            </a:pPr>
-            <a:r>
-              <a:rPr sz="1300" b="0" i="0">
+              <a:t>Your plans and rules are still there</a:t>
+            </a:r>
+          </a:p>
+          <a:p>
+            <a:pPr algn="l">
+              <a:spcAft>
+                <a:spcPts val="855"/>
+              </a:spcAft>
+            </a:pPr>
+            <a:r>
+              <a:rPr sz="1900" b="0" i="0">
                 <a:solidFill>
                   <a:srgbClr val="1C1B19"/>
                 </a:solidFill>
                 <a:latin typeface="Source Serif 4"/>
               </a:rPr>
-              <a:t>No hands up about drinking, parties or rides. Some students in the room have already said yes to things, and some have a family member who struggles with alcohol or drugs. Talk about the skill, never about who did what.</a:t>
-            </a:r>
-          </a:p>
-          <a:p>
-            <a:pPr algn="l">
-              <a:spcAft>
-                <a:spcPts val="585"/>
-              </a:spcAft>
-            </a:pPr>
-            <a:r>
-              <a:rPr sz="1300" b="0" i="0">
+              <a:t>They get outvoted in the moment</a:t>
+            </a:r>
+          </a:p>
+          <a:p>
+            <a:pPr algn="l">
+              <a:spcAft>
+                <a:spcPts val="855"/>
+              </a:spcAft>
+            </a:pPr>
+            <a:r>
+              <a:rPr sz="1900" b="0" i="0">
                 <a:solidFill>
                   <a:srgbClr val="1C1B19"/>
                 </a:solidFill>
                 <a:latin typeface="Source Serif 4"/>
               </a:rPr>
-              <a:t/>
-            </a:r>
-          </a:p>
-          <a:p>
-            <a:pPr algn="l">
-              <a:spcAft>
-                <a:spcPts val="585"/>
-              </a:spcAft>
-            </a:pPr>
-            <a:r>
-              <a:rPr sz="1500" b="1" i="0">
-                <a:solidFill>
-                  <a:srgbClr val="1C1B19"/>
-                </a:solidFill>
-                <a:latin typeface="Source Serif 4"/>
-              </a:rPr>
-              <a:t>Skip the lecture.</a:t>
-            </a:r>
-          </a:p>
-          <a:p>
-            <a:pPr algn="l">
-              <a:spcAft>
-                <a:spcPts val="585"/>
-              </a:spcAft>
-            </a:pPr>
-            <a:r>
-              <a:rPr sz="1300" b="0" i="0">
-                <a:solidFill>
-                  <a:srgbClr val="1C1B19"/>
-                </a:solidFill>
-                <a:latin typeface="Source Serif 4"/>
-              </a:rPr>
-              <a:t>The lesson itself says lecturing friends backfires, and the same goes for us. Keep the tone practical. A student who said yes last weekend should leave with a plan and without shame.</a:t>
-            </a:r>
-          </a:p>
-          <a:p>
-            <a:pPr algn="l">
-              <a:spcAft>
-                <a:spcPts val="585"/>
-              </a:spcAft>
-            </a:pPr>
-            <a:r>
-              <a:rPr sz="1300" b="0" i="0">
-                <a:solidFill>
-                  <a:srgbClr val="1C1B19"/>
-                </a:solidFill>
-                <a:latin typeface="Source Serif 4"/>
-              </a:rPr>
-              <a:t/>
-            </a:r>
-          </a:p>
-          <a:p>
-            <a:pPr algn="l">
-              <a:spcAft>
-                <a:spcPts val="585"/>
-              </a:spcAft>
-            </a:pPr>
-            <a:r>
-              <a:rPr sz="1500" b="1" i="0">
-                <a:solidFill>
-                  <a:srgbClr val="1C1B19"/>
-                </a:solidFill>
-                <a:latin typeface="Source Serif 4"/>
-              </a:rPr>
-              <a:t>Sexual pressure and photos.</a:t>
-            </a:r>
-          </a:p>
-          <a:p>
-            <a:pPr algn="l">
-              <a:spcAft>
-                <a:spcPts val="585"/>
-              </a:spcAft>
-            </a:pPr>
-            <a:r>
-              <a:rPr sz="1300" b="0" i="0">
-                <a:solidFill>
-                  <a:srgbClr val="1C1B19"/>
-                </a:solidFill>
-                <a:latin typeface="Source Serif 4"/>
-              </a:rPr>
-              <a:t>The page names requests for nude or sexual photos as a hard no to tell an adult about. If a student discloses pressure, threats or a photo already sent, thank them, don't ask for details in class, and walk them to a counselor that day. Know your reporting duty before class.</a:t>
-            </a:r>
-          </a:p>
-          <a:p>
-            <a:pPr algn="l">
-              <a:spcAft>
-                <a:spcPts val="585"/>
-              </a:spcAft>
-            </a:pPr>
-            <a:r>
-              <a:rPr sz="1300" b="0" i="0">
-                <a:solidFill>
-                  <a:srgbClr val="1C1B19"/>
-                </a:solidFill>
-                <a:latin typeface="Source Serif 4"/>
-              </a:rPr>
-              <a:t/>
-            </a:r>
-          </a:p>
-        </p:txBody>
-      </p:sp>
-      <p:sp>
-        <p:nvSpPr>
-          <p:cNvPr id="6" name="TextBox 5"/>
-          <p:cNvSpPr txBox="1"/>
-          <p:nvPr/>
-        </p:nvSpPr>
-        <p:spPr>
-          <a:xfrm>
-            <a:off x="6217920" y="1463040"/>
-            <a:ext cx="5394960" cy="4937760"/>
-          </a:xfrm>
-          <a:prstGeom prst="rect">
-            <a:avLst/>
-          </a:prstGeom>
-          <a:noFill/>
-        </p:spPr>
-        <p:txBody>
-          <a:bodyPr wrap="square" anchor="t" lIns="0" rIns="0" tIns="0" bIns="0">
-            <a:spAutoFit/>
-          </a:bodyPr>
-          <a:lstStyle/>
-          <a:p>
-            <a:pPr algn="l">
-              <a:spcAft>
-                <a:spcPts val="585"/>
-              </a:spcAft>
-            </a:pPr>
-            <a:r>
-              <a:rPr sz="1500" b="1" i="0">
-                <a:solidFill>
-                  <a:srgbClr val="1C1B19"/>
-                </a:solidFill>
-                <a:latin typeface="Source Serif 4"/>
-              </a:rPr>
-              <a:t>Know what happens next.</a:t>
-            </a:r>
-          </a:p>
-          <a:p>
-            <a:pPr algn="l">
-              <a:spcAft>
-                <a:spcPts val="585"/>
-              </a:spcAft>
-            </a:pPr>
-            <a:r>
-              <a:rPr sz="1300" b="0" i="0">
-                <a:solidFill>
-                  <a:srgbClr val="1C1B19"/>
-                </a:solidFill>
-                <a:latin typeface="Source Serif 4"/>
-              </a:rPr>
-              <a:t>If a student says a friend is in trouble with alcohol or drugs, say you want to get help, not get anyone in trouble. Know who you'll walk them to. Massachusetts' Good Samaritan law protects the caller and the person who overdosed from possession charges.</a:t>
-            </a:r>
-          </a:p>
-          <a:p>
-            <a:pPr algn="l">
-              <a:spcAft>
-                <a:spcPts val="585"/>
-              </a:spcAft>
-            </a:pPr>
-            <a:r>
-              <a:rPr sz="1300" b="0" i="0">
-                <a:solidFill>
-                  <a:srgbClr val="1C1B19"/>
-                </a:solidFill>
-                <a:latin typeface="Source Serif 4"/>
-              </a:rPr>
-              <a:t/>
-            </a:r>
-          </a:p>
-          <a:p>
-            <a:pPr algn="l">
-              <a:spcAft>
-                <a:spcPts val="585"/>
-              </a:spcAft>
-            </a:pPr>
-            <a:r>
-              <a:rPr sz="1500" b="1" i="0">
-                <a:solidFill>
-                  <a:srgbClr val="1C1B19"/>
-                </a:solidFill>
-                <a:latin typeface="Source Serif 4"/>
-              </a:rPr>
-              <a:t>The car matters now.</a:t>
-            </a:r>
-          </a:p>
-          <a:p>
-            <a:pPr algn="l">
-              <a:spcAft>
-                <a:spcPts val="585"/>
-              </a:spcAft>
-            </a:pPr>
-            <a:r>
-              <a:rPr sz="1300" b="0" i="0">
-                <a:solidFill>
-                  <a:srgbClr val="1C1B19"/>
-                </a:solidFill>
-                <a:latin typeface="Source Serif 4"/>
-              </a:rPr>
-              <a:t>Ninth graders ride with older students who just got licenses. Be clear on the hard line: never ride with someone who has been drinking or using, no matter how short the drive. A code-word call is always okay.</a:t>
-            </a:r>
-          </a:p>
-          <a:p>
-            <a:pPr algn="l">
-              <a:spcAft>
-                <a:spcPts val="585"/>
-              </a:spcAft>
-            </a:pPr>
-            <a:r>
-              <a:rPr sz="1300" b="0" i="0">
-                <a:solidFill>
-                  <a:srgbClr val="1C1B19"/>
-                </a:solidFill>
-                <a:latin typeface="Source Serif 4"/>
-              </a:rPr>
-              <a:t/>
-            </a:r>
-          </a:p>
-          <a:p>
-            <a:pPr algn="l">
-              <a:spcAft>
-                <a:spcPts val="585"/>
-              </a:spcAft>
-            </a:pPr>
-            <a:r>
-              <a:rPr sz="1500" b="1" i="0">
-                <a:solidFill>
-                  <a:srgbClr val="1C1B19"/>
-                </a:solidFill>
-                <a:latin typeface="Source Serif 4"/>
-              </a:rPr>
-              <a:t>The code word may not be a parent.</a:t>
-            </a:r>
-          </a:p>
-          <a:p>
-            <a:pPr algn="l">
-              <a:spcAft>
-                <a:spcPts val="585"/>
-              </a:spcAft>
-            </a:pPr>
-            <a:r>
-              <a:rPr sz="1300" b="0" i="0">
-                <a:solidFill>
-                  <a:srgbClr val="1C1B19"/>
-                </a:solidFill>
-                <a:latin typeface="Source Serif 4"/>
-              </a:rPr>
-              <a:t>Don't say "text your mom or dad." For some students home wouldn't be a calm place to make that call. Say "an adult you trust" and give examples: an older sibling or cousin, an aunt, a coach, a family friend.</a:t>
-            </a:r>
-          </a:p>
-          <a:p>
-            <a:pPr algn="l">
-              <a:spcAft>
-                <a:spcPts val="585"/>
-              </a:spcAft>
-            </a:pPr>
-            <a:r>
-              <a:rPr sz="1300" b="0" i="0">
-                <a:solidFill>
-                  <a:srgbClr val="1C1B19"/>
-                </a:solidFill>
-                <a:latin typeface="Source Serif 4"/>
-              </a:rPr>
-              <a:t/>
-            </a:r>
-          </a:p>
-        </p:txBody>
-      </p:sp>
-    </p:spTree>
-  </p:cSld>
-  <p:clrMapOvr>
-    <a:masterClrMapping/>
-  </p:clrMapOvr>
-</p:sld>
-</file>
-
-<file path=ppt/slides/slide3.xml><?xml version="1.0" encoding="utf-8"?>
-<p:sld xmlns:a="http://schemas.openxmlformats.org/drawingml/2006/main" xmlns:p="http://schemas.openxmlformats.org/presentationml/2006/main" xmlns:r="http://schemas.openxmlformats.org/officeDocument/2006/relationships" show="0">
-  <p:cSld>
-    <p:bg>
-      <p:bgPr>
-        <a:solidFill>
-          <a:srgbClr val="EEEBE4"/>
-        </a:solidFill>
-        <a:effectLst/>
-      </p:bgPr>
-    </p:bg>
-    <p:spTree>
-      <p:nvGrpSpPr>
-        <p:cNvPr id="1" name=""/>
-        <p:cNvGrpSpPr/>
-        <p:nvPr/>
-      </p:nvGrpSpPr>
-      <p:grpSpPr/>
-      <p:sp>
-        <p:nvSpPr>
-          <p:cNvPr id="2" name="Rectangle 1"/>
-          <p:cNvSpPr/>
-          <p:nvPr/>
-        </p:nvSpPr>
-        <p:spPr>
-          <a:xfrm>
-            <a:off x="0" y="0"/>
-            <a:ext cx="12191695" cy="384048"/>
-          </a:xfrm>
-          <a:prstGeom prst="rect">
-            <a:avLst/>
-          </a:prstGeom>
-          <a:solidFill>
-            <a:srgbClr val="0B2D5B"/>
-          </a:solidFill>
-          <a:ln>
-            <a:noFill/>
-          </a:ln>
-          <a:effectLst/>
-        </p:spPr>
-        <p:style>
-          <a:lnRef idx="1">
-            <a:schemeClr val="accent1"/>
-          </a:lnRef>
-          <a:fillRef idx="3">
-            <a:schemeClr val="accent1"/>
-          </a:fillRef>
-          <a:effectRef idx="2">
-            <a:schemeClr val="accent1"/>
-          </a:effectRef>
-          <a:fontRef idx="minor">
-            <a:schemeClr val="lt1"/>
-          </a:fontRef>
-        </p:style>
-        <p:txBody>
-          <a:bodyPr rtlCol="0" anchor="ctr"/>
-          <a:lstStyle/>
-          <a:p>
-            <a:pPr algn="ctr"/>
-          </a:p>
-        </p:txBody>
-      </p:sp>
-      <p:sp>
-        <p:nvSpPr>
-          <p:cNvPr id="3" name="TextBox 2"/>
-          <p:cNvSpPr txBox="1"/>
-          <p:nvPr/>
-        </p:nvSpPr>
-        <p:spPr>
-          <a:xfrm>
-            <a:off x="548640" y="100584"/>
-            <a:ext cx="10972800" cy="274320"/>
-          </a:xfrm>
-          <a:prstGeom prst="rect">
-            <a:avLst/>
-          </a:prstGeom>
-          <a:noFill/>
-        </p:spPr>
-        <p:txBody>
-          <a:bodyPr wrap="square" anchor="t" lIns="0" rIns="0" tIns="0" bIns="0">
-            <a:spAutoFit/>
-          </a:bodyPr>
-          <a:lstStyle/>
-          <a:p>
-            <a:pPr algn="l">
-              <a:spcAft>
-                <a:spcPts val="495"/>
-              </a:spcAft>
-            </a:pPr>
-            <a:r>
-              <a:rPr sz="1100" b="1" i="0">
-                <a:solidFill>
-                  <a:srgbClr val="FFFFFF"/>
-                </a:solidFill>
-                <a:latin typeface="Inter Tight"/>
-              </a:rPr>
-              <a:t>TEACHER PAGE  ·  skipped when you present  ·  Every student in the room</a:t>
-            </a:r>
-          </a:p>
-        </p:txBody>
-      </p:sp>
-      <p:sp>
-        <p:nvSpPr>
-          <p:cNvPr id="4" name="TextBox 3"/>
-          <p:cNvSpPr txBox="1"/>
-          <p:nvPr/>
-        </p:nvSpPr>
-        <p:spPr>
-          <a:xfrm>
-            <a:off x="548640" y="685800"/>
-            <a:ext cx="10972800" cy="640080"/>
-          </a:xfrm>
-          <a:prstGeom prst="rect">
-            <a:avLst/>
-          </a:prstGeom>
-          <a:noFill/>
-        </p:spPr>
-        <p:txBody>
-          <a:bodyPr wrap="square" anchor="t" lIns="0" rIns="0" tIns="0" bIns="0">
-            <a:spAutoFit/>
-          </a:bodyPr>
-          <a:lstStyle/>
-          <a:p>
-            <a:pPr algn="l">
-              <a:spcAft>
-                <a:spcPts val="1350"/>
-              </a:spcAft>
-            </a:pPr>
-            <a:r>
-              <a:rPr sz="3000" b="1" i="0">
-                <a:solidFill>
-                  <a:srgbClr val="1C1B19"/>
-                </a:solidFill>
-                <a:latin typeface="Source Serif 4"/>
-              </a:rPr>
-              <a:t>Every student in the room</a:t>
-            </a:r>
-          </a:p>
-        </p:txBody>
-      </p:sp>
-      <p:sp>
-        <p:nvSpPr>
-          <p:cNvPr id="5" name="TextBox 4"/>
-          <p:cNvSpPr txBox="1"/>
-          <p:nvPr/>
-        </p:nvSpPr>
-        <p:spPr>
-          <a:xfrm>
-            <a:off x="548640" y="1325880"/>
-            <a:ext cx="10972800" cy="365760"/>
-          </a:xfrm>
-          <a:prstGeom prst="rect">
-            <a:avLst/>
-          </a:prstGeom>
-          <a:noFill/>
-        </p:spPr>
-        <p:txBody>
-          <a:bodyPr wrap="square" anchor="t" lIns="0" rIns="0" tIns="0" bIns="0">
-            <a:spAutoFit/>
-          </a:bodyPr>
-          <a:lstStyle/>
-          <a:p>
-            <a:pPr algn="l">
-              <a:spcAft>
-                <a:spcPts val="630"/>
-              </a:spcAft>
-            </a:pPr>
-            <a:r>
-              <a:rPr sz="1400" b="0" i="0">
-                <a:solidFill>
-                  <a:srgbClr val="5D5A54"/>
-                </a:solidFill>
-                <a:latin typeface="Inter Tight"/>
-              </a:rPr>
-              <a:t>Culture, family, identity, ability and money: what to keep in mind for this topic.</a:t>
-            </a:r>
-          </a:p>
-        </p:txBody>
-      </p:sp>
-      <p:sp>
-        <p:nvSpPr>
-          <p:cNvPr id="6" name="TextBox 5"/>
-          <p:cNvSpPr txBox="1"/>
-          <p:nvPr/>
-        </p:nvSpPr>
-        <p:spPr>
-          <a:xfrm>
-            <a:off x="548640" y="1828800"/>
-            <a:ext cx="5394960" cy="4572000"/>
-          </a:xfrm>
-          <a:prstGeom prst="rect">
-            <a:avLst/>
-          </a:prstGeom>
-          <a:noFill/>
-        </p:spPr>
-        <p:txBody>
-          <a:bodyPr wrap="square" anchor="t" lIns="0" rIns="0" tIns="0" bIns="0">
-            <a:spAutoFit/>
-          </a:bodyPr>
-          <a:lstStyle/>
-          <a:p>
-            <a:pPr algn="l">
-              <a:spcAft>
-                <a:spcPts val="585"/>
-              </a:spcAft>
-            </a:pPr>
-            <a:r>
-              <a:rPr sz="1500" b="1" i="0">
-                <a:solidFill>
-                  <a:srgbClr val="1C1B19"/>
-                </a:solidFill>
-                <a:latin typeface="Source Serif 4"/>
-              </a:rPr>
-              <a:t>Families draw different lines.</a:t>
-            </a:r>
-          </a:p>
-          <a:p>
-            <a:pPr algn="l">
-              <a:spcAft>
-                <a:spcPts val="585"/>
-              </a:spcAft>
-            </a:pPr>
-            <a:r>
-              <a:rPr sz="1300" b="0" i="0">
-                <a:solidFill>
-                  <a:srgbClr val="1C1B19"/>
-                </a:solidFill>
-                <a:latin typeface="Source Serif 4"/>
-              </a:rPr>
-              <a:t>Rules about parties, curfews, rides and alcohol vary a lot from home to home, and so does what's allowed at family events. Teach the skill of saying no to what you've decided against, without ranking anyone's family rules.</a:t>
-            </a:r>
-          </a:p>
-          <a:p>
-            <a:pPr algn="l">
-              <a:spcAft>
-                <a:spcPts val="585"/>
-              </a:spcAft>
-            </a:pPr>
-            <a:r>
-              <a:rPr sz="1300" b="0" i="0">
-                <a:solidFill>
-                  <a:srgbClr val="1C1B19"/>
-                </a:solidFill>
-                <a:latin typeface="Source Serif 4"/>
-              </a:rPr>
-              <a:t/>
-            </a:r>
-          </a:p>
-          <a:p>
-            <a:pPr algn="l">
-              <a:spcAft>
-                <a:spcPts val="585"/>
-              </a:spcAft>
-            </a:pPr>
-            <a:r>
-              <a:rPr sz="1500" b="1" i="0">
-                <a:solidFill>
-                  <a:srgbClr val="1C1B19"/>
-                </a:solidFill>
-                <a:latin typeface="Source Serif 4"/>
-              </a:rPr>
-              <a:t>"My parents would never" is a real reason.</a:t>
-            </a:r>
-          </a:p>
-          <a:p>
-            <a:pPr algn="l">
-              <a:spcAft>
-                <a:spcPts val="585"/>
-              </a:spcAft>
-            </a:pPr>
-            <a:r>
-              <a:rPr sz="1300" b="0" i="0">
-                <a:solidFill>
-                  <a:srgbClr val="1C1B19"/>
-                </a:solidFill>
-                <a:latin typeface="Source Serif 4"/>
-              </a:rPr>
-              <a:t>For many students it's simply true, and saying so isn't weak. Faith is a real reason too, and so is a job, a coach or a game in the morning. Don't assume students are religious or that they aren't.</a:t>
-            </a:r>
-          </a:p>
-          <a:p>
-            <a:pPr algn="l">
-              <a:spcAft>
-                <a:spcPts val="585"/>
-              </a:spcAft>
-            </a:pPr>
-            <a:r>
-              <a:rPr sz="1300" b="0" i="0">
-                <a:solidFill>
-                  <a:srgbClr val="1C1B19"/>
-                </a:solidFill>
-                <a:latin typeface="Source Serif 4"/>
-              </a:rPr>
-              <a:t/>
-            </a:r>
-          </a:p>
-          <a:p>
-            <a:pPr algn="l">
-              <a:spcAft>
-                <a:spcPts val="585"/>
-              </a:spcAft>
-            </a:pPr>
-            <a:r>
-              <a:rPr sz="1500" b="1" i="0">
-                <a:solidFill>
-                  <a:srgbClr val="1C1B19"/>
-                </a:solidFill>
-                <a:latin typeface="Source Serif 4"/>
-              </a:rPr>
-              <a:t>Who the trusted adult is.</a:t>
-            </a:r>
-          </a:p>
-          <a:p>
-            <a:pPr algn="l">
-              <a:spcAft>
-                <a:spcPts val="585"/>
-              </a:spcAft>
-            </a:pPr>
-            <a:r>
-              <a:rPr sz="1300" b="0" i="0">
-                <a:solidFill>
-                  <a:srgbClr val="1C1B19"/>
-                </a:solidFill>
-                <a:latin typeface="Source Serif 4"/>
-              </a:rPr>
-              <a:t>Students live with a single parent, grandparents, two moms or two dads, foster or kinship families, or split time between homes. The code-word plan works with any adult they trust, including someone outside the home.</a:t>
-            </a:r>
-          </a:p>
-          <a:p>
-            <a:pPr algn="l">
-              <a:spcAft>
-                <a:spcPts val="585"/>
-              </a:spcAft>
-            </a:pPr>
-            <a:r>
-              <a:rPr sz="1300" b="0" i="0">
-                <a:solidFill>
-                  <a:srgbClr val="1C1B19"/>
-                </a:solidFill>
-                <a:latin typeface="Source Serif 4"/>
-              </a:rPr>
-              <a:t/>
-            </a:r>
-          </a:p>
-        </p:txBody>
-      </p:sp>
-      <p:sp>
-        <p:nvSpPr>
-          <p:cNvPr id="7" name="TextBox 6"/>
-          <p:cNvSpPr txBox="1"/>
-          <p:nvPr/>
-        </p:nvSpPr>
-        <p:spPr>
-          <a:xfrm>
-            <a:off x="6217920" y="1828800"/>
-            <a:ext cx="5394960" cy="4572000"/>
-          </a:xfrm>
-          <a:prstGeom prst="rect">
-            <a:avLst/>
-          </a:prstGeom>
-          <a:noFill/>
-        </p:spPr>
-        <p:txBody>
-          <a:bodyPr wrap="square" anchor="t" lIns="0" rIns="0" tIns="0" bIns="0">
-            <a:spAutoFit/>
-          </a:bodyPr>
-          <a:lstStyle/>
-          <a:p>
-            <a:pPr algn="l">
-              <a:spcAft>
-                <a:spcPts val="585"/>
-              </a:spcAft>
-            </a:pPr>
-            <a:r>
-              <a:rPr sz="1500" b="1" i="0">
-                <a:solidFill>
-                  <a:srgbClr val="1C1B19"/>
-                </a:solidFill>
-                <a:latin typeface="Source Serif 4"/>
-              </a:rPr>
-              <a:t>LGBTQ+ students and pressure.</a:t>
-            </a:r>
-          </a:p>
-          <a:p>
-            <a:pPr algn="l">
-              <a:spcAft>
-                <a:spcPts val="585"/>
-              </a:spcAft>
-            </a:pPr>
-            <a:r>
-              <a:rPr sz="1300" b="0" i="0">
-                <a:solidFill>
-                  <a:srgbClr val="1C1B19"/>
-                </a:solidFill>
-                <a:latin typeface="Source Serif 4"/>
-              </a:rPr>
-              <a:t>Pressure can include being pushed to talk about who you like, or the threat of being outed. A student who isn't out may not have a safe adult at home for the code word. A counselor can help them figure out who.</a:t>
-            </a:r>
-          </a:p>
-          <a:p>
-            <a:pPr algn="l">
-              <a:spcAft>
-                <a:spcPts val="585"/>
-              </a:spcAft>
-            </a:pPr>
-            <a:r>
-              <a:rPr sz="1300" b="0" i="0">
-                <a:solidFill>
-                  <a:srgbClr val="1C1B19"/>
-                </a:solidFill>
-                <a:latin typeface="Source Serif 4"/>
-              </a:rPr>
-              <a:t/>
-            </a:r>
-          </a:p>
-          <a:p>
-            <a:pPr algn="l">
-              <a:spcAft>
-                <a:spcPts val="585"/>
-              </a:spcAft>
-            </a:pPr>
-            <a:r>
-              <a:rPr sz="1500" b="1" i="0">
-                <a:solidFill>
-                  <a:srgbClr val="1C1B19"/>
-                </a:solidFill>
-                <a:latin typeface="Source Serif 4"/>
-              </a:rPr>
-              <a:t>Scripts help students who freeze.</a:t>
-            </a:r>
-          </a:p>
-          <a:p>
-            <a:pPr algn="l">
-              <a:spcAft>
-                <a:spcPts val="585"/>
-              </a:spcAft>
-            </a:pPr>
-            <a:r>
-              <a:rPr sz="1300" b="0" i="0">
-                <a:solidFill>
-                  <a:srgbClr val="1C1B19"/>
-                </a:solidFill>
-                <a:latin typeface="Source Serif 4"/>
-              </a:rPr>
-              <a:t>Students who are autistic, anxious or slower to process often find a ready-made line easier than thinking on the spot. That's the point of deciding ahead. In the pair practice, let students write or read their line instead of performing it, and don't treat eye contact as a sign of confidence.</a:t>
-            </a:r>
-          </a:p>
-          <a:p>
-            <a:pPr algn="l">
-              <a:spcAft>
-                <a:spcPts val="585"/>
-              </a:spcAft>
-            </a:pPr>
-            <a:r>
-              <a:rPr sz="1300" b="0" i="0">
-                <a:solidFill>
-                  <a:srgbClr val="1C1B19"/>
-                </a:solidFill>
-                <a:latin typeface="Source Serif 4"/>
-              </a:rPr>
-              <a:t/>
-            </a:r>
-          </a:p>
-          <a:p>
-            <a:pPr algn="l">
-              <a:spcAft>
-                <a:spcPts val="585"/>
-              </a:spcAft>
-            </a:pPr>
-            <a:r>
-              <a:rPr sz="1500" b="1" i="0">
-                <a:solidFill>
-                  <a:srgbClr val="1C1B19"/>
-                </a:solidFill>
-                <a:latin typeface="Source Serif 4"/>
-              </a:rPr>
-              <a:t>Not everyone has a ride.</a:t>
-            </a:r>
-          </a:p>
-          <a:p>
-            <a:pPr algn="l">
-              <a:spcAft>
-                <a:spcPts val="585"/>
-              </a:spcAft>
-            </a:pPr>
-            <a:r>
-              <a:rPr sz="1300" b="0" i="0">
-                <a:solidFill>
-                  <a:srgbClr val="1C1B19"/>
-                </a:solidFill>
-                <a:latin typeface="Source Serif 4"/>
-              </a:rPr>
-              <a:t>Some families don't have a car or a parent free at night. In the Ayesha scenario, the train or another family's driver counts. "I open at work tomorrow" is a real reason for students with jobs.</a:t>
-            </a:r>
-          </a:p>
-          <a:p>
-            <a:pPr algn="l">
-              <a:spcAft>
-                <a:spcPts val="585"/>
-              </a:spcAft>
-            </a:pPr>
-            <a:r>
-              <a:rPr sz="1300" b="0" i="0">
-                <a:solidFill>
-                  <a:srgbClr val="1C1B19"/>
-                </a:solidFill>
-                <a:latin typeface="Source Serif 4"/>
-              </a:rPr>
-              <a:t/>
-            </a:r>
-          </a:p>
-        </p:txBody>
-      </p:sp>
-    </p:spTree>
-  </p:cSld>
-  <p:clrMapOvr>
-    <a:masterClrMapping/>
-  </p:clrMapOvr>
-</p:sld>
-</file>
-
-<file path=ppt/slides/slide4.xml><?xml version="1.0" encoding="utf-8"?>
-<p:sld xmlns:a="http://schemas.openxmlformats.org/drawingml/2006/main" xmlns:p="http://schemas.openxmlformats.org/presentationml/2006/main" xmlns:r="http://schemas.openxmlformats.org/officeDocument/2006/relationships" show="0">
-  <p:cSld>
-    <p:bg>
-      <p:bgPr>
-        <a:solidFill>
-          <a:srgbClr val="EEEBE4"/>
-        </a:solidFill>
-        <a:effectLst/>
-      </p:bgPr>
-    </p:bg>
-    <p:spTree>
-      <p:nvGrpSpPr>
-        <p:cNvPr id="1" name=""/>
-        <p:cNvGrpSpPr/>
-        <p:nvPr/>
-      </p:nvGrpSpPr>
-      <p:grpSpPr/>
-      <p:sp>
-        <p:nvSpPr>
-          <p:cNvPr id="2" name="Rectangle 1"/>
-          <p:cNvSpPr/>
-          <p:nvPr/>
-        </p:nvSpPr>
-        <p:spPr>
-          <a:xfrm>
-            <a:off x="0" y="0"/>
-            <a:ext cx="12191695" cy="384048"/>
-          </a:xfrm>
-          <a:prstGeom prst="rect">
-            <a:avLst/>
-          </a:prstGeom>
-          <a:solidFill>
-            <a:srgbClr val="0B2D5B"/>
-          </a:solidFill>
-          <a:ln>
-            <a:noFill/>
-          </a:ln>
-          <a:effectLst/>
-        </p:spPr>
-        <p:style>
-          <a:lnRef idx="1">
-            <a:schemeClr val="accent1"/>
-          </a:lnRef>
-          <a:fillRef idx="3">
-            <a:schemeClr val="accent1"/>
-          </a:fillRef>
-          <a:effectRef idx="2">
-            <a:schemeClr val="accent1"/>
-          </a:effectRef>
-          <a:fontRef idx="minor">
-            <a:schemeClr val="lt1"/>
-          </a:fontRef>
-        </p:style>
-        <p:txBody>
-          <a:bodyPr rtlCol="0" anchor="ctr"/>
-          <a:lstStyle/>
-          <a:p>
-            <a:pPr algn="ctr"/>
-          </a:p>
-        </p:txBody>
-      </p:sp>
-      <p:sp>
-        <p:nvSpPr>
-          <p:cNvPr id="3" name="TextBox 2"/>
-          <p:cNvSpPr txBox="1"/>
-          <p:nvPr/>
-        </p:nvSpPr>
-        <p:spPr>
-          <a:xfrm>
-            <a:off x="548640" y="100584"/>
-            <a:ext cx="10972800" cy="274320"/>
-          </a:xfrm>
-          <a:prstGeom prst="rect">
-            <a:avLst/>
-          </a:prstGeom>
-          <a:noFill/>
-        </p:spPr>
-        <p:txBody>
-          <a:bodyPr wrap="square" anchor="t" lIns="0" rIns="0" tIns="0" bIns="0">
-            <a:spAutoFit/>
-          </a:bodyPr>
-          <a:lstStyle/>
-          <a:p>
-            <a:pPr algn="l">
-              <a:spcAft>
-                <a:spcPts val="495"/>
-              </a:spcAft>
-            </a:pPr>
-            <a:r>
-              <a:rPr sz="1100" b="1" i="0">
-                <a:solidFill>
-                  <a:srgbClr val="FFFFFF"/>
-                </a:solidFill>
-                <a:latin typeface="Inter Tight"/>
-              </a:rPr>
-              <a:t>TEACHER PAGE  ·  skipped when you present  ·  Background</a:t>
-            </a:r>
-          </a:p>
-        </p:txBody>
-      </p:sp>
-      <p:sp>
-        <p:nvSpPr>
-          <p:cNvPr id="4" name="TextBox 3"/>
-          <p:cNvSpPr txBox="1"/>
-          <p:nvPr/>
-        </p:nvSpPr>
-        <p:spPr>
-          <a:xfrm>
-            <a:off x="548640" y="685800"/>
-            <a:ext cx="10972800" cy="640080"/>
-          </a:xfrm>
-          <a:prstGeom prst="rect">
-            <a:avLst/>
-          </a:prstGeom>
-          <a:noFill/>
-        </p:spPr>
-        <p:txBody>
-          <a:bodyPr wrap="square" anchor="t" lIns="0" rIns="0" tIns="0" bIns="0">
-            <a:spAutoFit/>
-          </a:bodyPr>
-          <a:lstStyle/>
-          <a:p>
-            <a:pPr algn="l">
-              <a:spcAft>
-                <a:spcPts val="1350"/>
-              </a:spcAft>
-            </a:pPr>
-            <a:r>
-              <a:rPr sz="3000" b="1" i="0">
-                <a:solidFill>
-                  <a:srgbClr val="1C1B19"/>
-                </a:solidFill>
-                <a:latin typeface="Source Serif 4"/>
-              </a:rPr>
-              <a:t>What the research says</a:t>
-            </a:r>
-          </a:p>
-        </p:txBody>
-      </p:sp>
-      <p:sp>
-        <p:nvSpPr>
-          <p:cNvPr id="5" name="TextBox 4"/>
-          <p:cNvSpPr txBox="1"/>
-          <p:nvPr/>
-        </p:nvSpPr>
-        <p:spPr>
-          <a:xfrm>
-            <a:off x="548640" y="1463040"/>
-            <a:ext cx="5394960" cy="4937760"/>
-          </a:xfrm>
-          <a:prstGeom prst="rect">
-            <a:avLst/>
-          </a:prstGeom>
-          <a:noFill/>
-        </p:spPr>
-        <p:txBody>
-          <a:bodyPr wrap="square" anchor="t" lIns="0" rIns="0" tIns="0" bIns="0">
-            <a:spAutoFit/>
-          </a:bodyPr>
-          <a:lstStyle/>
-          <a:p>
-            <a:pPr algn="l">
-              <a:spcAft>
-                <a:spcPts val="585"/>
-              </a:spcAft>
-            </a:pPr>
-            <a:r>
-              <a:rPr sz="1300" b="0" i="0">
-                <a:solidFill>
-                  <a:srgbClr val="1C1B19"/>
-                </a:solidFill>
-                <a:latin typeface="Source Serif 4"/>
-              </a:rPr>
-              <a:t>Teens, young adults and adults played a driving game alone and while they believed friends were watching. Only the teens took more chances with friends watching, and only the teens' reward regions lit up more. Their brake regions didn't get weaker.</a:t>
-            </a:r>
-          </a:p>
-          <a:p>
-            <a:pPr algn="l">
-              <a:spcAft>
-                <a:spcPts val="585"/>
-              </a:spcAft>
-            </a:pPr>
-            <a:r>
-              <a:rPr sz="1050" b="0" i="0">
-                <a:solidFill>
-                  <a:srgbClr val="5D5A54"/>
-                </a:solidFill>
-                <a:latin typeface="Inter Tight"/>
-              </a:rPr>
-              <a:t>Chein et al., Developmental Science, 2011 (Temple University)</a:t>
-            </a:r>
-          </a:p>
-          <a:p>
-            <a:pPr algn="l">
-              <a:spcAft>
-                <a:spcPts val="585"/>
-              </a:spcAft>
-            </a:pPr>
-            <a:r>
-              <a:rPr sz="1300" b="0" i="0">
-                <a:solidFill>
-                  <a:srgbClr val="1C1B19"/>
-                </a:solidFill>
-                <a:latin typeface="Source Serif 4"/>
-              </a:rPr>
-              <a:t>306 people randomly assigned to work with two same-age peers took more risks and focused more on benefits than costs. The effect was strongest for ages 13 to 16 and 18 to 22, and weakest for adults 24 and older.</a:t>
-            </a:r>
-          </a:p>
-          <a:p>
-            <a:pPr algn="l">
-              <a:spcAft>
-                <a:spcPts val="585"/>
-              </a:spcAft>
-            </a:pPr>
-            <a:r>
-              <a:rPr sz="1050" b="0" i="0">
-                <a:solidFill>
-                  <a:srgbClr val="5D5A54"/>
-                </a:solidFill>
-                <a:latin typeface="Inter Tight"/>
-              </a:rPr>
-              <a:t>Gardner and Steinberg, Developmental Psychology, 2005</a:t>
-            </a:r>
-          </a:p>
-          <a:p>
-            <a:pPr algn="l">
-              <a:spcAft>
-                <a:spcPts val="585"/>
-              </a:spcAft>
-            </a:pPr>
-            <a:r>
-              <a:rPr sz="1300" b="0" i="0">
-                <a:solidFill>
-                  <a:srgbClr val="1C1B19"/>
-                </a:solidFill>
-                <a:latin typeface="Source Serif 4"/>
-              </a:rPr>
-              <a:t>Princeton students believed they were more uncomfortable with campus drinking than the average student. Most of them felt that way, so the "average student" they imagined barely existed (pluralistic ignorance).</a:t>
-            </a:r>
-          </a:p>
-          <a:p>
-            <a:pPr algn="l">
-              <a:spcAft>
-                <a:spcPts val="585"/>
-              </a:spcAft>
-            </a:pPr>
-            <a:r>
-              <a:rPr sz="1050" b="0" i="0">
-                <a:solidFill>
-                  <a:srgbClr val="5D5A54"/>
-                </a:solidFill>
-                <a:latin typeface="Inter Tight"/>
-              </a:rPr>
-              <a:t>Prentice and Miller, Journal of Personality and Social Psychology, 1993</a:t>
-            </a:r>
-          </a:p>
-          <a:p>
-            <a:pPr algn="l">
-              <a:spcAft>
-                <a:spcPts val="585"/>
-              </a:spcAft>
-            </a:pPr>
-            <a:r>
-              <a:rPr sz="1300" b="0" i="0">
-                <a:solidFill>
-                  <a:srgbClr val="1C1B19"/>
-                </a:solidFill>
-                <a:latin typeface="Source Serif 4"/>
-              </a:rPr>
-              <a:t>About 29% of U.S. high school students reported current alcohol use, marijuana use or prescription opioid misuse in 2021. About 7 in 10 had done none of those in the past month.</a:t>
-            </a:r>
-          </a:p>
-          <a:p>
-            <a:pPr algn="l">
-              <a:spcAft>
-                <a:spcPts val="585"/>
-              </a:spcAft>
-            </a:pPr>
-            <a:r>
-              <a:rPr sz="1050" b="0" i="0">
-                <a:solidFill>
-                  <a:srgbClr val="5D5A54"/>
-                </a:solidFill>
-                <a:latin typeface="Inter Tight"/>
-              </a:rPr>
-              <a:t>CDC Youth Risk Behavior Survey, 2021 (Hoots et al., MMWR, 2023)</a:t>
-            </a:r>
-          </a:p>
-        </p:txBody>
-      </p:sp>
-      <p:sp>
-        <p:nvSpPr>
-          <p:cNvPr id="6" name="TextBox 5"/>
-          <p:cNvSpPr txBox="1"/>
-          <p:nvPr/>
-        </p:nvSpPr>
-        <p:spPr>
-          <a:xfrm>
-            <a:off x="6217920" y="1463040"/>
-            <a:ext cx="5394960" cy="4937760"/>
-          </a:xfrm>
-          <a:prstGeom prst="rect">
-            <a:avLst/>
-          </a:prstGeom>
-          <a:noFill/>
-        </p:spPr>
-        <p:txBody>
-          <a:bodyPr wrap="square" anchor="t" lIns="0" rIns="0" tIns="0" bIns="0">
-            <a:spAutoFit/>
-          </a:bodyPr>
-          <a:lstStyle/>
-          <a:p>
-            <a:pPr algn="l">
-              <a:spcAft>
-                <a:spcPts val="585"/>
-              </a:spcAft>
-            </a:pPr>
-            <a:r>
-              <a:rPr sz="1300" b="0" i="0">
-                <a:solidFill>
-                  <a:srgbClr val="1C1B19"/>
-                </a:solidFill>
-                <a:latin typeface="Source Serif 4"/>
-              </a:rPr>
-              <a:t>In five experiments with more than 2,000 people, those turning down an invitation expected the inviter to be far more upset, and far less likely to ask again, than inviters actually were. The reason for saying no was held constant, and results may differ across cultures.</a:t>
-            </a:r>
-          </a:p>
-          <a:p>
-            <a:pPr algn="l">
-              <a:spcAft>
-                <a:spcPts val="585"/>
-              </a:spcAft>
-            </a:pPr>
-            <a:r>
-              <a:rPr sz="1050" b="0" i="0">
-                <a:solidFill>
-                  <a:srgbClr val="5D5A54"/>
-                </a:solidFill>
-                <a:latin typeface="Inter Tight"/>
-              </a:rPr>
-              <a:t>Givi and Kirk, Journal of Personality and Social Psychology, 2024</a:t>
-            </a:r>
-          </a:p>
-          <a:p>
-            <a:pPr algn="l">
-              <a:spcAft>
-                <a:spcPts val="585"/>
-              </a:spcAft>
-            </a:pPr>
-            <a:r>
-              <a:rPr sz="1300" b="0" i="0">
-                <a:solidFill>
-                  <a:srgbClr val="1C1B19"/>
-                </a:solidFill>
-                <a:latin typeface="Source Serif 4"/>
-              </a:rPr>
-              <a:t>A 17-year-old driver's risk of dying per trip was about 1.5 times higher with one passenger, 2.6 times with two, and about 3 times with three or more, compared with driving alone. The pattern held for 16-year-olds.</a:t>
-            </a:r>
-          </a:p>
-          <a:p>
-            <a:pPr algn="l">
-              <a:spcAft>
-                <a:spcPts val="585"/>
-              </a:spcAft>
-            </a:pPr>
-            <a:r>
-              <a:rPr sz="1050" b="0" i="0">
-                <a:solidFill>
-                  <a:srgbClr val="5D5A54"/>
-                </a:solidFill>
-                <a:latin typeface="Inter Tight"/>
-              </a:rPr>
-              <a:t>Chen et al., JAMA, 2000</a:t>
-            </a:r>
-          </a:p>
-          <a:p>
-            <a:pPr algn="l">
-              <a:spcAft>
-                <a:spcPts val="585"/>
-              </a:spcAft>
-            </a:pPr>
-            <a:r>
-              <a:rPr sz="1300" b="0" i="0">
-                <a:solidFill>
-                  <a:srgbClr val="1C1B19"/>
-                </a:solidFill>
-                <a:latin typeface="Source Serif 4"/>
-              </a:rPr>
-              <a:t>Massachusetts junior operators can't carry passengers under 18 who aren't immediate family for the first six months, unless a licensed driver 21 or older with a year of experience sits beside them. The Good Samaritan law protects a person who calls for help during an overdose, and the person who overdosed, from possession charges.</a:t>
-            </a:r>
-          </a:p>
-          <a:p>
-            <a:pPr algn="l">
-              <a:spcAft>
-                <a:spcPts val="585"/>
-              </a:spcAft>
-            </a:pPr>
-            <a:r>
-              <a:rPr sz="1050" b="0" i="0">
-                <a:solidFill>
-                  <a:srgbClr val="5D5A54"/>
-                </a:solidFill>
-                <a:latin typeface="Inter Tight"/>
-              </a:rPr>
-              <a:t>Massachusetts General Laws c. 90, § 8; c. 94C, § 34A</a:t>
-            </a:r>
-          </a:p>
-        </p:txBody>
-      </p:sp>
-    </p:spTree>
-  </p:cSld>
-  <p:clrMapOvr>
-    <a:masterClrMapping/>
-  </p:clrMapOvr>
-</p:sld>
-</file>
-
-<file path=ppt/slides/slide5.xml><?xml version="1.0" encoding="utf-8"?>
-<p:sld xmlns:a="http://schemas.openxmlformats.org/drawingml/2006/main" xmlns:p="http://schemas.openxmlformats.org/presentationml/2006/main" xmlns:r="http://schemas.openxmlformats.org/officeDocument/2006/relationships">
-  <p:cSld>
-    <p:bg>
-      <p:bgPr>
-        <a:solidFill>
-          <a:srgbClr val="0B2D5B"/>
-        </a:solidFill>
-        <a:effectLst/>
-      </p:bgPr>
-    </p:bg>
-    <p:spTree>
-      <p:nvGrpSpPr>
-        <p:cNvPr id="1" name=""/>
-        <p:cNvGrpSpPr/>
-        <p:nvPr/>
-      </p:nvGrpSpPr>
-      <p:grpSpPr/>
-      <p:sp>
-        <p:nvSpPr>
-          <p:cNvPr id="2" name="Rectangle 1"/>
-          <p:cNvSpPr/>
-          <p:nvPr/>
-        </p:nvSpPr>
-        <p:spPr>
-          <a:xfrm>
-            <a:off x="548640" y="502920"/>
-            <a:ext cx="457200" cy="54864"/>
-          </a:xfrm>
-          <a:prstGeom prst="rect">
-            <a:avLst/>
-          </a:prstGeom>
-          <a:solidFill>
-            <a:srgbClr val="F47B20"/>
-          </a:solidFill>
-          <a:ln>
-            <a:noFill/>
-          </a:ln>
-          <a:effectLst/>
-        </p:spPr>
-        <p:style>
-          <a:lnRef idx="1">
-            <a:schemeClr val="accent1"/>
-          </a:lnRef>
-          <a:fillRef idx="3">
-            <a:schemeClr val="accent1"/>
-          </a:fillRef>
-          <a:effectRef idx="2">
-            <a:schemeClr val="accent1"/>
-          </a:effectRef>
-          <a:fontRef idx="minor">
-            <a:schemeClr val="lt1"/>
-          </a:fontRef>
-        </p:style>
-        <p:txBody>
-          <a:bodyPr rtlCol="0" anchor="ctr"/>
-          <a:lstStyle/>
-          <a:p>
-            <a:pPr algn="ctr"/>
-          </a:p>
-        </p:txBody>
-      </p:sp>
-      <p:sp>
-        <p:nvSpPr>
-          <p:cNvPr id="3" name="TextBox 2"/>
-          <p:cNvSpPr txBox="1"/>
-          <p:nvPr/>
-        </p:nvSpPr>
-        <p:spPr>
-          <a:xfrm>
-            <a:off x="1143000" y="393192"/>
-            <a:ext cx="8229600" cy="274320"/>
-          </a:xfrm>
-          <a:prstGeom prst="rect">
-            <a:avLst/>
-          </a:prstGeom>
-          <a:noFill/>
-        </p:spPr>
-        <p:txBody>
-          <a:bodyPr wrap="square" anchor="t" lIns="0" rIns="0" tIns="0" bIns="0">
-            <a:spAutoFit/>
-          </a:bodyPr>
-          <a:lstStyle/>
-          <a:p>
-            <a:pPr algn="l">
-              <a:spcAft>
-                <a:spcPts val="540"/>
-              </a:spcAft>
-            </a:pPr>
-            <a:r>
-              <a:rPr sz="1200" b="1" i="0">
-                <a:solidFill>
-                  <a:srgbClr val="5D5A54"/>
-                </a:solidFill>
-                <a:latin typeface="Inter Tight"/>
-              </a:rPr>
-              <a:t>SAYING NO WITHOUT LOSING YOUR FRIENDS</a:t>
-            </a:r>
-          </a:p>
-        </p:txBody>
-      </p:sp>
-      <p:sp>
-        <p:nvSpPr>
-          <p:cNvPr id="4" name="TextBox 3"/>
-          <p:cNvSpPr txBox="1"/>
-          <p:nvPr/>
-        </p:nvSpPr>
-        <p:spPr>
-          <a:xfrm>
-            <a:off x="8229600" y="6400800"/>
-            <a:ext cx="3410712" cy="274320"/>
-          </a:xfrm>
-          <a:prstGeom prst="rect">
-            <a:avLst/>
-          </a:prstGeom>
-          <a:noFill/>
-        </p:spPr>
-        <p:txBody>
-          <a:bodyPr wrap="square" anchor="t" lIns="0" rIns="0" tIns="0" bIns="0">
-            <a:spAutoFit/>
-          </a:bodyPr>
-          <a:lstStyle/>
-          <a:p>
-            <a:pPr algn="r">
-              <a:spcAft>
-                <a:spcPts val="450"/>
-              </a:spcAft>
-            </a:pPr>
-            <a:r>
-              <a:rPr sz="1000" b="0" i="0">
-                <a:solidFill>
-                  <a:srgbClr val="5D5A54"/>
-                </a:solidFill>
-                <a:latin typeface="Inter Tight"/>
-              </a:rPr>
-              <a:t>Beaver Counseling</a:t>
-            </a:r>
-          </a:p>
-        </p:txBody>
-      </p:sp>
-      <p:sp>
-        <p:nvSpPr>
-          <p:cNvPr id="5" name="TextBox 4"/>
-          <p:cNvSpPr txBox="1"/>
-          <p:nvPr/>
-        </p:nvSpPr>
-        <p:spPr>
-          <a:xfrm>
-            <a:off x="822960" y="1371600"/>
-            <a:ext cx="10515600" cy="2377440"/>
-          </a:xfrm>
-          <a:prstGeom prst="rect">
-            <a:avLst/>
-          </a:prstGeom>
-          <a:noFill/>
-        </p:spPr>
-        <p:txBody>
-          <a:bodyPr wrap="square" anchor="b" lIns="0" rIns="0" tIns="0" bIns="0">
-            <a:spAutoFit/>
-          </a:bodyPr>
-          <a:lstStyle/>
-          <a:p>
-            <a:pPr algn="l">
-              <a:spcAft>
-                <a:spcPts val="2430"/>
-              </a:spcAft>
-            </a:pPr>
-            <a:r>
-              <a:rPr sz="5400" b="1" i="0">
-                <a:solidFill>
-                  <a:srgbClr val="FFFFFF"/>
-                </a:solidFill>
-                <a:latin typeface="Source Serif 4"/>
-              </a:rPr>
-              <a:t>Saying No Without Losing Your Friends</a:t>
-            </a:r>
-          </a:p>
-        </p:txBody>
-      </p:sp>
-      <p:sp>
-        <p:nvSpPr>
-          <p:cNvPr id="6" name="TextBox 5"/>
-          <p:cNvSpPr txBox="1"/>
-          <p:nvPr/>
-        </p:nvSpPr>
-        <p:spPr>
-          <a:xfrm>
-            <a:off x="822960" y="3931920"/>
-            <a:ext cx="10515600" cy="914400"/>
-          </a:xfrm>
-          <a:prstGeom prst="rect">
-            <a:avLst/>
-          </a:prstGeom>
-          <a:noFill/>
-        </p:spPr>
-        <p:txBody>
-          <a:bodyPr wrap="square" anchor="t" lIns="0" rIns="0" tIns="0" bIns="0">
-            <a:spAutoFit/>
-          </a:bodyPr>
-          <a:lstStyle/>
-          <a:p>
-            <a:pPr algn="l">
-              <a:spcAft>
-                <a:spcPts val="1080"/>
-              </a:spcAft>
-            </a:pPr>
-            <a:r>
-              <a:rPr sz="2400" b="0" i="1">
-                <a:solidFill>
-                  <a:srgbClr val="E8E4DA"/>
-                </a:solidFill>
-                <a:latin typeface="Source Serif 4"/>
-              </a:rPr>
-              <a:t>Nobody pushed. It still felt like a test.</a:t>
-            </a:r>
-          </a:p>
-        </p:txBody>
-      </p:sp>
-      <p:sp>
-        <p:nvSpPr>
-          <p:cNvPr id="7" name="TextBox 6"/>
-          <p:cNvSpPr txBox="1"/>
-          <p:nvPr/>
-        </p:nvSpPr>
-        <p:spPr>
-          <a:xfrm>
-            <a:off x="822960" y="6035040"/>
-            <a:ext cx="7315200" cy="365760"/>
-          </a:xfrm>
-          <a:prstGeom prst="rect">
-            <a:avLst/>
-          </a:prstGeom>
-          <a:noFill/>
-        </p:spPr>
-        <p:txBody>
-          <a:bodyPr wrap="square" anchor="t" lIns="0" rIns="0" tIns="0" bIns="0">
-            <a:spAutoFit/>
-          </a:bodyPr>
-          <a:lstStyle/>
-          <a:p>
-            <a:pPr algn="l">
-              <a:spcAft>
-                <a:spcPts val="585"/>
-              </a:spcAft>
-            </a:pPr>
-            <a:r>
-              <a:rPr sz="1300" b="0" i="0">
-                <a:solidFill>
-                  <a:srgbClr val="E8E4DA"/>
-                </a:solidFill>
-                <a:latin typeface="Inter Tight"/>
-              </a:rPr>
-              <a:t>Beaver Upper School · Counseling</a:t>
+              <a:t>An earlier decision holds better</a:t>
             </a:r>
           </a:p>
         </p:txBody>
@@ -8850,7 +8926,7 @@
                 </a:solidFill>
                 <a:latin typeface="Inter Tight"/>
               </a:rPr>
-              <a:t>THE GUESS</a:t>
+              <a:t>THE CORE SKILL</a:t>
             </a:r>
           </a:p>
         </p:txBody>
@@ -8896,97 +8972,14 @@
       </p:sp>
       <p:sp>
         <p:nvSpPr>
-          <p:cNvPr id="5" name="Rectangle 4"/>
-          <p:cNvSpPr/>
-          <p:nvPr/>
-        </p:nvSpPr>
-        <p:spPr>
-          <a:xfrm>
-            <a:off x="822960" y="1371600"/>
-            <a:ext cx="73152" cy="3566160"/>
-          </a:xfrm>
-          <a:prstGeom prst="rect">
-            <a:avLst/>
-          </a:prstGeom>
-          <a:solidFill>
-            <a:srgbClr val="F47B20"/>
-          </a:solidFill>
-          <a:ln>
-            <a:noFill/>
-          </a:ln>
-          <a:effectLst/>
-        </p:spPr>
-        <p:style>
-          <a:lnRef idx="1">
-            <a:schemeClr val="accent1"/>
-          </a:lnRef>
-          <a:fillRef idx="3">
-            <a:schemeClr val="accent1"/>
-          </a:fillRef>
-          <a:effectRef idx="2">
-            <a:schemeClr val="accent1"/>
-          </a:effectRef>
-          <a:fontRef idx="minor">
-            <a:schemeClr val="lt1"/>
-          </a:fontRef>
-        </p:style>
-        <p:txBody>
-          <a:bodyPr rtlCol="0" anchor="ctr"/>
-          <a:lstStyle/>
-          <a:p>
-            <a:pPr algn="ctr"/>
-          </a:p>
-        </p:txBody>
-      </p:sp>
-      <p:sp>
-        <p:nvSpPr>
-          <p:cNvPr id="6" name="TextBox 5"/>
+          <p:cNvPr id="5" name="TextBox 4"/>
           <p:cNvSpPr txBox="1"/>
           <p:nvPr/>
         </p:nvSpPr>
         <p:spPr>
           <a:xfrm>
-            <a:off x="1188720" y="1371600"/>
-            <a:ext cx="10058400" cy="3566160"/>
-          </a:xfrm>
-          <a:prstGeom prst="rect">
-            <a:avLst/>
-          </a:prstGeom>
-          <a:noFill/>
-        </p:spPr>
-        <p:txBody>
-          <a:bodyPr wrap="square" anchor="ctr" lIns="0" rIns="0" tIns="0" bIns="0">
-            <a:spAutoFit/>
-          </a:bodyPr>
-          <a:lstStyle/>
-          <a:p>
-            <a:pPr algn="l">
-              <a:spcAft>
-                <a:spcPts val="1800"/>
-              </a:spcAft>
-            </a:pPr>
-            <a:r>
-              <a:rPr sz="4000" b="0" i="1">
-                <a:solidFill>
-                  <a:srgbClr val="1C1B19"/>
-                </a:solidFill>
-                <a:latin typeface="Source Serif 4"/>
-              </a:rPr>
-              <a:t>Out of 10 U.S. high schoolers, how many did none of it last month?</a:t>
-            </a:r>
-          </a:p>
-        </p:txBody>
-      </p:sp>
-      <p:sp>
-        <p:nvSpPr>
-          <p:cNvPr id="7" name="TextBox 6"/>
-          <p:cNvSpPr txBox="1"/>
-          <p:nvPr/>
-        </p:nvSpPr>
-        <p:spPr>
-          <a:xfrm>
-            <a:off x="1188720" y="5120640"/>
-            <a:ext cx="10058400" cy="914400"/>
+            <a:off x="822960" y="1005840"/>
+            <a:ext cx="10515600" cy="1097280"/>
           </a:xfrm>
           <a:prstGeom prst="rect">
             <a:avLst/>
@@ -9001,17 +8994,487 @@
           <a:p>
             <a:pPr algn="l">
               <a:spcAft>
-                <a:spcPts val="810"/>
-              </a:spcAft>
-            </a:pPr>
-            <a:r>
-              <a:rPr sz="1800" b="0" i="0">
+                <a:spcPts val="1620"/>
+              </a:spcAft>
+            </a:pPr>
+            <a:r>
+              <a:rPr sz="3600" b="1" i="0">
+                <a:solidFill>
+                  <a:srgbClr val="1C1B19"/>
+                </a:solidFill>
+                <a:latin typeface="Source Serif 4"/>
+              </a:rPr>
+              <a:t>Make the call before the moment.</a:t>
+            </a:r>
+          </a:p>
+        </p:txBody>
+      </p:sp>
+      <p:sp>
+        <p:nvSpPr>
+          <p:cNvPr id="6" name="TextBox 5"/>
+          <p:cNvSpPr txBox="1"/>
+          <p:nvPr/>
+        </p:nvSpPr>
+        <p:spPr>
+          <a:xfrm>
+            <a:off x="822960" y="2057400"/>
+            <a:ext cx="548640" cy="804672"/>
+          </a:xfrm>
+          <a:prstGeom prst="rect">
+            <a:avLst/>
+          </a:prstGeom>
+          <a:noFill/>
+        </p:spPr>
+        <p:txBody>
+          <a:bodyPr wrap="square" anchor="t" lIns="0" rIns="0" tIns="0" bIns="0">
+            <a:spAutoFit/>
+          </a:bodyPr>
+          <a:lstStyle/>
+          <a:p>
+            <a:pPr algn="l">
+              <a:spcAft>
+                <a:spcPts val="1170"/>
+              </a:spcAft>
+            </a:pPr>
+            <a:r>
+              <a:rPr sz="2600" b="1" i="0">
+                <a:solidFill>
+                  <a:srgbClr val="F47B20"/>
+                </a:solidFill>
+                <a:latin typeface="Source Serif 4"/>
+              </a:rPr>
+              <a:t>1</a:t>
+            </a:r>
+          </a:p>
+        </p:txBody>
+      </p:sp>
+      <p:sp>
+        <p:nvSpPr>
+          <p:cNvPr id="7" name="TextBox 6"/>
+          <p:cNvSpPr txBox="1"/>
+          <p:nvPr/>
+        </p:nvSpPr>
+        <p:spPr>
+          <a:xfrm>
+            <a:off x="1463040" y="2093976"/>
+            <a:ext cx="9875520" cy="804672"/>
+          </a:xfrm>
+          <a:prstGeom prst="rect">
+            <a:avLst/>
+          </a:prstGeom>
+          <a:noFill/>
+        </p:spPr>
+        <p:txBody>
+          <a:bodyPr wrap="square" anchor="t" lIns="0" rIns="0" tIns="0" bIns="0">
+            <a:spAutoFit/>
+          </a:bodyPr>
+          <a:lstStyle/>
+          <a:p>
+            <a:pPr algn="l">
+              <a:spcAft>
+                <a:spcPts val="945"/>
+              </a:spcAft>
+            </a:pPr>
+            <a:r>
+              <a:rPr sz="2100" b="1" i="0">
+                <a:solidFill>
+                  <a:srgbClr val="1C1B19"/>
+                </a:solidFill>
+                <a:latin typeface="Source Serif 4"/>
+              </a:rPr>
+              <a:t>Know your lines now.</a:t>
+            </a:r>
+          </a:p>
+          <a:p>
+            <a:pPr algn="l">
+              <a:spcAft>
+                <a:spcPts val="945"/>
+              </a:spcAft>
+            </a:pPr>
+            <a:r>
+              <a:rPr sz="1600" b="0" i="0">
                 <a:solidFill>
                   <a:srgbClr val="5D5A54"/>
                 </a:solidFill>
-                <a:latin typeface="Inter Tight"/>
-              </a:rPr>
-              <a:t>None of it: no alcohol, no marijuana, no misused prescription pills. Write a number. No names.</a:t>
+                <a:latin typeface="Source Serif 4"/>
+              </a:rPr>
+              <a:t>Decide once, instead of every Saturday.</a:t>
+            </a:r>
+          </a:p>
+        </p:txBody>
+      </p:sp>
+      <p:sp>
+        <p:nvSpPr>
+          <p:cNvPr id="8" name="TextBox 7"/>
+          <p:cNvSpPr txBox="1"/>
+          <p:nvPr/>
+        </p:nvSpPr>
+        <p:spPr>
+          <a:xfrm>
+            <a:off x="822960" y="2862072"/>
+            <a:ext cx="548640" cy="804672"/>
+          </a:xfrm>
+          <a:prstGeom prst="rect">
+            <a:avLst/>
+          </a:prstGeom>
+          <a:noFill/>
+        </p:spPr>
+        <p:txBody>
+          <a:bodyPr wrap="square" anchor="t" lIns="0" rIns="0" tIns="0" bIns="0">
+            <a:spAutoFit/>
+          </a:bodyPr>
+          <a:lstStyle/>
+          <a:p>
+            <a:pPr algn="l">
+              <a:spcAft>
+                <a:spcPts val="1170"/>
+              </a:spcAft>
+            </a:pPr>
+            <a:r>
+              <a:rPr sz="2600" b="1" i="0">
+                <a:solidFill>
+                  <a:srgbClr val="F47B20"/>
+                </a:solidFill>
+                <a:latin typeface="Source Serif 4"/>
+              </a:rPr>
+              <a:t>2</a:t>
+            </a:r>
+          </a:p>
+        </p:txBody>
+      </p:sp>
+      <p:sp>
+        <p:nvSpPr>
+          <p:cNvPr id="9" name="TextBox 8"/>
+          <p:cNvSpPr txBox="1"/>
+          <p:nvPr/>
+        </p:nvSpPr>
+        <p:spPr>
+          <a:xfrm>
+            <a:off x="1463040" y="2898648"/>
+            <a:ext cx="9875520" cy="804672"/>
+          </a:xfrm>
+          <a:prstGeom prst="rect">
+            <a:avLst/>
+          </a:prstGeom>
+          <a:noFill/>
+        </p:spPr>
+        <p:txBody>
+          <a:bodyPr wrap="square" anchor="t" lIns="0" rIns="0" tIns="0" bIns="0">
+            <a:spAutoFit/>
+          </a:bodyPr>
+          <a:lstStyle/>
+          <a:p>
+            <a:pPr algn="l">
+              <a:spcAft>
+                <a:spcPts val="945"/>
+              </a:spcAft>
+            </a:pPr>
+            <a:r>
+              <a:rPr sz="2100" b="1" i="0">
+                <a:solidFill>
+                  <a:srgbClr val="1C1B19"/>
+                </a:solidFill>
+                <a:latin typeface="Source Serif 4"/>
+              </a:rPr>
+              <a:t>Keep it short.</a:t>
+            </a:r>
+          </a:p>
+          <a:p>
+            <a:pPr algn="l">
+              <a:spcAft>
+                <a:spcPts val="945"/>
+              </a:spcAft>
+            </a:pPr>
+            <a:r>
+              <a:rPr sz="1600" b="0" i="0">
+                <a:solidFill>
+                  <a:srgbClr val="5D5A54"/>
+                </a:solidFill>
+                <a:latin typeface="Source Serif 4"/>
+              </a:rPr>
+              <a:t>Long explanations give people something to argue with.</a:t>
+            </a:r>
+          </a:p>
+        </p:txBody>
+      </p:sp>
+      <p:sp>
+        <p:nvSpPr>
+          <p:cNvPr id="10" name="TextBox 9"/>
+          <p:cNvSpPr txBox="1"/>
+          <p:nvPr/>
+        </p:nvSpPr>
+        <p:spPr>
+          <a:xfrm>
+            <a:off x="822960" y="3666744"/>
+            <a:ext cx="548640" cy="804672"/>
+          </a:xfrm>
+          <a:prstGeom prst="rect">
+            <a:avLst/>
+          </a:prstGeom>
+          <a:noFill/>
+        </p:spPr>
+        <p:txBody>
+          <a:bodyPr wrap="square" anchor="t" lIns="0" rIns="0" tIns="0" bIns="0">
+            <a:spAutoFit/>
+          </a:bodyPr>
+          <a:lstStyle/>
+          <a:p>
+            <a:pPr algn="l">
+              <a:spcAft>
+                <a:spcPts val="1170"/>
+              </a:spcAft>
+            </a:pPr>
+            <a:r>
+              <a:rPr sz="2600" b="1" i="0">
+                <a:solidFill>
+                  <a:srgbClr val="F47B20"/>
+                </a:solidFill>
+                <a:latin typeface="Source Serif 4"/>
+              </a:rPr>
+              <a:t>3</a:t>
+            </a:r>
+          </a:p>
+        </p:txBody>
+      </p:sp>
+      <p:sp>
+        <p:nvSpPr>
+          <p:cNvPr id="11" name="TextBox 10"/>
+          <p:cNvSpPr txBox="1"/>
+          <p:nvPr/>
+        </p:nvSpPr>
+        <p:spPr>
+          <a:xfrm>
+            <a:off x="1463040" y="3703320"/>
+            <a:ext cx="9875520" cy="804672"/>
+          </a:xfrm>
+          <a:prstGeom prst="rect">
+            <a:avLst/>
+          </a:prstGeom>
+          <a:noFill/>
+        </p:spPr>
+        <p:txBody>
+          <a:bodyPr wrap="square" anchor="t" lIns="0" rIns="0" tIns="0" bIns="0">
+            <a:spAutoFit/>
+          </a:bodyPr>
+          <a:lstStyle/>
+          <a:p>
+            <a:pPr algn="l">
+              <a:spcAft>
+                <a:spcPts val="945"/>
+              </a:spcAft>
+            </a:pPr>
+            <a:r>
+              <a:rPr sz="2100" b="1" i="0">
+                <a:solidFill>
+                  <a:srgbClr val="1C1B19"/>
+                </a:solidFill>
+                <a:latin typeface="Source Serif 4"/>
+              </a:rPr>
+              <a:t>Repeat, same words.</a:t>
+            </a:r>
+          </a:p>
+          <a:p>
+            <a:pPr algn="l">
+              <a:spcAft>
+                <a:spcPts val="945"/>
+              </a:spcAft>
+            </a:pPr>
+            <a:r>
+              <a:rPr sz="1600" b="0" i="0">
+                <a:solidFill>
+                  <a:srgbClr val="5D5A54"/>
+                </a:solidFill>
+                <a:latin typeface="Source Serif 4"/>
+              </a:rPr>
+              <a:t>Calm and a little boring is hard to argue with.</a:t>
+            </a:r>
+          </a:p>
+        </p:txBody>
+      </p:sp>
+      <p:sp>
+        <p:nvSpPr>
+          <p:cNvPr id="12" name="TextBox 11"/>
+          <p:cNvSpPr txBox="1"/>
+          <p:nvPr/>
+        </p:nvSpPr>
+        <p:spPr>
+          <a:xfrm>
+            <a:off x="822960" y="4471416"/>
+            <a:ext cx="548640" cy="804672"/>
+          </a:xfrm>
+          <a:prstGeom prst="rect">
+            <a:avLst/>
+          </a:prstGeom>
+          <a:noFill/>
+        </p:spPr>
+        <p:txBody>
+          <a:bodyPr wrap="square" anchor="t" lIns="0" rIns="0" tIns="0" bIns="0">
+            <a:spAutoFit/>
+          </a:bodyPr>
+          <a:lstStyle/>
+          <a:p>
+            <a:pPr algn="l">
+              <a:spcAft>
+                <a:spcPts val="1170"/>
+              </a:spcAft>
+            </a:pPr>
+            <a:r>
+              <a:rPr sz="2600" b="1" i="0">
+                <a:solidFill>
+                  <a:srgbClr val="F47B20"/>
+                </a:solidFill>
+                <a:latin typeface="Source Serif 4"/>
+              </a:rPr>
+              <a:t>4</a:t>
+            </a:r>
+          </a:p>
+        </p:txBody>
+      </p:sp>
+      <p:sp>
+        <p:nvSpPr>
+          <p:cNvPr id="13" name="TextBox 12"/>
+          <p:cNvSpPr txBox="1"/>
+          <p:nvPr/>
+        </p:nvSpPr>
+        <p:spPr>
+          <a:xfrm>
+            <a:off x="1463040" y="4507992"/>
+            <a:ext cx="9875520" cy="804672"/>
+          </a:xfrm>
+          <a:prstGeom prst="rect">
+            <a:avLst/>
+          </a:prstGeom>
+          <a:noFill/>
+        </p:spPr>
+        <p:txBody>
+          <a:bodyPr wrap="square" anchor="t" lIns="0" rIns="0" tIns="0" bIns="0">
+            <a:spAutoFit/>
+          </a:bodyPr>
+          <a:lstStyle/>
+          <a:p>
+            <a:pPr algn="l">
+              <a:spcAft>
+                <a:spcPts val="945"/>
+              </a:spcAft>
+            </a:pPr>
+            <a:r>
+              <a:rPr sz="2100" b="1" i="0">
+                <a:solidFill>
+                  <a:srgbClr val="1C1B19"/>
+                </a:solidFill>
+                <a:latin typeface="Source Serif 4"/>
+              </a:rPr>
+              <a:t>Offer a swap.</a:t>
+            </a:r>
+          </a:p>
+          <a:p>
+            <a:pPr algn="l">
+              <a:spcAft>
+                <a:spcPts val="945"/>
+              </a:spcAft>
+            </a:pPr>
+            <a:r>
+              <a:rPr sz="1600" b="0" i="0">
+                <a:solidFill>
+                  <a:srgbClr val="5D5A54"/>
+                </a:solidFill>
+                <a:latin typeface="Source Serif 4"/>
+              </a:rPr>
+              <a:t>"I'll pass, but I'm down for food after."</a:t>
+            </a:r>
+          </a:p>
+        </p:txBody>
+      </p:sp>
+      <p:sp>
+        <p:nvSpPr>
+          <p:cNvPr id="14" name="TextBox 13"/>
+          <p:cNvSpPr txBox="1"/>
+          <p:nvPr/>
+        </p:nvSpPr>
+        <p:spPr>
+          <a:xfrm>
+            <a:off x="822960" y="5276088"/>
+            <a:ext cx="548640" cy="804672"/>
+          </a:xfrm>
+          <a:prstGeom prst="rect">
+            <a:avLst/>
+          </a:prstGeom>
+          <a:noFill/>
+        </p:spPr>
+        <p:txBody>
+          <a:bodyPr wrap="square" anchor="t" lIns="0" rIns="0" tIns="0" bIns="0">
+            <a:spAutoFit/>
+          </a:bodyPr>
+          <a:lstStyle/>
+          <a:p>
+            <a:pPr algn="l">
+              <a:spcAft>
+                <a:spcPts val="1170"/>
+              </a:spcAft>
+            </a:pPr>
+            <a:r>
+              <a:rPr sz="2600" b="1" i="0">
+                <a:solidFill>
+                  <a:srgbClr val="F47B20"/>
+                </a:solidFill>
+                <a:latin typeface="Source Serif 4"/>
+              </a:rPr>
+              <a:t>5</a:t>
+            </a:r>
+          </a:p>
+        </p:txBody>
+      </p:sp>
+      <p:sp>
+        <p:nvSpPr>
+          <p:cNvPr id="15" name="TextBox 14"/>
+          <p:cNvSpPr txBox="1"/>
+          <p:nvPr/>
+        </p:nvSpPr>
+        <p:spPr>
+          <a:xfrm>
+            <a:off x="1463040" y="5312664"/>
+            <a:ext cx="9875520" cy="804672"/>
+          </a:xfrm>
+          <a:prstGeom prst="rect">
+            <a:avLst/>
+          </a:prstGeom>
+          <a:noFill/>
+        </p:spPr>
+        <p:txBody>
+          <a:bodyPr wrap="square" anchor="t" lIns="0" rIns="0" tIns="0" bIns="0">
+            <a:spAutoFit/>
+          </a:bodyPr>
+          <a:lstStyle/>
+          <a:p>
+            <a:pPr algn="l">
+              <a:spcAft>
+                <a:spcPts val="945"/>
+              </a:spcAft>
+            </a:pPr>
+            <a:r>
+              <a:rPr sz="2100" b="1" i="0">
+                <a:solidFill>
+                  <a:srgbClr val="1C1B19"/>
+                </a:solidFill>
+                <a:latin typeface="Source Serif 4"/>
+              </a:rPr>
+              <a:t>Bring a second.</a:t>
+            </a:r>
+          </a:p>
+          <a:p>
+            <a:pPr algn="l">
+              <a:spcAft>
+                <a:spcPts val="945"/>
+              </a:spcAft>
+            </a:pPr>
+            <a:r>
+              <a:rPr sz="1600" b="0" i="0">
+                <a:solidFill>
+                  <a:srgbClr val="5D5A54"/>
+                </a:solidFill>
+                <a:latin typeface="Source Serif 4"/>
+              </a:rPr>
+              <a:t>Agree with one friend before you go.</a:t>
             </a:r>
           </a:p>
         </p:txBody>
@@ -9120,7 +9583,7 @@
                 </a:solidFill>
                 <a:latin typeface="Inter Tight"/>
               </a:rPr>
-              <a:t>THE ANSWER</a:t>
+              <a:t>SAY IT OUT LOUD</a:t>
             </a:r>
           </a:p>
         </p:txBody>
@@ -9172,47 +9635,8 @@
         </p:nvSpPr>
         <p:spPr>
           <a:xfrm>
-            <a:off x="822960" y="1463040"/>
-            <a:ext cx="10515600" cy="3291840"/>
-          </a:xfrm>
-          <a:prstGeom prst="rect">
-            <a:avLst/>
-          </a:prstGeom>
-          <a:noFill/>
-        </p:spPr>
-        <p:txBody>
-          <a:bodyPr wrap="square" anchor="ctr" lIns="0" rIns="0" tIns="0" bIns="0">
-            <a:spAutoFit/>
-          </a:bodyPr>
-          <a:lstStyle/>
-          <a:p>
-            <a:pPr algn="l">
-              <a:spcAft>
-                <a:spcPts val="2070"/>
-              </a:spcAft>
-            </a:pPr>
-            <a:r>
-              <a:rPr sz="4600" b="1" i="0">
-                <a:solidFill>
-                  <a:srgbClr val="1C1B19"/>
-                </a:solidFill>
-                <a:latin typeface="Source Serif 4"/>
-              </a:rPr>
-              <a:t>About 7 in 10 did none of it.</a:t>
-            </a:r>
-          </a:p>
-        </p:txBody>
-      </p:sp>
-      <p:sp>
-        <p:nvSpPr>
-          <p:cNvPr id="6" name="TextBox 5"/>
-          <p:cNvSpPr txBox="1"/>
-          <p:nvPr/>
-        </p:nvSpPr>
-        <p:spPr>
-          <a:xfrm>
-            <a:off x="822960" y="4846320"/>
-            <a:ext cx="10515600" cy="1097280"/>
+            <a:off x="822960" y="1005840"/>
+            <a:ext cx="10515600" cy="914400"/>
           </a:xfrm>
           <a:prstGeom prst="rect">
             <a:avLst/>
@@ -9227,17 +9651,361 @@
           <a:p>
             <a:pPr algn="l">
               <a:spcAft>
-                <a:spcPts val="990"/>
-              </a:spcAft>
-            </a:pPr>
-            <a:r>
-              <a:rPr sz="2200" b="0" i="1">
-                <a:solidFill>
-                  <a:srgbClr val="5D5A54"/>
-                </a:solidFill>
-                <a:latin typeface="Source Serif 4"/>
-              </a:rPr>
-              <a:t>Posts show who went out. They don't show who stayed home.</a:t>
+                <a:spcPts val="1530"/>
+              </a:spcAft>
+            </a:pPr>
+            <a:r>
+              <a:rPr sz="3400" b="1" i="0">
+                <a:solidFill>
+                  <a:srgbClr val="1C1B19"/>
+                </a:solidFill>
+                <a:latin typeface="Source Serif 4"/>
+              </a:rPr>
+              <a:t>"Nah, I'm good" is a full answer.</a:t>
+            </a:r>
+          </a:p>
+        </p:txBody>
+      </p:sp>
+      <p:sp>
+        <p:nvSpPr>
+          <p:cNvPr id="6" name="Rectangle 5"/>
+          <p:cNvSpPr/>
+          <p:nvPr/>
+        </p:nvSpPr>
+        <p:spPr>
+          <a:xfrm>
+            <a:off x="822960" y="2103120"/>
+            <a:ext cx="5120640" cy="3931920"/>
+          </a:xfrm>
+          <a:prstGeom prst="rect">
+            <a:avLst/>
+          </a:prstGeom>
+          <a:solidFill>
+            <a:srgbClr val="FFFFFF"/>
+          </a:solidFill>
+          <a:ln w="15875">
+            <a:solidFill>
+              <a:srgbClr val="D8D2C6"/>
+            </a:solidFill>
+          </a:ln>
+          <a:effectLst/>
+        </p:spPr>
+        <p:style>
+          <a:lnRef idx="1">
+            <a:schemeClr val="accent1"/>
+          </a:lnRef>
+          <a:fillRef idx="3">
+            <a:schemeClr val="accent1"/>
+          </a:fillRef>
+          <a:effectRef idx="2">
+            <a:schemeClr val="accent1"/>
+          </a:effectRef>
+          <a:fontRef idx="minor">
+            <a:schemeClr val="lt1"/>
+          </a:fontRef>
+        </p:style>
+        <p:txBody>
+          <a:bodyPr rtlCol="0" anchor="ctr"/>
+          <a:lstStyle/>
+          <a:p>
+            <a:pPr algn="ctr"/>
+          </a:p>
+        </p:txBody>
+      </p:sp>
+      <p:sp>
+        <p:nvSpPr>
+          <p:cNvPr id="7" name="TextBox 6"/>
+          <p:cNvSpPr txBox="1"/>
+          <p:nvPr/>
+        </p:nvSpPr>
+        <p:spPr>
+          <a:xfrm>
+            <a:off x="1097280" y="2286000"/>
+            <a:ext cx="4572000" cy="457200"/>
+          </a:xfrm>
+          <a:prstGeom prst="rect">
+            <a:avLst/>
+          </a:prstGeom>
+          <a:noFill/>
+        </p:spPr>
+        <p:txBody>
+          <a:bodyPr wrap="square" anchor="t" lIns="0" rIns="0" tIns="0" bIns="0">
+            <a:spAutoFit/>
+          </a:bodyPr>
+          <a:lstStyle/>
+          <a:p>
+            <a:pPr algn="l">
+              <a:spcAft>
+                <a:spcPts val="585"/>
+              </a:spcAft>
+            </a:pPr>
+            <a:r>
+              <a:rPr sz="1300" b="1" i="0">
+                <a:solidFill>
+                  <a:srgbClr val="0B2D5B"/>
+                </a:solidFill>
+                <a:latin typeface="Inter Tight"/>
+              </a:rPr>
+              <a:t>SIMPLE</a:t>
+            </a:r>
+          </a:p>
+        </p:txBody>
+      </p:sp>
+      <p:sp>
+        <p:nvSpPr>
+          <p:cNvPr id="8" name="TextBox 7"/>
+          <p:cNvSpPr txBox="1"/>
+          <p:nvPr/>
+        </p:nvSpPr>
+        <p:spPr>
+          <a:xfrm>
+            <a:off x="1097280" y="2788920"/>
+            <a:ext cx="4572000" cy="3108960"/>
+          </a:xfrm>
+          <a:prstGeom prst="rect">
+            <a:avLst/>
+          </a:prstGeom>
+          <a:noFill/>
+        </p:spPr>
+        <p:txBody>
+          <a:bodyPr wrap="square" anchor="t" lIns="0" rIns="0" tIns="0" bIns="0">
+            <a:spAutoFit/>
+          </a:bodyPr>
+          <a:lstStyle/>
+          <a:p>
+            <a:pPr algn="l">
+              <a:spcAft>
+                <a:spcPts val="855"/>
+              </a:spcAft>
+            </a:pPr>
+            <a:r>
+              <a:rPr sz="1900" b="0" i="0">
+                <a:solidFill>
+                  <a:srgbClr val="1C1B19"/>
+                </a:solidFill>
+                <a:latin typeface="Source Serif 4"/>
+              </a:rPr>
+              <a:t>"Nah, I'm good."</a:t>
+            </a:r>
+          </a:p>
+          <a:p>
+            <a:pPr algn="l">
+              <a:spcAft>
+                <a:spcPts val="855"/>
+              </a:spcAft>
+            </a:pPr>
+            <a:r>
+              <a:rPr sz="1900" b="0" i="0">
+                <a:solidFill>
+                  <a:srgbClr val="1C1B19"/>
+                </a:solidFill>
+                <a:latin typeface="Source Serif 4"/>
+              </a:rPr>
+              <a:t>"Not tonight."</a:t>
+            </a:r>
+          </a:p>
+          <a:p>
+            <a:pPr algn="l">
+              <a:spcAft>
+                <a:spcPts val="855"/>
+              </a:spcAft>
+            </a:pPr>
+            <a:r>
+              <a:rPr sz="1900" b="0" i="0">
+                <a:solidFill>
+                  <a:srgbClr val="1C1B19"/>
+                </a:solidFill>
+                <a:latin typeface="Source Serif 4"/>
+              </a:rPr>
+              <a:t>"I'll pass."</a:t>
+            </a:r>
+          </a:p>
+          <a:p>
+            <a:pPr algn="l">
+              <a:spcAft>
+                <a:spcPts val="855"/>
+              </a:spcAft>
+            </a:pPr>
+            <a:r>
+              <a:rPr sz="1900" b="0" i="0">
+                <a:solidFill>
+                  <a:srgbClr val="1C1B19"/>
+                </a:solidFill>
+                <a:latin typeface="Source Serif 4"/>
+              </a:rPr>
+              <a:t>"Same, I'm good."</a:t>
+            </a:r>
+          </a:p>
+        </p:txBody>
+      </p:sp>
+      <p:sp>
+        <p:nvSpPr>
+          <p:cNvPr id="9" name="Rectangle 8"/>
+          <p:cNvSpPr/>
+          <p:nvPr/>
+        </p:nvSpPr>
+        <p:spPr>
+          <a:xfrm>
+            <a:off x="6309360" y="2103120"/>
+            <a:ext cx="5120640" cy="3931920"/>
+          </a:xfrm>
+          <a:prstGeom prst="rect">
+            <a:avLst/>
+          </a:prstGeom>
+          <a:solidFill>
+            <a:srgbClr val="FFFFFF"/>
+          </a:solidFill>
+          <a:ln w="15875">
+            <a:solidFill>
+              <a:srgbClr val="D8D2C6"/>
+            </a:solidFill>
+          </a:ln>
+          <a:effectLst/>
+        </p:spPr>
+        <p:style>
+          <a:lnRef idx="1">
+            <a:schemeClr val="accent1"/>
+          </a:lnRef>
+          <a:fillRef idx="3">
+            <a:schemeClr val="accent1"/>
+          </a:fillRef>
+          <a:effectRef idx="2">
+            <a:schemeClr val="accent1"/>
+          </a:effectRef>
+          <a:fontRef idx="minor">
+            <a:schemeClr val="lt1"/>
+          </a:fontRef>
+        </p:style>
+        <p:txBody>
+          <a:bodyPr rtlCol="0" anchor="ctr"/>
+          <a:lstStyle/>
+          <a:p>
+            <a:pPr algn="ctr"/>
+          </a:p>
+        </p:txBody>
+      </p:sp>
+      <p:sp>
+        <p:nvSpPr>
+          <p:cNvPr id="10" name="TextBox 9"/>
+          <p:cNvSpPr txBox="1"/>
+          <p:nvPr/>
+        </p:nvSpPr>
+        <p:spPr>
+          <a:xfrm>
+            <a:off x="6583680" y="2286000"/>
+            <a:ext cx="4572000" cy="457200"/>
+          </a:xfrm>
+          <a:prstGeom prst="rect">
+            <a:avLst/>
+          </a:prstGeom>
+          <a:noFill/>
+        </p:spPr>
+        <p:txBody>
+          <a:bodyPr wrap="square" anchor="t" lIns="0" rIns="0" tIns="0" bIns="0">
+            <a:spAutoFit/>
+          </a:bodyPr>
+          <a:lstStyle/>
+          <a:p>
+            <a:pPr algn="l">
+              <a:spcAft>
+                <a:spcPts val="585"/>
+              </a:spcAft>
+            </a:pPr>
+            <a:r>
+              <a:rPr sz="1300" b="1" i="0">
+                <a:solidFill>
+                  <a:srgbClr val="0B2D5B"/>
+                </a:solidFill>
+                <a:latin typeface="Inter Tight"/>
+              </a:rPr>
+              <a:t>WITH A REASON</a:t>
+            </a:r>
+          </a:p>
+        </p:txBody>
+      </p:sp>
+      <p:sp>
+        <p:nvSpPr>
+          <p:cNvPr id="11" name="TextBox 10"/>
+          <p:cNvSpPr txBox="1"/>
+          <p:nvPr/>
+        </p:nvSpPr>
+        <p:spPr>
+          <a:xfrm>
+            <a:off x="6583680" y="2788920"/>
+            <a:ext cx="4572000" cy="3108960"/>
+          </a:xfrm>
+          <a:prstGeom prst="rect">
+            <a:avLst/>
+          </a:prstGeom>
+          <a:noFill/>
+        </p:spPr>
+        <p:txBody>
+          <a:bodyPr wrap="square" anchor="t" lIns="0" rIns="0" tIns="0" bIns="0">
+            <a:spAutoFit/>
+          </a:bodyPr>
+          <a:lstStyle/>
+          <a:p>
+            <a:pPr algn="l">
+              <a:spcAft>
+                <a:spcPts val="855"/>
+              </a:spcAft>
+            </a:pPr>
+            <a:r>
+              <a:rPr sz="1900" b="0" i="0">
+                <a:solidFill>
+                  <a:srgbClr val="1C1B19"/>
+                </a:solidFill>
+                <a:latin typeface="Source Serif 4"/>
+              </a:rPr>
+              <a:t>"I have a game in the morning."</a:t>
+            </a:r>
+          </a:p>
+          <a:p>
+            <a:pPr algn="l">
+              <a:spcAft>
+                <a:spcPts val="855"/>
+              </a:spcAft>
+            </a:pPr>
+            <a:r>
+              <a:rPr sz="1900" b="0" i="0">
+                <a:solidFill>
+                  <a:srgbClr val="1C1B19"/>
+                </a:solidFill>
+                <a:latin typeface="Source Serif 4"/>
+              </a:rPr>
+              <a:t>"I open at work tomorrow."</a:t>
+            </a:r>
+          </a:p>
+          <a:p>
+            <a:pPr algn="l">
+              <a:spcAft>
+                <a:spcPts val="855"/>
+              </a:spcAft>
+            </a:pPr>
+            <a:r>
+              <a:rPr sz="1900" b="0" i="0">
+                <a:solidFill>
+                  <a:srgbClr val="1C1B19"/>
+                </a:solidFill>
+                <a:latin typeface="Source Serif 4"/>
+              </a:rPr>
+              <a:t>"My parents would never be okay with that."</a:t>
+            </a:r>
+          </a:p>
+          <a:p>
+            <a:pPr algn="l">
+              <a:spcAft>
+                <a:spcPts val="855"/>
+              </a:spcAft>
+            </a:pPr>
+            <a:r>
+              <a:rPr sz="1900" b="0" i="0">
+                <a:solidFill>
+                  <a:srgbClr val="1C1B19"/>
+                </a:solidFill>
+                <a:latin typeface="Source Serif 4"/>
+              </a:rPr>
+              <a:t>"That's not for me."</a:t>
             </a:r>
           </a:p>
         </p:txBody>
@@ -9346,7 +10114,7 @@
                 </a:solidFill>
                 <a:latin typeface="Inter Tight"/>
               </a:rPr>
-              <a:t>GAS AND BRAKES</a:t>
+              <a:t>THREE MOMENTS</a:t>
             </a:r>
           </a:p>
         </p:txBody>
@@ -9424,7 +10192,7 @@
                 </a:solidFill>
                 <a:latin typeface="Source Serif 4"/>
               </a:rPr>
-              <a:t>Friends turn up the gas. They don't cut the brakes.</a:t>
+              <a:t>What would you say or do?</a:t>
             </a:r>
           </a:p>
         </p:txBody>
@@ -9438,7 +10206,7 @@
         <p:spPr>
           <a:xfrm>
             <a:off x="822960" y="2103120"/>
-            <a:ext cx="5120640" cy="3931920"/>
+            <a:ext cx="3322320" cy="3840480"/>
           </a:xfrm>
           <a:prstGeom prst="rect">
             <a:avLst/>
@@ -9483,8 +10251,8 @@
         </p:nvSpPr>
         <p:spPr>
           <a:xfrm>
-            <a:off x="1097280" y="2286000"/>
-            <a:ext cx="4572000" cy="457200"/>
+            <a:off x="1051560" y="2286000"/>
+            <a:ext cx="2865120" cy="365760"/>
           </a:xfrm>
           <a:prstGeom prst="rect">
             <a:avLst/>
@@ -9509,7 +10277,7 @@
                 </a:solidFill>
                 <a:latin typeface="Inter Tight"/>
               </a:rPr>
-              <a:t>WITH FRIENDS WATCHING</a:t>
+              <a:t>AYESHA</a:t>
             </a:r>
           </a:p>
         </p:txBody>
@@ -9522,8 +10290,8 @@
         </p:nvSpPr>
         <p:spPr>
           <a:xfrm>
-            <a:off x="1097280" y="2788920"/>
-            <a:ext cx="4572000" cy="3108960"/>
+            <a:off x="1051560" y="2743200"/>
+            <a:ext cx="2865120" cy="3017520"/>
           </a:xfrm>
           <a:prstGeom prst="rect">
             <a:avLst/>
@@ -9538,65 +10306,17 @@
           <a:p>
             <a:pPr algn="l">
               <a:spcAft>
-                <a:spcPts val="855"/>
-              </a:spcAft>
-            </a:pPr>
-            <a:r>
-              <a:rPr sz="1900" b="0" i="0">
+                <a:spcPts val="810"/>
+              </a:spcAft>
+            </a:pPr>
+            <a:r>
+              <a:rPr sz="1800" b="0" i="0">
                 <a:solidFill>
                   <a:srgbClr val="1C1B19"/>
                 </a:solidFill>
                 <a:latin typeface="Source Serif 4"/>
               </a:rPr>
-              <a:t>The reward signal fires harder</a:t>
-            </a:r>
-          </a:p>
-          <a:p>
-            <a:pPr algn="l">
-              <a:spcAft>
-                <a:spcPts val="855"/>
-              </a:spcAft>
-            </a:pPr>
-            <a:r>
-              <a:rPr sz="1900" b="0" i="0">
-                <a:solidFill>
-                  <a:srgbClr val="1C1B19"/>
-                </a:solidFill>
-                <a:latin typeface="Source Serif 4"/>
-              </a:rPr>
-              <a:t>The payoff looks bigger</a:t>
-            </a:r>
-          </a:p>
-          <a:p>
-            <a:pPr algn="l">
-              <a:spcAft>
-                <a:spcPts val="855"/>
-              </a:spcAft>
-            </a:pPr>
-            <a:r>
-              <a:rPr sz="1900" b="0" i="0">
-                <a:solidFill>
-                  <a:srgbClr val="1C1B19"/>
-                </a:solidFill>
-                <a:latin typeface="Source Serif 4"/>
-              </a:rPr>
-              <a:t>Teens took more chances</a:t>
-            </a:r>
-          </a:p>
-          <a:p>
-            <a:pPr algn="l">
-              <a:spcAft>
-                <a:spcPts val="855"/>
-              </a:spcAft>
-            </a:pPr>
-            <a:r>
-              <a:rPr sz="1900" b="0" i="0">
-                <a:solidFill>
-                  <a:srgbClr val="1C1B19"/>
-                </a:solidFill>
-                <a:latin typeface="Source Serif 4"/>
-              </a:rPr>
-              <a:t>Adults didn't change</a:t>
+              <a:t>A junior on your team got her license two months ago. She offers to drive you and three friends into Boston for a concert.</a:t>
             </a:r>
           </a:p>
         </p:txBody>
@@ -9609,8 +10329,8 @@
         </p:nvSpPr>
         <p:spPr>
           <a:xfrm>
-            <a:off x="6309360" y="2103120"/>
-            <a:ext cx="5120640" cy="3931920"/>
+            <a:off x="4419600" y="2103120"/>
+            <a:ext cx="3322320" cy="3840480"/>
           </a:xfrm>
           <a:prstGeom prst="rect">
             <a:avLst/>
@@ -9655,8 +10375,8 @@
         </p:nvSpPr>
         <p:spPr>
           <a:xfrm>
-            <a:off x="6583680" y="2286000"/>
-            <a:ext cx="4572000" cy="457200"/>
+            <a:off x="4648200" y="2286000"/>
+            <a:ext cx="2865120" cy="365760"/>
           </a:xfrm>
           <a:prstGeom prst="rect">
             <a:avLst/>
@@ -9681,7 +10401,7 @@
                 </a:solidFill>
                 <a:latin typeface="Inter Tight"/>
               </a:rPr>
-              <a:t>WHAT STAYS THE SAME</a:t>
+              <a:t>FIRST PARTY</a:t>
             </a:r>
           </a:p>
         </p:txBody>
@@ -9694,8 +10414,8 @@
         </p:nvSpPr>
         <p:spPr>
           <a:xfrm>
-            <a:off x="6583680" y="2788920"/>
-            <a:ext cx="4572000" cy="3108960"/>
+            <a:off x="4648200" y="2743200"/>
+            <a:ext cx="2865120" cy="3017520"/>
           </a:xfrm>
           <a:prstGeom prst="rect">
             <a:avLst/>
@@ -9710,65 +10430,141 @@
           <a:p>
             <a:pPr algn="l">
               <a:spcAft>
-                <a:spcPts val="855"/>
-              </a:spcAft>
-            </a:pPr>
-            <a:r>
-              <a:rPr sz="1900" b="0" i="0">
+                <a:spcPts val="810"/>
+              </a:spcAft>
+            </a:pPr>
+            <a:r>
+              <a:rPr sz="1800" b="0" i="0">
                 <a:solidFill>
                   <a:srgbClr val="1C1B19"/>
                 </a:solidFill>
                 <a:latin typeface="Source Serif 4"/>
               </a:rPr>
-              <a:t>Your brakes still work</a:t>
-            </a:r>
-          </a:p>
-          <a:p>
-            <a:pPr algn="l">
-              <a:spcAft>
-                <a:spcPts val="855"/>
-              </a:spcAft>
-            </a:pPr>
-            <a:r>
-              <a:rPr sz="1900" b="0" i="0">
+              <a:t>Your new friend group's first party of the year. The host keeps topping off your cup. You've decided you're done.</a:t>
+            </a:r>
+          </a:p>
+        </p:txBody>
+      </p:sp>
+      <p:sp>
+        <p:nvSpPr>
+          <p:cNvPr id="12" name="Rectangle 11"/>
+          <p:cNvSpPr/>
+          <p:nvPr/>
+        </p:nvSpPr>
+        <p:spPr>
+          <a:xfrm>
+            <a:off x="8016239" y="2103120"/>
+            <a:ext cx="3322320" cy="3840480"/>
+          </a:xfrm>
+          <a:prstGeom prst="rect">
+            <a:avLst/>
+          </a:prstGeom>
+          <a:solidFill>
+            <a:srgbClr val="FFFFFF"/>
+          </a:solidFill>
+          <a:ln w="15875">
+            <a:solidFill>
+              <a:srgbClr val="D8D2C6"/>
+            </a:solidFill>
+          </a:ln>
+          <a:effectLst/>
+        </p:spPr>
+        <p:style>
+          <a:lnRef idx="1">
+            <a:schemeClr val="accent1"/>
+          </a:lnRef>
+          <a:fillRef idx="3">
+            <a:schemeClr val="accent1"/>
+          </a:fillRef>
+          <a:effectRef idx="2">
+            <a:schemeClr val="accent1"/>
+          </a:effectRef>
+          <a:fontRef idx="minor">
+            <a:schemeClr val="lt1"/>
+          </a:fontRef>
+        </p:style>
+        <p:txBody>
+          <a:bodyPr rtlCol="0" anchor="ctr"/>
+          <a:lstStyle/>
+          <a:p>
+            <a:pPr algn="ctr"/>
+          </a:p>
+        </p:txBody>
+      </p:sp>
+      <p:sp>
+        <p:nvSpPr>
+          <p:cNvPr id="13" name="TextBox 12"/>
+          <p:cNvSpPr txBox="1"/>
+          <p:nvPr/>
+        </p:nvSpPr>
+        <p:spPr>
+          <a:xfrm>
+            <a:off x="8244839" y="2286000"/>
+            <a:ext cx="2865120" cy="365760"/>
+          </a:xfrm>
+          <a:prstGeom prst="rect">
+            <a:avLst/>
+          </a:prstGeom>
+          <a:noFill/>
+        </p:spPr>
+        <p:txBody>
+          <a:bodyPr wrap="square" anchor="t" lIns="0" rIns="0" tIns="0" bIns="0">
+            <a:spAutoFit/>
+          </a:bodyPr>
+          <a:lstStyle/>
+          <a:p>
+            <a:pPr algn="l">
+              <a:spcAft>
+                <a:spcPts val="585"/>
+              </a:spcAft>
+            </a:pPr>
+            <a:r>
+              <a:rPr sz="1300" b="1" i="0">
+                <a:solidFill>
+                  <a:srgbClr val="0B2D5B"/>
+                </a:solidFill>
+                <a:latin typeface="Inter Tight"/>
+              </a:rPr>
+              <a:t>DEV</a:t>
+            </a:r>
+          </a:p>
+        </p:txBody>
+      </p:sp>
+      <p:sp>
+        <p:nvSpPr>
+          <p:cNvPr id="14" name="TextBox 13"/>
+          <p:cNvSpPr txBox="1"/>
+          <p:nvPr/>
+        </p:nvSpPr>
+        <p:spPr>
+          <a:xfrm>
+            <a:off x="8244839" y="2743200"/>
+            <a:ext cx="2865120" cy="3017520"/>
+          </a:xfrm>
+          <a:prstGeom prst="rect">
+            <a:avLst/>
+          </a:prstGeom>
+          <a:noFill/>
+        </p:spPr>
+        <p:txBody>
+          <a:bodyPr wrap="square" anchor="t" lIns="0" rIns="0" tIns="0" bIns="0">
+            <a:spAutoFit/>
+          </a:bodyPr>
+          <a:lstStyle/>
+          <a:p>
+            <a:pPr algn="l">
+              <a:spcAft>
+                <a:spcPts val="810"/>
+              </a:spcAft>
+            </a:pPr>
+            <a:r>
+              <a:rPr sz="1800" b="0" i="0">
                 <a:solidFill>
                   <a:srgbClr val="1C1B19"/>
                 </a:solidFill>
                 <a:latin typeface="Source Serif 4"/>
               </a:rPr>
-              <a:t>Your plans and rules are still there</a:t>
-            </a:r>
-          </a:p>
-          <a:p>
-            <a:pPr algn="l">
-              <a:spcAft>
-                <a:spcPts val="855"/>
-              </a:spcAft>
-            </a:pPr>
-            <a:r>
-              <a:rPr sz="1900" b="0" i="0">
-                <a:solidFill>
-                  <a:srgbClr val="1C1B19"/>
-                </a:solidFill>
-                <a:latin typeface="Source Serif 4"/>
-              </a:rPr>
-              <a:t>They get outvoted in the moment</a:t>
-            </a:r>
-          </a:p>
-          <a:p>
-            <a:pPr algn="l">
-              <a:spcAft>
-                <a:spcPts val="855"/>
-              </a:spcAft>
-            </a:pPr>
-            <a:r>
-              <a:rPr sz="1900" b="0" i="0">
-                <a:solidFill>
-                  <a:srgbClr val="1C1B19"/>
-                </a:solidFill>
-                <a:latin typeface="Source Serif 4"/>
-              </a:rPr>
-              <a:t>An earlier decision holds better</a:t>
+              <a:t>A friend from your new advisory texts: "can you send your English essay? just want to see how you set it up."</a:t>
             </a:r>
           </a:p>
         </p:txBody>
@@ -9877,7 +10673,7 @@
                 </a:solidFill>
                 <a:latin typeface="Inter Tight"/>
               </a:rPr>
-              <a:t>THE CORE SKILL</a:t>
+              <a:t>A WAY OUT</a:t>
             </a:r>
           </a:p>
         </p:txBody>
@@ -9923,14 +10719,97 @@
       </p:sp>
       <p:sp>
         <p:nvSpPr>
-          <p:cNvPr id="5" name="TextBox 4"/>
+          <p:cNvPr id="5" name="Rectangle 4"/>
+          <p:cNvSpPr/>
+          <p:nvPr/>
+        </p:nvSpPr>
+        <p:spPr>
+          <a:xfrm>
+            <a:off x="822960" y="1371600"/>
+            <a:ext cx="73152" cy="3566160"/>
+          </a:xfrm>
+          <a:prstGeom prst="rect">
+            <a:avLst/>
+          </a:prstGeom>
+          <a:solidFill>
+            <a:srgbClr val="F47B20"/>
+          </a:solidFill>
+          <a:ln>
+            <a:noFill/>
+          </a:ln>
+          <a:effectLst/>
+        </p:spPr>
+        <p:style>
+          <a:lnRef idx="1">
+            <a:schemeClr val="accent1"/>
+          </a:lnRef>
+          <a:fillRef idx="3">
+            <a:schemeClr val="accent1"/>
+          </a:fillRef>
+          <a:effectRef idx="2">
+            <a:schemeClr val="accent1"/>
+          </a:effectRef>
+          <a:fontRef idx="minor">
+            <a:schemeClr val="lt1"/>
+          </a:fontRef>
+        </p:style>
+        <p:txBody>
+          <a:bodyPr rtlCol="0" anchor="ctr"/>
+          <a:lstStyle/>
+          <a:p>
+            <a:pPr algn="ctr"/>
+          </a:p>
+        </p:txBody>
+      </p:sp>
+      <p:sp>
+        <p:nvSpPr>
+          <p:cNvPr id="6" name="TextBox 5"/>
           <p:cNvSpPr txBox="1"/>
           <p:nvPr/>
         </p:nvSpPr>
         <p:spPr>
           <a:xfrm>
-            <a:off x="822960" y="1005840"/>
-            <a:ext cx="10515600" cy="1097280"/>
+            <a:off x="1188720" y="1371600"/>
+            <a:ext cx="10058400" cy="3566160"/>
+          </a:xfrm>
+          <a:prstGeom prst="rect">
+            <a:avLst/>
+          </a:prstGeom>
+          <a:noFill/>
+        </p:spPr>
+        <p:txBody>
+          <a:bodyPr wrap="square" anchor="ctr" lIns="0" rIns="0" tIns="0" bIns="0">
+            <a:spAutoFit/>
+          </a:bodyPr>
+          <a:lstStyle/>
+          <a:p>
+            <a:pPr algn="l">
+              <a:spcAft>
+                <a:spcPts val="1800"/>
+              </a:spcAft>
+            </a:pPr>
+            <a:r>
+              <a:rPr sz="4000" b="0" i="1">
+                <a:solidFill>
+                  <a:srgbClr val="1C1B19"/>
+                </a:solidFill>
+                <a:latin typeface="Source Serif 4"/>
+              </a:rPr>
+              <a:t>Who would you set up a code word with?</a:t>
+            </a:r>
+          </a:p>
+        </p:txBody>
+      </p:sp>
+      <p:sp>
+        <p:nvSpPr>
+          <p:cNvPr id="7" name="TextBox 6"/>
+          <p:cNvSpPr txBox="1"/>
+          <p:nvPr/>
+        </p:nvSpPr>
+        <p:spPr>
+          <a:xfrm>
+            <a:off x="1188720" y="5120640"/>
+            <a:ext cx="10058400" cy="914400"/>
           </a:xfrm>
           <a:prstGeom prst="rect">
             <a:avLst/>
@@ -9945,487 +10824,17 @@
           <a:p>
             <a:pPr algn="l">
               <a:spcAft>
-                <a:spcPts val="1620"/>
-              </a:spcAft>
-            </a:pPr>
-            <a:r>
-              <a:rPr sz="3600" b="1" i="0">
-                <a:solidFill>
-                  <a:srgbClr val="1C1B19"/>
-                </a:solidFill>
-                <a:latin typeface="Source Serif 4"/>
-              </a:rPr>
-              <a:t>Make the call before the moment.</a:t>
-            </a:r>
-          </a:p>
-        </p:txBody>
-      </p:sp>
-      <p:sp>
-        <p:nvSpPr>
-          <p:cNvPr id="6" name="TextBox 5"/>
-          <p:cNvSpPr txBox="1"/>
-          <p:nvPr/>
-        </p:nvSpPr>
-        <p:spPr>
-          <a:xfrm>
-            <a:off x="822960" y="2057400"/>
-            <a:ext cx="548640" cy="804672"/>
-          </a:xfrm>
-          <a:prstGeom prst="rect">
-            <a:avLst/>
-          </a:prstGeom>
-          <a:noFill/>
-        </p:spPr>
-        <p:txBody>
-          <a:bodyPr wrap="square" anchor="t" lIns="0" rIns="0" tIns="0" bIns="0">
-            <a:spAutoFit/>
-          </a:bodyPr>
-          <a:lstStyle/>
-          <a:p>
-            <a:pPr algn="l">
-              <a:spcAft>
-                <a:spcPts val="1170"/>
-              </a:spcAft>
-            </a:pPr>
-            <a:r>
-              <a:rPr sz="2600" b="1" i="0">
-                <a:solidFill>
-                  <a:srgbClr val="F47B20"/>
-                </a:solidFill>
-                <a:latin typeface="Source Serif 4"/>
-              </a:rPr>
-              <a:t>1</a:t>
-            </a:r>
-          </a:p>
-        </p:txBody>
-      </p:sp>
-      <p:sp>
-        <p:nvSpPr>
-          <p:cNvPr id="7" name="TextBox 6"/>
-          <p:cNvSpPr txBox="1"/>
-          <p:nvPr/>
-        </p:nvSpPr>
-        <p:spPr>
-          <a:xfrm>
-            <a:off x="1463040" y="2093976"/>
-            <a:ext cx="9875520" cy="804672"/>
-          </a:xfrm>
-          <a:prstGeom prst="rect">
-            <a:avLst/>
-          </a:prstGeom>
-          <a:noFill/>
-        </p:spPr>
-        <p:txBody>
-          <a:bodyPr wrap="square" anchor="t" lIns="0" rIns="0" tIns="0" bIns="0">
-            <a:spAutoFit/>
-          </a:bodyPr>
-          <a:lstStyle/>
-          <a:p>
-            <a:pPr algn="l">
-              <a:spcAft>
-                <a:spcPts val="945"/>
-              </a:spcAft>
-            </a:pPr>
-            <a:r>
-              <a:rPr sz="2100" b="1" i="0">
-                <a:solidFill>
-                  <a:srgbClr val="1C1B19"/>
-                </a:solidFill>
-                <a:latin typeface="Source Serif 4"/>
-              </a:rPr>
-              <a:t>Know your lines now.</a:t>
-            </a:r>
-          </a:p>
-          <a:p>
-            <a:pPr algn="l">
-              <a:spcAft>
-                <a:spcPts val="945"/>
-              </a:spcAft>
-            </a:pPr>
-            <a:r>
-              <a:rPr sz="1600" b="0" i="0">
+                <a:spcPts val="810"/>
+              </a:spcAft>
+            </a:pPr>
+            <a:r>
+              <a:rPr sz="1800" b="0" i="0">
                 <a:solidFill>
                   <a:srgbClr val="5D5A54"/>
                 </a:solidFill>
-                <a:latin typeface="Source Serif 4"/>
-              </a:rPr>
-              <a:t>Decide once, instead of every Saturday.</a:t>
-            </a:r>
-          </a:p>
-        </p:txBody>
-      </p:sp>
-      <p:sp>
-        <p:nvSpPr>
-          <p:cNvPr id="8" name="TextBox 7"/>
-          <p:cNvSpPr txBox="1"/>
-          <p:nvPr/>
-        </p:nvSpPr>
-        <p:spPr>
-          <a:xfrm>
-            <a:off x="822960" y="2862072"/>
-            <a:ext cx="548640" cy="804672"/>
-          </a:xfrm>
-          <a:prstGeom prst="rect">
-            <a:avLst/>
-          </a:prstGeom>
-          <a:noFill/>
-        </p:spPr>
-        <p:txBody>
-          <a:bodyPr wrap="square" anchor="t" lIns="0" rIns="0" tIns="0" bIns="0">
-            <a:spAutoFit/>
-          </a:bodyPr>
-          <a:lstStyle/>
-          <a:p>
-            <a:pPr algn="l">
-              <a:spcAft>
-                <a:spcPts val="1170"/>
-              </a:spcAft>
-            </a:pPr>
-            <a:r>
-              <a:rPr sz="2600" b="1" i="0">
-                <a:solidFill>
-                  <a:srgbClr val="F47B20"/>
-                </a:solidFill>
-                <a:latin typeface="Source Serif 4"/>
-              </a:rPr>
-              <a:t>2</a:t>
-            </a:r>
-          </a:p>
-        </p:txBody>
-      </p:sp>
-      <p:sp>
-        <p:nvSpPr>
-          <p:cNvPr id="9" name="TextBox 8"/>
-          <p:cNvSpPr txBox="1"/>
-          <p:nvPr/>
-        </p:nvSpPr>
-        <p:spPr>
-          <a:xfrm>
-            <a:off x="1463040" y="2898648"/>
-            <a:ext cx="9875520" cy="804672"/>
-          </a:xfrm>
-          <a:prstGeom prst="rect">
-            <a:avLst/>
-          </a:prstGeom>
-          <a:noFill/>
-        </p:spPr>
-        <p:txBody>
-          <a:bodyPr wrap="square" anchor="t" lIns="0" rIns="0" tIns="0" bIns="0">
-            <a:spAutoFit/>
-          </a:bodyPr>
-          <a:lstStyle/>
-          <a:p>
-            <a:pPr algn="l">
-              <a:spcAft>
-                <a:spcPts val="945"/>
-              </a:spcAft>
-            </a:pPr>
-            <a:r>
-              <a:rPr sz="2100" b="1" i="0">
-                <a:solidFill>
-                  <a:srgbClr val="1C1B19"/>
-                </a:solidFill>
-                <a:latin typeface="Source Serif 4"/>
-              </a:rPr>
-              <a:t>Keep it short.</a:t>
-            </a:r>
-          </a:p>
-          <a:p>
-            <a:pPr algn="l">
-              <a:spcAft>
-                <a:spcPts val="945"/>
-              </a:spcAft>
-            </a:pPr>
-            <a:r>
-              <a:rPr sz="1600" b="0" i="0">
-                <a:solidFill>
-                  <a:srgbClr val="5D5A54"/>
-                </a:solidFill>
-                <a:latin typeface="Source Serif 4"/>
-              </a:rPr>
-              <a:t>Long explanations give people something to argue with.</a:t>
-            </a:r>
-          </a:p>
-        </p:txBody>
-      </p:sp>
-      <p:sp>
-        <p:nvSpPr>
-          <p:cNvPr id="10" name="TextBox 9"/>
-          <p:cNvSpPr txBox="1"/>
-          <p:nvPr/>
-        </p:nvSpPr>
-        <p:spPr>
-          <a:xfrm>
-            <a:off x="822960" y="3666744"/>
-            <a:ext cx="548640" cy="804672"/>
-          </a:xfrm>
-          <a:prstGeom prst="rect">
-            <a:avLst/>
-          </a:prstGeom>
-          <a:noFill/>
-        </p:spPr>
-        <p:txBody>
-          <a:bodyPr wrap="square" anchor="t" lIns="0" rIns="0" tIns="0" bIns="0">
-            <a:spAutoFit/>
-          </a:bodyPr>
-          <a:lstStyle/>
-          <a:p>
-            <a:pPr algn="l">
-              <a:spcAft>
-                <a:spcPts val="1170"/>
-              </a:spcAft>
-            </a:pPr>
-            <a:r>
-              <a:rPr sz="2600" b="1" i="0">
-                <a:solidFill>
-                  <a:srgbClr val="F47B20"/>
-                </a:solidFill>
-                <a:latin typeface="Source Serif 4"/>
-              </a:rPr>
-              <a:t>3</a:t>
-            </a:r>
-          </a:p>
-        </p:txBody>
-      </p:sp>
-      <p:sp>
-        <p:nvSpPr>
-          <p:cNvPr id="11" name="TextBox 10"/>
-          <p:cNvSpPr txBox="1"/>
-          <p:nvPr/>
-        </p:nvSpPr>
-        <p:spPr>
-          <a:xfrm>
-            <a:off x="1463040" y="3703320"/>
-            <a:ext cx="9875520" cy="804672"/>
-          </a:xfrm>
-          <a:prstGeom prst="rect">
-            <a:avLst/>
-          </a:prstGeom>
-          <a:noFill/>
-        </p:spPr>
-        <p:txBody>
-          <a:bodyPr wrap="square" anchor="t" lIns="0" rIns="0" tIns="0" bIns="0">
-            <a:spAutoFit/>
-          </a:bodyPr>
-          <a:lstStyle/>
-          <a:p>
-            <a:pPr algn="l">
-              <a:spcAft>
-                <a:spcPts val="945"/>
-              </a:spcAft>
-            </a:pPr>
-            <a:r>
-              <a:rPr sz="2100" b="1" i="0">
-                <a:solidFill>
-                  <a:srgbClr val="1C1B19"/>
-                </a:solidFill>
-                <a:latin typeface="Source Serif 4"/>
-              </a:rPr>
-              <a:t>Repeat, same words.</a:t>
-            </a:r>
-          </a:p>
-          <a:p>
-            <a:pPr algn="l">
-              <a:spcAft>
-                <a:spcPts val="945"/>
-              </a:spcAft>
-            </a:pPr>
-            <a:r>
-              <a:rPr sz="1600" b="0" i="0">
-                <a:solidFill>
-                  <a:srgbClr val="5D5A54"/>
-                </a:solidFill>
-                <a:latin typeface="Source Serif 4"/>
-              </a:rPr>
-              <a:t>Calm and a little boring is hard to argue with.</a:t>
-            </a:r>
-          </a:p>
-        </p:txBody>
-      </p:sp>
-      <p:sp>
-        <p:nvSpPr>
-          <p:cNvPr id="12" name="TextBox 11"/>
-          <p:cNvSpPr txBox="1"/>
-          <p:nvPr/>
-        </p:nvSpPr>
-        <p:spPr>
-          <a:xfrm>
-            <a:off x="822960" y="4471416"/>
-            <a:ext cx="548640" cy="804672"/>
-          </a:xfrm>
-          <a:prstGeom prst="rect">
-            <a:avLst/>
-          </a:prstGeom>
-          <a:noFill/>
-        </p:spPr>
-        <p:txBody>
-          <a:bodyPr wrap="square" anchor="t" lIns="0" rIns="0" tIns="0" bIns="0">
-            <a:spAutoFit/>
-          </a:bodyPr>
-          <a:lstStyle/>
-          <a:p>
-            <a:pPr algn="l">
-              <a:spcAft>
-                <a:spcPts val="1170"/>
-              </a:spcAft>
-            </a:pPr>
-            <a:r>
-              <a:rPr sz="2600" b="1" i="0">
-                <a:solidFill>
-                  <a:srgbClr val="F47B20"/>
-                </a:solidFill>
-                <a:latin typeface="Source Serif 4"/>
-              </a:rPr>
-              <a:t>4</a:t>
-            </a:r>
-          </a:p>
-        </p:txBody>
-      </p:sp>
-      <p:sp>
-        <p:nvSpPr>
-          <p:cNvPr id="13" name="TextBox 12"/>
-          <p:cNvSpPr txBox="1"/>
-          <p:nvPr/>
-        </p:nvSpPr>
-        <p:spPr>
-          <a:xfrm>
-            <a:off x="1463040" y="4507992"/>
-            <a:ext cx="9875520" cy="804672"/>
-          </a:xfrm>
-          <a:prstGeom prst="rect">
-            <a:avLst/>
-          </a:prstGeom>
-          <a:noFill/>
-        </p:spPr>
-        <p:txBody>
-          <a:bodyPr wrap="square" anchor="t" lIns="0" rIns="0" tIns="0" bIns="0">
-            <a:spAutoFit/>
-          </a:bodyPr>
-          <a:lstStyle/>
-          <a:p>
-            <a:pPr algn="l">
-              <a:spcAft>
-                <a:spcPts val="945"/>
-              </a:spcAft>
-            </a:pPr>
-            <a:r>
-              <a:rPr sz="2100" b="1" i="0">
-                <a:solidFill>
-                  <a:srgbClr val="1C1B19"/>
-                </a:solidFill>
-                <a:latin typeface="Source Serif 4"/>
-              </a:rPr>
-              <a:t>Offer a swap.</a:t>
-            </a:r>
-          </a:p>
-          <a:p>
-            <a:pPr algn="l">
-              <a:spcAft>
-                <a:spcPts val="945"/>
-              </a:spcAft>
-            </a:pPr>
-            <a:r>
-              <a:rPr sz="1600" b="0" i="0">
-                <a:solidFill>
-                  <a:srgbClr val="5D5A54"/>
-                </a:solidFill>
-                <a:latin typeface="Source Serif 4"/>
-              </a:rPr>
-              <a:t>"I'll pass, but I'm down for food after."</a:t>
-            </a:r>
-          </a:p>
-        </p:txBody>
-      </p:sp>
-      <p:sp>
-        <p:nvSpPr>
-          <p:cNvPr id="14" name="TextBox 13"/>
-          <p:cNvSpPr txBox="1"/>
-          <p:nvPr/>
-        </p:nvSpPr>
-        <p:spPr>
-          <a:xfrm>
-            <a:off x="822960" y="5276088"/>
-            <a:ext cx="548640" cy="804672"/>
-          </a:xfrm>
-          <a:prstGeom prst="rect">
-            <a:avLst/>
-          </a:prstGeom>
-          <a:noFill/>
-        </p:spPr>
-        <p:txBody>
-          <a:bodyPr wrap="square" anchor="t" lIns="0" rIns="0" tIns="0" bIns="0">
-            <a:spAutoFit/>
-          </a:bodyPr>
-          <a:lstStyle/>
-          <a:p>
-            <a:pPr algn="l">
-              <a:spcAft>
-                <a:spcPts val="1170"/>
-              </a:spcAft>
-            </a:pPr>
-            <a:r>
-              <a:rPr sz="2600" b="1" i="0">
-                <a:solidFill>
-                  <a:srgbClr val="F47B20"/>
-                </a:solidFill>
-                <a:latin typeface="Source Serif 4"/>
-              </a:rPr>
-              <a:t>5</a:t>
-            </a:r>
-          </a:p>
-        </p:txBody>
-      </p:sp>
-      <p:sp>
-        <p:nvSpPr>
-          <p:cNvPr id="15" name="TextBox 14"/>
-          <p:cNvSpPr txBox="1"/>
-          <p:nvPr/>
-        </p:nvSpPr>
-        <p:spPr>
-          <a:xfrm>
-            <a:off x="1463040" y="5312664"/>
-            <a:ext cx="9875520" cy="804672"/>
-          </a:xfrm>
-          <a:prstGeom prst="rect">
-            <a:avLst/>
-          </a:prstGeom>
-          <a:noFill/>
-        </p:spPr>
-        <p:txBody>
-          <a:bodyPr wrap="square" anchor="t" lIns="0" rIns="0" tIns="0" bIns="0">
-            <a:spAutoFit/>
-          </a:bodyPr>
-          <a:lstStyle/>
-          <a:p>
-            <a:pPr algn="l">
-              <a:spcAft>
-                <a:spcPts val="945"/>
-              </a:spcAft>
-            </a:pPr>
-            <a:r>
-              <a:rPr sz="2100" b="1" i="0">
-                <a:solidFill>
-                  <a:srgbClr val="1C1B19"/>
-                </a:solidFill>
-                <a:latin typeface="Source Serif 4"/>
-              </a:rPr>
-              <a:t>Bring a second.</a:t>
-            </a:r>
-          </a:p>
-          <a:p>
-            <a:pPr algn="l">
-              <a:spcAft>
-                <a:spcPts val="945"/>
-              </a:spcAft>
-            </a:pPr>
-            <a:r>
-              <a:rPr sz="1600" b="0" i="0">
-                <a:solidFill>
-                  <a:srgbClr val="5D5A54"/>
-                </a:solidFill>
-                <a:latin typeface="Source Serif 4"/>
-              </a:rPr>
-              <a:t>Agree with one friend before you go.</a:t>
+                <a:latin typeface="Inter Tight"/>
+              </a:rPr>
+              <a:t>Private. Write your code word or emoji, and the adult you'd trust with it.</a:t>
             </a:r>
           </a:p>
         </p:txBody>

--- a/decks/saying-no-without-losing-your-friends-lesson-v2.pptx
+++ b/decks/saying-no-without-losing-your-friends-lesson-v2.pptx
@@ -6458,7 +6458,7 @@
                 </a:solidFill>
                 <a:latin typeface="Source Serif 4"/>
               </a:rPr>
-              <a:t>Know what happens next.</a:t>
+              <a:t>If a friend is in trouble.</a:t>
             </a:r>
           </a:p>
           <a:p>
@@ -6474,7 +6474,7 @@
                 </a:solidFill>
                 <a:latin typeface="Source Serif 4"/>
               </a:rPr>
-              <a:t>If a student says a friend is in trouble with alcohol or drugs, say you want to get help, not get anyone in trouble. Know who you'll walk them to. Massachusetts' Good Samaritan law protects the caller and the person who overdosed from possession charges.</a:t>
+              <a:t>If a student says a friend is in trouble with alcohol or drugs, say you want to get help, not get anyone in trouble. Walk them to a counselor that day. Massachusetts' Good Samaritan law protects the caller and the person who overdosed from possession charges.</a:t>
             </a:r>
           </a:p>
           <a:p>
@@ -7791,6 +7791,45 @@
                 <a:latin typeface="Inter Tight"/>
               </a:rPr>
               <a:t>Beaver Upper School · Counseling</a:t>
+            </a:r>
+          </a:p>
+        </p:txBody>
+      </p:sp>
+      <p:sp>
+        <p:nvSpPr>
+          <p:cNvPr id="8" name="TextBox 7"/>
+          <p:cNvSpPr txBox="1"/>
+          <p:nvPr/>
+        </p:nvSpPr>
+        <p:spPr>
+          <a:xfrm>
+            <a:off x="6766560" y="5897880"/>
+            <a:ext cx="4846320" cy="640080"/>
+          </a:xfrm>
+          <a:prstGeom prst="rect">
+            <a:avLst/>
+          </a:prstGeom>
+          <a:noFill/>
+        </p:spPr>
+        <p:txBody>
+          <a:bodyPr wrap="square" anchor="t" lIns="0" rIns="0" tIns="0" bIns="0">
+            <a:spAutoFit/>
+          </a:bodyPr>
+          <a:lstStyle/>
+          <a:p>
+            <a:pPr algn="r">
+              <a:spcAft>
+                <a:spcPts val="495"/>
+              </a:spcAft>
+            </a:pPr>
+            <a:r>
+              <a:rPr sz="1100" b="0" i="0">
+                <a:solidFill>
+                  <a:srgbClr val="E8E4DA"/>
+                </a:solidFill>
+                <a:latin typeface="Inter Tight"/>
+              </a:rPr>
+              <a:t>Written by Dr. Rick Wilson, with AI-assisted drafting. Every lesson is reviewed and edited by Dr. Wilson.</a:t>
             </a:r>
           </a:p>
         </p:txBody>
